--- a/Curso Gas B/13 - UNE 60670 - Ventilacion y evacuacion de humos/13 - UNE 60670 - Ventilacion y evacuacion de humos - Vídeo 2.pptx
+++ b/Curso Gas B/13 - UNE 60670 - Ventilacion y evacuacion de humos/13 - UNE 60670 - Ventilacion y evacuacion de humos - Vídeo 2.pptx
@@ -25,6 +25,7 @@
     <p:sldId id="273" r:id="rId25"/>
     <p:sldId id="274" r:id="rId26"/>
     <p:sldId id="275" r:id="rId27"/>
+    <p:sldId id="276" r:id="rId28"/>
   </p:sldIdLst>
   <p:sldSz cx="12191695" cy="6858000" type="screen4x3"/>
   <p:notesSz cx="6858000" cy="9144000"/>
@@ -596,12 +597,12 @@
           <a:lstStyle/>
           <a:p>
             <a:r>
-              <a:t>N1: «Ventilación rápida»... ¿es lo mismo que la rejilla?</a:t>
-            </a:r>
-          </a:p>
-          <a:p>
-            <a:r>
-              <a:t>N2: No, y no las confundas nunca. La ventilación rápida es una abertura grande y practicable, o sea, que se abre: una ventana o una puerta de cuatro décimas de metro cuadrado o más que dé directamente al exterior o a un patio de ventilación. Sirve para desalojar de golpe una fuga o los humos de unos fuegos abiertos sin seguridad de llama. La rejilla del capítulo seis, en cambio, es un hueco fijo de renovación de aire; un local puede necesitar las dos cosas. Existe también la ventilación rápida indirecta: se hace a través de otro local que ya tiene ventilación rápida, con una puerta de metro y dos décimas cuadrados o más, siempre que los aparatos sin seguridad no pasen de treinta kilovatios. Truco: directa cuatro décimas; puerta interior uno coma dos.</a:t>
+              <a:t>N1: ¿Y si en una casa vieja el local no da el volumen que pide la tabla?</a:t>
+            </a:r>
+          </a:p>
+          <a:p>
+            <a:r>
+              <a:t>N2: La norma te da una salida, pero con condiciones. Si el local tiene entre el setenta y cinco y el cien por cien del volumen que tocaría, puedes instalar si aumentas un cincuenta por ciento la superficie de ventilación; es decir, compensas el volumen que falta con más rejilla. Si tiene entre el cincuenta y el setenta y cinco por ciento, además de esa rejilla extra necesitas un detector de monóxido que corte el gas automáticamente cuando el CO suba. Y hay un suelo que no se salta nunca: por debajo de seis metros cúbicos de volumen bruto, no se instala, pase lo que pase. Idea: menos volumen se compensa con más ventilación y, si aprietas mucho, con detector de CO; pero seis metros cúbicos es la línea roja.</a:t>
             </a:r>
           </a:p>
         </p:txBody>
@@ -671,12 +672,12 @@
           <a:lstStyle/>
           <a:p>
             <a:r>
-              <a:t>N1: ¿Y si por cómo está construido el local no puedo poner ventilación rápida?</a:t>
-            </a:r>
-          </a:p>
-          <a:p>
-            <a:r>
-              <a:t>N2: Entonces la norma no te deja tirar del enchufe: te obliga a compensar con tecnología. Si un local que debería tener ventilación rápida, por alojar aparatos de tipo A sin seguridad de llama, no puede tenerla, hay que instalar dentro detectores de gas. En viviendas, detectores domésticos homologados; en locales colectivos, comerciales o industriales, detectores que además emitan alarma e inicien el corte. Esos detectores accionan un corte automático de gas mediante una electroválvula normalmente cerrada de rearme manual. La idea es clara: si no puedes desalojar rápido una fuga abriendo una ventana, al menos que un aparato la detecte y cierre el gas antes de que se acumule.</a:t>
+              <a:t>N1: «Ventilación rápida»... ¿es lo mismo que la rejilla?</a:t>
+            </a:r>
+          </a:p>
+          <a:p>
+            <a:r>
+              <a:t>N2: No, y no las confundas nunca. La ventilación rápida es una abertura grande y practicable, o sea, que se abre: una ventana o una puerta de cuatro décimas de metro cuadrado o más que dé directamente al exterior o a un patio de ventilación. Sirve para desalojar de golpe una fuga o los humos de unos fuegos abiertos sin seguridad de llama. La rejilla del capítulo seis, en cambio, es un hueco fijo de renovación de aire; un local puede necesitar las dos cosas. Existe también la ventilación rápida indirecta: se hace a través de otro local que ya tiene ventilación rápida, con una puerta de metro y dos décimas cuadrados o más, siempre que los aparatos sin seguridad no pasen de treinta kilovatios. Truco: directa cuatro décimas; puerta interior uno coma dos.</a:t>
             </a:r>
           </a:p>
         </p:txBody>
@@ -746,12 +747,12 @@
           <a:lstStyle/>
           <a:p>
             <a:r>
-              <a:t>N1: ¿Cualquier patio vale como patio de ventilación?</a:t>
-            </a:r>
-          </a:p>
-          <a:p>
-            <a:r>
-              <a:t>N2: No, tiene que tener un tamaño mínimo para que el aire circule de verdad. Para ser patio de ventilación necesita al menos tres metros cuadrados en planta y que el lado más corto mida un metro o más; así evitas que sea una rendija estrecha por donde no se mueve el aire. Si el patio está techado en su parte de arriba, ese techado tiene que dejar un hueco permanente de comunicación con el exterior de al menos dos metros cuadrados, para que respire. En edificios ya construidos se acepta un patio más pequeño si por abajo tiene una entrada directa de aire del exterior, o un conducto que lo comunique con la calle, de al menos trescientos centímetros cuadrados. En resumen: un patio de verdad, no un hueco angosto tapado.</a:t>
+              <a:t>N1: ¿Y si por cómo está construido el local no puedo poner ventilación rápida?</a:t>
+            </a:r>
+          </a:p>
+          <a:p>
+            <a:r>
+              <a:t>N2: Entonces la norma no te deja tirar del enchufe: te obliga a compensar con tecnología. Si un local que debería tener ventilación rápida, por alojar aparatos de tipo A sin seguridad de llama, no puede tenerla, hay que instalar dentro detectores de gas. En viviendas, detectores domésticos homologados; en locales colectivos, comerciales o industriales, detectores que además emitan alarma e inicien el corte. Esos detectores accionan un corte automático de gas mediante una electroválvula normalmente cerrada de rearme manual. La idea es clara: si no puedes desalojar rápido una fuga abriendo una ventana, al menos que un aparato la detecte y cierre el gas antes de que se acumule.</a:t>
             </a:r>
           </a:p>
         </p:txBody>
@@ -821,12 +822,12 @@
           <a:lstStyle/>
           <a:p>
             <a:r>
-              <a:t>N1: ¿Y si por el patio, además de ventilar, salen los humos de las calderas?</a:t>
-            </a:r>
-          </a:p>
-          <a:p>
-            <a:r>
-              <a:t>N2: Entonces le pedimos más, porque ya no solo mete aire, también saca humos. Cuando un patio se usa para evacuar los productos de la combustión de aparatos de tipo B y C en edificios ya construidos, su superficie en planta debe ser al menos cero coma cinco por NT, con un mínimo de cuatro metros cuadrados. NT es el número total de locales que pueden tener aparatos de tipo B y C que desemboquen en ese patio; los cuentas. O sea, medio metro cuadrado por cada local que echa humos, y nunca menos de cuatro. Y si el patio está cubierto arriba, el techado debe dejar libre el veinticinco por ciento de su sección, con un mínimo también de cuatro metros cuadrados. La lógica: cuantas más calderas tiran humos ahí, más grande el patio.</a:t>
+              <a:t>N1: ¿Cualquier patio vale como patio de ventilación?</a:t>
+            </a:r>
+          </a:p>
+          <a:p>
+            <a:r>
+              <a:t>N2: No, tiene que tener un tamaño mínimo para que el aire circule de verdad. Para ser patio de ventilación necesita al menos tres metros cuadrados en planta y que el lado más corto mida un metro o más; así evitas que sea una rendija estrecha por donde no se mueve el aire. Si el patio está techado en su parte de arriba, ese techado tiene que dejar un hueco permanente de comunicación con el exterior de al menos dos metros cuadrados, para que respire. En edificios ya construidos se acepta un patio más pequeño si por abajo tiene una entrada directa de aire del exterior, o un conducto que lo comunique con la calle, de al menos trescientos centímetros cuadrados. En resumen: un patio de verdad, no un hueco angosto tapado.</a:t>
             </a:r>
           </a:p>
         </p:txBody>
@@ -896,12 +897,12 @@
           <a:lstStyle/>
           <a:p>
             <a:r>
-              <a:t>N1: ¿De qué formas puede respirar el local?</a:t>
-            </a:r>
-          </a:p>
-          <a:p>
-            <a:r>
-              <a:t>N2: Hay dos grandes vías, y esta es la buena, la directa: el local se comunica de forma permanente con el exterior o con un patio de ventilación por sí mismo. Puede ser con una abertura fija en una pared, puerta o ventana que dé directamente fuera; con un conducto individual, horizontal o vertical, donde el aire circula por tiro natural o con un ventilador (y si es con ventilador, hay que cortar el gas si el ventilador se para); o con un conducto colectivo, que funciona por circulación de aire ascendente y es del tipo shunt invertido. El shunt es ese conducto compartido de los edificios; «invertido» aquí es para meter aire, no para sacar humos. Lo importante: en la directa el local respira por su cuenta.</a:t>
+              <a:t>N1: ¿Y si por el patio, además de ventilar, salen los humos de las calderas?</a:t>
+            </a:r>
+          </a:p>
+          <a:p>
+            <a:r>
+              <a:t>N2: Entonces le pedimos más, porque ya no solo mete aire, también saca humos. Cuando un patio se usa para evacuar los productos de la combustión de aparatos de tipo B y C en edificios ya construidos, su superficie en planta debe ser al menos cero coma cinco por NT, con un mínimo de cuatro metros cuadrados. NT es el número total de locales que pueden tener aparatos de tipo B y C que desemboquen en ese patio; los cuentas. O sea, medio metro cuadrado por cada local que echa humos, y nunca menos de cuatro. Y si el patio está cubierto arriba, el techado debe dejar libre el veinticinco por ciento de su sección, con un mínimo también de cuatro metros cuadrados. La lógica: cuantas más calderas tiran humos ahí, más grande el patio.</a:t>
             </a:r>
           </a:p>
         </p:txBody>
@@ -971,12 +972,12 @@
           <a:lstStyle/>
           <a:p>
             <a:r>
-              <a:t>N1: Una rejilla de veinte por diez, ¿deja pasar todo ese hueco de aire?</a:t>
-            </a:r>
-          </a:p>
-          <a:p>
-            <a:r>
-              <a:t>N2: No, y este es un fallo muy común. Una rejilla tiene lamas, unas láminas que tapan parte del hueco, así que por un agujero de doscientos centímetros cuadrados no pasan doscientos de aire, pasan menos. A esa parte que de verdad deja pasar aire la llamamos superficie libre. Por eso la norma exige que la rejilla lleve grabada de fábrica, de forma indeleble, su superficie libre real; y si no es de medida estándar, se marca in situ con punzón, pero siempre indeleble, nunca una pegatina. En el examen, la que cuenta es la superficie libre, no el tamaño del agujero. Un detalle más: las aberturas no deben comunicar con las cámaras de aire de las paredes, para que el aire venga de fuera y no de dentro del muro.</a:t>
+              <a:t>N1: ¿De qué formas puede respirar el local?</a:t>
+            </a:r>
+          </a:p>
+          <a:p>
+            <a:r>
+              <a:t>N2: Hay dos grandes vías, y esta es la buena, la directa: el local se comunica de forma permanente con el exterior o con un patio de ventilación por sí mismo. Puede ser con una abertura fija en una pared, puerta o ventana que dé directamente fuera; con un conducto individual, horizontal o vertical, donde el aire circula por tiro natural o con un ventilador (y si es con ventilador, hay que cortar el gas si el ventilador se para); o con un conducto colectivo, que funciona por circulación de aire ascendente y es del tipo shunt invertido. El shunt es ese conducto compartido de los edificios; «invertido» aquí es para meter aire, no para sacar humos. Lo importante: en la directa el local respira por su cuenta.</a:t>
             </a:r>
           </a:p>
         </p:txBody>
@@ -1046,12 +1047,12 @@
           <a:lstStyle/>
           <a:p>
             <a:r>
-              <a:t>N1: ¿Y la ventilación indirecta cómo funciona?</a:t>
-            </a:r>
-          </a:p>
-          <a:p>
-            <a:r>
-              <a:t>N2: Es cuando el local respira prestado. En vez de dar él mismo al exterior, respira a través de un local contiguo que sí tiene ventilación directa. Para eso tiene que haber una abertura permanente de comunicación entre los dos, y esa abertura tiene que ser al menos tan grande como la ventilación directa que le correspondería al local que le presta el aire. Hay una condición innegociable: el local contiguo no puede ser un dormitorio, ni un baño, ducha o aseo. Tiene toda la lógica: no vas a coger el aire de renovación a través del cuarto donde alguien duerme o se ducha. Resumiendo: directa, el local respira solo; indirecta, respira a través del vecino de al lado, y ese vecino no puede ser un dormitorio ni un baño.</a:t>
+              <a:t>N1: Una rejilla de veinte por diez, ¿deja pasar todo ese hueco de aire?</a:t>
+            </a:r>
+          </a:p>
+          <a:p>
+            <a:r>
+              <a:t>N2: No, y este es un fallo muy común. Una rejilla tiene lamas, unas láminas que tapan parte del hueco, así que por un agujero de doscientos centímetros cuadrados no pasan doscientos de aire, pasan menos. A esa parte que de verdad deja pasar aire la llamamos superficie libre. Por eso la norma exige que la rejilla lleve grabada de fábrica, de forma indeleble, su superficie libre real; y si no es de medida estándar, se marca in situ con punzón, pero siempre indeleble, nunca una pegatina. En el examen, la que cuenta es la superficie libre, no el tamaño del agujero. Un detalle más: las aberturas no deben comunicar con las cámaras de aire de las paredes, para que el aire venga de fuera y no de dentro del muro.</a:t>
             </a:r>
           </a:p>
         </p:txBody>
@@ -1121,12 +1122,12 @@
           <a:lstStyle/>
           <a:p>
             <a:r>
-              <a:t>N1: ¿Cómo sé cuánta rejilla necesito?</a:t>
-            </a:r>
-          </a:p>
-          <a:p>
-            <a:r>
-              <a:t>N2: Con la regla de oro, el número que más se pregunta: cinco centímetros cuadrados de superficie libre por cada kilovatio de la suma de tipo A y B, y nunca menos de ciento veinticinco centímetros cuadrados aunque el aparato sea pequeño. Ejemplo: un local de veinte kilovatios daría cien, pero como el mínimo es ciento veinticinco, pones ciento veinticinco. Ahora los matices. En locales industriales donde la suma de tipo A y B pase de setenta kilovatios, no vale una sola rejilla: hacen falta dos aberturas, una arriba y otra abajo, con ventilación cruzada, cada una a cinco por kilovatio. Pero una vivienda nunca se considera industrial, aunque sume mucho. Y si ventilas por un conducto largo, de más de tres metros, sube la sección un cincuenta por ciento; de más de diez metros, al menos un ciento cincuenta por ciento. Si hay dos ventilaciones, ninguna baja de cincuenta centímetros cuadrados.</a:t>
+              <a:t>N1: ¿Y la ventilación indirecta cómo funciona?</a:t>
+            </a:r>
+          </a:p>
+          <a:p>
+            <a:r>
+              <a:t>N2: Es cuando el local respira prestado. En vez de dar él mismo al exterior, respira a través de un local contiguo que sí tiene ventilación directa. Para eso tiene que haber una abertura permanente de comunicación entre los dos, y esa abertura tiene que ser al menos tan grande como la ventilación directa que le correspondería al local que le presta el aire. Hay una condición innegociable: el local contiguo no puede ser un dormitorio, ni un baño, ducha o aseo. Tiene toda la lógica: no vas a coger el aire de renovación a través del cuarto donde alguien duerme o se ducha. Resumiendo: directa, el local respira solo; indirecta, respira a través del vecino de al lado, y ese vecino no puede ser un dormitorio ni un baño.</a:t>
             </a:r>
           </a:p>
         </p:txBody>
@@ -1196,12 +1197,12 @@
           <a:lstStyle/>
           <a:p>
             <a:r>
-              <a:t>N1: ¿Y a qué altura pongo la rejilla, arriba o abajo?</a:t>
-            </a:r>
-          </a:p>
-          <a:p>
-            <a:r>
-              <a:t>N2: Aquí el razonamiento es precioso porque es puro sentido común: pones la abertura donde tiende a acumularse el gas si hay una fuga. El gas natural es ligero y sube, así que la ventilación va arriba, a un metro ochenta o más del suelo y cerca del techo, por donde escapa. El GLP, butano o propano, es pesado y baja, así que la ventilación va abajo, a quince centímetros o menos del suelo, por donde se acumula. Cuando hay bastante tipo A, por encima de dieciséis kilovatios, necesitas dos aberturas, una arriba y otra abajo, para meter aire limpio y sacar humos; y en ese caso la de arriba siempre tiene que ser directa, porque los humos calientes tienen que salir de verdad al exterior, no a otro cuarto. Ponerla al revés es no evacuar el gas justo por donde se junta.</a:t>
+              <a:t>N1: ¿Cómo sé cuánta rejilla necesito?</a:t>
+            </a:r>
+          </a:p>
+          <a:p>
+            <a:r>
+              <a:t>N2: Con la regla de oro, el número que más se pregunta: cinco centímetros cuadrados de superficie libre por cada kilovatio de la suma de tipo A y B, y nunca menos de ciento veinticinco centímetros cuadrados aunque el aparato sea pequeño. Ejemplo: un local de veinte kilovatios daría cien, pero como el mínimo es ciento veinticinco, pones ciento veinticinco. Ahora los matices. En locales industriales donde la suma de tipo A y B pase de setenta kilovatios, no vale una sola rejilla: hacen falta dos aberturas, una arriba y otra abajo, con ventilación cruzada, cada una a cinco por kilovatio. Pero una vivienda nunca se considera industrial, aunque sume mucho. Y si ventilas por un conducto largo, de más de tres metros, sube la sección un cincuenta por ciento; de más de diez metros, al menos un ciento cincuenta por ciento. Si hay dos ventilaciones, ninguna baja de cincuenta centímetros cuadrados.</a:t>
             </a:r>
           </a:p>
         </p:txBody>
@@ -1271,12 +1272,12 @@
           <a:lstStyle/>
           <a:p>
             <a:r>
-              <a:t>N1: ¿Por qué unos generadores de aire caliente piden menos rejilla que otros?</a:t>
-            </a:r>
-          </a:p>
-          <a:p>
-            <a:r>
-              <a:t>N2: Fíjate en de dónde cogen el aire de combustión, que es la clave. Si el generador toma el aire del interior del local, tiene que cumplir la ventilación normal: cinco centímetros cuadrados por kilovatio, mínimo ciento veinticinco. Pero si toma el aire de combustión del exterior, la exigencia baja a uno coma cinco centímetros cuadrados por kilovatio, con un mínimo de setenta. ¿Por qué menos? Porque no está robando aire del local, así que hay que reponer mucho menos. Es el mismo principio que hace del tipo C el más cómodo: quien respira de fuera, molesta menos al local. Y si el aire de fuera llega por un conducto de más de tres metros, se aumenta un cincuenta por ciento la sección.</a:t>
+              <a:t>N1: ¿Y a qué altura pongo la rejilla, arriba o abajo?</a:t>
+            </a:r>
+          </a:p>
+          <a:p>
+            <a:r>
+              <a:t>N2: Aquí el razonamiento es precioso porque es puro sentido común: pones la abertura donde tiende a acumularse el gas si hay una fuga. El gas natural es ligero y sube, así que la ventilación va arriba, a un metro ochenta o más del suelo y cerca del techo, por donde escapa. El GLP, butano o propano, es pesado y baja, así que la ventilación va abajo, a quince centímetros o menos del suelo, por donde se acumula. Cuando hay bastante tipo A, por encima de dieciséis kilovatios, necesitas dos aberturas, una arriba y otra abajo, para meter aire limpio y sacar humos; y en ese caso la de arriba siempre tiene que ser directa, porque los humos calientes tienen que salir de verdad al exterior, no a otro cuarto. Ponerla al revés es no evacuar el gas justo por donde se junta.</a:t>
             </a:r>
           </a:p>
         </p:txBody>
@@ -1421,6 +1422,81 @@
           <a:lstStyle/>
           <a:p>
             <a:r>
+              <a:t>N1: ¿Por qué unos generadores de aire caliente piden menos rejilla que otros?</a:t>
+            </a:r>
+          </a:p>
+          <a:p>
+            <a:r>
+              <a:t>N2: Fíjate en de dónde cogen el aire de combustión, que es la clave. Si el generador toma el aire del interior del local, tiene que cumplir la ventilación normal: cinco centímetros cuadrados por kilovatio, mínimo ciento veinticinco. Pero si toma el aire de combustión del exterior, la exigencia baja a uno coma cinco centímetros cuadrados por kilovatio, con un mínimo de setenta. ¿Por qué menos? Porque no está robando aire del local, así que hay que reponer mucho menos. Es el mismo principio que hace del tipo C el más cómodo: quien respira de fuera, molesta menos al local. Y si el aire de fuera llega por un conducto de más de tres metros, se aumenta un cincuenta por ciento la sección.</a:t>
+            </a:r>
+          </a:p>
+        </p:txBody>
+      </p:sp>
+      <p:sp>
+        <p:nvSpPr>
+          <p:cNvPr id="4" name="Slide Number Placeholder 3"/>
+          <p:cNvSpPr>
+            <a:spLocks noGrp="1"/>
+          </p:cNvSpPr>
+          <p:nvPr>
+            <p:ph type="sldNum" idx="5" sz="quarter"/>
+          </p:nvPr>
+        </p:nvSpPr>
+        <p:spPr/>
+      </p:sp>
+    </p:spTree>
+  </p:cSld>
+  <p:clrMapOvr>
+    <a:masterClrMapping/>
+  </p:clrMapOvr>
+</p:notes>
+</file>
+
+<file path=ppt/notesSlides/notesSlide21.xml><?xml version="1.0" encoding="utf-8"?>
+<p:notes xmlns:a="http://schemas.openxmlformats.org/drawingml/2006/main" xmlns:p="http://schemas.openxmlformats.org/presentationml/2006/main" xmlns:r="http://schemas.openxmlformats.org/officeDocument/2006/relationships">
+  <p:cSld>
+    <p:spTree>
+      <p:nvGrpSpPr>
+        <p:cNvPr id="1" name=""/>
+        <p:cNvGrpSpPr/>
+        <p:nvPr/>
+      </p:nvGrpSpPr>
+      <p:grpSpPr>
+        <a:xfrm>
+          <a:off x="0" y="0"/>
+          <a:ext cx="0" cy="0"/>
+          <a:chOff x="0" y="0"/>
+          <a:chExt cx="0" cy="0"/>
+        </a:xfrm>
+      </p:grpSpPr>
+      <p:sp>
+        <p:nvSpPr>
+          <p:cNvPr id="2" name="Slide Image Placeholder 1"/>
+          <p:cNvSpPr>
+            <a:spLocks noGrp="1"/>
+          </p:cNvSpPr>
+          <p:nvPr>
+            <p:ph type="sldImg" idx="2"/>
+          </p:nvPr>
+        </p:nvSpPr>
+        <p:spPr/>
+      </p:sp>
+      <p:sp>
+        <p:nvSpPr>
+          <p:cNvPr id="3" name="Notes Placeholder 2"/>
+          <p:cNvSpPr>
+            <a:spLocks noGrp="1"/>
+          </p:cNvSpPr>
+          <p:nvPr>
+            <p:ph type="body" idx="3" sz="quarter"/>
+          </p:nvPr>
+        </p:nvSpPr>
+        <p:spPr/>
+        <p:txBody>
+          <a:bodyPr/>
+          <a:lstStyle/>
+          <a:p>
+            <a:r>
               <a:t>N1: Profe, son muchos números. ¿Cómo los ordeno en la cabeza?</a:t>
             </a:r>
           </a:p>
@@ -1504,16 +1580,7 @@
         <p:txBody>
           <a:bodyPr/>
           <a:lstStyle/>
-          <a:p>
-            <a:r>
-              <a:t>N1: ¿Cuándo se considera que dos habitaciones son una sola?</a:t>
-            </a:r>
-          </a:p>
-          <a:p>
-            <a:r>
-              <a:t>N2: Cuando están comunicadas de forma permanente por un hueco grande. En concreto, si en la misma planta hay una o varias aberturas permanentes cuya superficie libre total llega a un metro y medio cuadrado o más, la norma trata los dos locales como uno solo. ¿Para qué sirve esto? Para sumar volúmenes y calcular la ventilación de todo el conjunto de golpe. Piensa en el típico salón-cocina abierto de las casas nuevas: a efectos de gas es un único local. Dos condiciones que no se te escapen: el hueco tiene que ser permanente, no una puerta que se cierra, y tiene que ser en la misma planta.</a:t>
-            </a:r>
-          </a:p>
+          <a:p/>
         </p:txBody>
       </p:sp>
       <p:sp>
@@ -1581,12 +1648,12 @@
           <a:lstStyle/>
           <a:p>
             <a:r>
-              <a:t>N1: ¿Y eso de «zona exterior»? ¿Un balcón cuenta?</a:t>
-            </a:r>
-          </a:p>
-          <a:p>
-            <a:r>
-              <a:t>N2: Puede contar, si ventila lo suficiente. La norma considera zona exterior un local, galería, terraza o balcón que tenga una abertura permanentemente abierta que dé directamente al exterior o a un patio de ventilación, con dos condiciones: que su superficie libre sea de metro y medio cuadrado o más, y que el borde superior de esa abertura esté a medio metro o menos del techo. ¿Por qué el borde tiene que estar arriba? Porque el aire caliente y los humos escapan por arriba: si el hueco está pegado al techo, sale todo solo. Ser zona exterior relaja muchos requisitos; por ejemplo, ahí sí puede ir un tipo B solo de agua caliente. Es casi como estar en la calle.</a:t>
+              <a:t>N1: ¿Cuándo se considera que dos habitaciones son una sola?</a:t>
+            </a:r>
+          </a:p>
+          <a:p>
+            <a:r>
+              <a:t>N2: Cuando están comunicadas de forma permanente por un hueco grande. En concreto, si en la misma planta hay una o varias aberturas permanentes cuya superficie libre total llega a un metro y medio cuadrado o más, la norma trata los dos locales como uno solo. ¿Para qué sirve esto? Para sumar volúmenes y calcular la ventilación de todo el conjunto de golpe. Piensa en el típico salón-cocina abierto de las casas nuevas: a efectos de gas es un único local. Dos condiciones que no se te escapen: el hueco tiene que ser permanente, no una puerta que se cierra, y tiene que ser en la misma planta.</a:t>
             </a:r>
           </a:p>
         </p:txBody>
@@ -1656,12 +1723,12 @@
           <a:lstStyle/>
           <a:p>
             <a:r>
-              <a:t>N1: ¿Todos los locales tienen que tener un volumen mínimo?</a:t>
-            </a:r>
-          </a:p>
-          <a:p>
-            <a:r>
-              <a:t>N2: No, y aquí está la clave: solo lo exige el tipo A. ¿Por qué solo él? Porque el tipo A suelta los humos dentro del local, y necesita un colchón de aire grande para diluirlos. El tipo B y el tipo C echan los humos fuera, así que no dependen del tamaño de la habitación y no piden volumen mínimo. Regla directa: si en el local hay algún tipo A, mides el volumen; si solo hay B o C, te olvidas del volumen. Caso especial: el armario-cocina, ese mueble cerrado donde va la cocina, no necesita volumen mínimo, pero el local contiguo con el que comunica sí tiene que cumplirlo. El armario no vive solo.</a:t>
+              <a:t>N1: ¿Y eso de «zona exterior»? ¿Un balcón cuenta?</a:t>
+            </a:r>
+          </a:p>
+          <a:p>
+            <a:r>
+              <a:t>N2: Puede contar, si ventila lo suficiente. La norma considera zona exterior un local, galería, terraza o balcón que tenga una abertura permanentemente abierta que dé directamente al exterior o a un patio de ventilación, con dos condiciones: que su superficie libre sea de metro y medio cuadrado o más, y que el borde superior de esa abertura esté a medio metro o menos del techo. ¿Por qué el borde tiene que estar arriba? Porque el aire caliente y los humos escapan por arriba: si el hueco está pegado al techo, sale todo solo. Ser zona exterior relaja muchos requisitos; por ejemplo, ahí sí puede ir un tipo B solo de agua caliente. Es casi como estar en la calle.</a:t>
             </a:r>
           </a:p>
         </p:txBody>
@@ -1731,12 +1798,12 @@
           <a:lstStyle/>
           <a:p>
             <a:r>
-              <a:t>N1: ¿Cómo calculo el volumen de una cocina de gas?</a:t>
-            </a:r>
-          </a:p>
-          <a:p>
-            <a:r>
-              <a:t>N2: Con la tabla uno, que es sencilla. Primero sumas el consumo de todos los aparatos de tipo A que no sean de calefacción del local; eso es tu total en kilovatios. Si ese total es de dieciséis kilovatios o menos, basta con ocho metros cúbicos. Si pasa de dieciséis, el volumen mínimo es ese número de kilovatios menos ocho, tomado como metros cúbicos. Ejemplo: veinte kilovatios darían veinte menos ocho, doce metros cúbicos. Y ojo a la palabra «bruto»: se mide el volumen entre las paredes del local, sin descontar los muebles ni la nevera. Se cuenta el hueco entero, porque el aire está ahí aunque haya un armario delante.</a:t>
+              <a:t>N1: ¿Todos los locales tienen que tener un volumen mínimo?</a:t>
+            </a:r>
+          </a:p>
+          <a:p>
+            <a:r>
+              <a:t>N2: No, y aquí está la clave: solo lo exige el tipo A. ¿Por qué solo él? Porque el tipo A suelta los humos dentro del local, y necesita un colchón de aire grande para diluirlos. El tipo B y el tipo C echan los humos fuera, así que no dependen del tamaño de la habitación y no piden volumen mínimo. Regla directa: si en el local hay algún tipo A, mides el volumen; si solo hay B o C, te olvidas del volumen. Caso especial: el armario-cocina, ese mueble cerrado donde va la cocina, no necesita volumen mínimo, pero el local contiguo con el que comunica sí tiene que cumplirlo. El armario no vive solo.</a:t>
             </a:r>
           </a:p>
         </p:txBody>
@@ -1806,12 +1873,12 @@
           <a:lstStyle/>
           <a:p>
             <a:r>
-              <a:t>N1: ¿Y en una cocina industrial con mucha potencia?</a:t>
-            </a:r>
-          </a:p>
-          <a:p>
-            <a:r>
-              <a:t>N2: Cuando el total de tipo A no calefacción pasa de treinta kilovatios, ya no basta con el volumen: el local necesita extracción mecánica, un ventilador que renueve el aire de forma continua mientras funcionan los aparatos, y un corte de gas que salte si ese extractor falla. Ese corte es una electroválvula normalmente cerrada, mandada por un presostato diferencial o un interruptor de flujo puesto en el conducto de extracción; si el aire deja de moverse, corta el gas. El rearme es manual y a mano, sin herramientas, lo que se llama accesibilidad de grado uno. El caudal mínimo sale de la fórmula: diez por la superficie en planta más dos por el consumo. Y te libras de todo esto si el volumen dividido por el consumo pasa de diez: mucho aire por kilovatio.</a:t>
+              <a:t>N1: ¿Cómo calculo el volumen de una cocina de gas?</a:t>
+            </a:r>
+          </a:p>
+          <a:p>
+            <a:r>
+              <a:t>N2: Con la tabla uno, que es sencilla. Primero sumas el consumo de todos los aparatos de tipo A que no sean de calefacción del local; eso es tu total en kilovatios. Si ese total es de dieciséis kilovatios o menos, basta con ocho metros cúbicos. Si pasa de dieciséis, el volumen mínimo es ese número de kilovatios menos ocho, tomado como metros cúbicos. Ejemplo: veinte kilovatios darían veinte menos ocho, doce metros cúbicos. Y ojo a la palabra «bruto»: se mide el volumen entre las paredes del local, sin descontar los muebles ni la nevera. Se cuenta el hueco entero, porque el aire está ahí aunque haya un armario delante.</a:t>
             </a:r>
           </a:p>
         </p:txBody>
@@ -1881,12 +1948,12 @@
           <a:lstStyle/>
           <a:p>
             <a:r>
-              <a:t>N1: ¿La calefacción de tipo A usa la misma fórmula que la cocina?</a:t>
-            </a:r>
-          </a:p>
-          <a:p>
-            <a:r>
-              <a:t>N2: No, y aquí está el error de cálculo más típico, presta atención. Para calefacción de tipo A el volumen mínimo es once por el consumo en kilovatios, con un mínimo de quince metros cúbicos. Ese multiplicar por once es solo para calefacción; no lo apliques nunca a una cocina, que va por la tabla uno de antes. ¿Y si en el mismo local tienes cocina de tipo A y calefacción de tipo A a la vez? Entonces calculas cada uno con su fórmula y sumas los dos resultados. No mezcles las dos cuentas en una; sepáralas y súmalas. Cocción por su tabla, calefacción por el once, y al final se juntan.</a:t>
+              <a:t>N1: ¿Y en una cocina industrial con mucha potencia?</a:t>
+            </a:r>
+          </a:p>
+          <a:p>
+            <a:r>
+              <a:t>N2: Cuando el total de tipo A no calefacción pasa de treinta kilovatios, ya no basta con el volumen: el local necesita extracción mecánica, un ventilador que renueve el aire de forma continua mientras funcionan los aparatos, y un corte de gas que salte si ese extractor falla. Ese corte es una electroválvula normalmente cerrada, mandada por un presostato diferencial o un interruptor de flujo puesto en el conducto de extracción; si el aire deja de moverse, corta el gas. El rearme es manual y a mano, sin herramientas, lo que se llama accesibilidad de grado uno. El caudal mínimo sale de la fórmula: diez por la superficie en planta más dos por el consumo. Y te libras de todo esto si el volumen dividido por el consumo pasa de diez: mucho aire por kilovatio.</a:t>
             </a:r>
           </a:p>
         </p:txBody>
@@ -1956,12 +2023,12 @@
           <a:lstStyle/>
           <a:p>
             <a:r>
-              <a:t>N1: ¿Y si en una casa vieja el local no da el volumen que pide la tabla?</a:t>
-            </a:r>
-          </a:p>
-          <a:p>
-            <a:r>
-              <a:t>N2: La norma te da una salida, pero con condiciones. Si el local tiene entre el setenta y cinco y el cien por cien del volumen que tocaría, puedes instalar si aumentas un cincuenta por ciento la superficie de ventilación; es decir, compensas el volumen que falta con más rejilla. Si tiene entre el cincuenta y el setenta y cinco por ciento, además de esa rejilla extra necesitas un detector de monóxido que corte el gas automáticamente cuando el CO suba. Y hay un suelo que no se salta nunca: por debajo de seis metros cúbicos de volumen bruto, no se instala, pase lo que pase. Idea: menos volumen se compensa con más ventilación y, si aprietas mucho, con detector de CO; pero seis metros cúbicos es la línea roja.</a:t>
+              <a:t>N1: ¿La calefacción de tipo A usa la misma fórmula que la cocina?</a:t>
+            </a:r>
+          </a:p>
+          <a:p>
+            <a:r>
+              <a:t>N2: No, y aquí está el error de cálculo más típico, presta atención. Para calefacción de tipo A el volumen mínimo es once por el consumo en kilovatios, con un mínimo de quince metros cúbicos. Ese multiplicar por once es solo para calefacción; no lo apliques nunca a una cocina, que va por la tabla uno de antes. ¿Y si en el mismo local tienes cocina de tipo A y calefacción de tipo A a la vez? Entonces calculas cada uno con su fórmula y sumas los dos resultados. No mezcles las dos cuentas en una; sepáralas y súmalas. Cocción por su tabla, calefacción por el once, y al final se juntan.</a:t>
             </a:r>
           </a:p>
         </p:txBody>
@@ -5036,7 +5103,7 @@
             <a:r>
               <a:rPr sz="1400" b="1" i="0">
                 <a:solidFill>
-                  <a:srgbClr val="CADCFC"/>
+                  <a:srgbClr val="F4A24C"/>
                 </a:solidFill>
                 <a:latin typeface="Montserrat"/>
               </a:rPr>
@@ -5047,13 +5114,57 @@
       </p:sp>
       <p:sp>
         <p:nvSpPr>
-          <p:cNvPr id="4" name="TextBox 3"/>
+          <p:cNvPr id="4" name="Rounded Rectangle 3"/>
+          <p:cNvSpPr/>
+          <p:nvPr/>
+        </p:nvSpPr>
+        <p:spPr>
+          <a:xfrm>
+            <a:off x="868680" y="2057400"/>
+            <a:ext cx="1463040" cy="82296"/>
+          </a:xfrm>
+          <a:prstGeom prst="roundRect">
+            <a:avLst/>
+          </a:prstGeom>
+          <a:solidFill>
+            <a:srgbClr val="E8801A"/>
+          </a:solidFill>
+          <a:ln>
+            <a:noFill/>
+          </a:ln>
+          <a:effectLst/>
+        </p:spPr>
+        <p:style>
+          <a:lnRef idx="1">
+            <a:schemeClr val="accent1"/>
+          </a:lnRef>
+          <a:fillRef idx="3">
+            <a:schemeClr val="accent1"/>
+          </a:fillRef>
+          <a:effectRef idx="2">
+            <a:schemeClr val="accent1"/>
+          </a:effectRef>
+          <a:fontRef idx="minor">
+            <a:schemeClr val="lt1"/>
+          </a:fontRef>
+        </p:style>
+        <p:txBody>
+          <a:bodyPr rtlCol="0" anchor="ctr"/>
+          <a:lstStyle/>
+          <a:p>
+            <a:pPr algn="ctr"/>
+          </a:p>
+        </p:txBody>
+      </p:sp>
+      <p:sp>
+        <p:nvSpPr>
+          <p:cNvPr id="5" name="TextBox 4"/>
           <p:cNvSpPr txBox="1"/>
           <p:nvPr/>
         </p:nvSpPr>
         <p:spPr>
           <a:xfrm>
-            <a:off x="822960" y="2194560"/>
+            <a:off x="822960" y="2286000"/>
             <a:ext cx="10515600" cy="2011680"/>
           </a:xfrm>
           <a:prstGeom prst="rect">
@@ -5092,7 +5203,7 @@
       </p:sp>
       <p:sp>
         <p:nvSpPr>
-          <p:cNvPr id="5" name="TextBox 4"/>
+          <p:cNvPr id="6" name="TextBox 5"/>
           <p:cNvSpPr txBox="1"/>
           <p:nvPr/>
         </p:nvSpPr>
@@ -5216,7 +5327,7 @@
                 </a:solidFill>
                 <a:latin typeface="Montserrat"/>
               </a:rPr>
-              <a:t>010 / 020</a:t>
+              <a:t>010 / 021</a:t>
             </a:r>
           </a:p>
         </p:txBody>
@@ -5264,7 +5375,7 @@
         <p:spPr>
           <a:xfrm>
             <a:off x="822960" y="457200"/>
-            <a:ext cx="8229600" cy="365760"/>
+            <a:ext cx="10058400" cy="365760"/>
           </a:xfrm>
           <a:prstGeom prst="rect">
             <a:avLst/>
@@ -5278,13 +5389,13 @@
           <a:lstStyle/>
           <a:p>
             <a:r>
-              <a:rPr sz="1200" b="1" i="0">
-                <a:solidFill>
-                  <a:srgbClr val="64748B"/>
-                </a:solidFill>
-                <a:latin typeface="Montserrat"/>
-              </a:rPr>
-              <a:t>VENTILACIÓN RÁPIDA</a:t>
+              <a:rPr sz="1300" b="1" i="0">
+                <a:solidFill>
+                  <a:srgbClr val="E8801A"/>
+                </a:solidFill>
+                <a:latin typeface="Montserrat"/>
+              </a:rPr>
+              <a:t>VOLUMEN · OBRA VIEJA</a:t>
             </a:r>
           </a:p>
         </p:txBody>
@@ -5312,26 +5423,70 @@
           <a:lstStyle/>
           <a:p>
             <a:r>
-              <a:rPr sz="2700" b="1" i="0">
+              <a:rPr sz="2800" b="1" i="0">
                 <a:solidFill>
                   <a:srgbClr val="1E2761"/>
                 </a:solidFill>
                 <a:latin typeface="Montserrat"/>
               </a:rPr>
-              <a:t>Qué es la ventilación rápida</a:t>
-            </a:r>
-          </a:p>
-        </p:txBody>
-      </p:sp>
-      <p:sp>
-        <p:nvSpPr>
-          <p:cNvPr id="7" name="TextBox 6"/>
+              <a:t>Edificios ya construidos</a:t>
+            </a:r>
+          </a:p>
+        </p:txBody>
+      </p:sp>
+      <p:sp>
+        <p:nvSpPr>
+          <p:cNvPr id="7" name="Rounded Rectangle 6"/>
+          <p:cNvSpPr/>
+          <p:nvPr/>
+        </p:nvSpPr>
+        <p:spPr>
+          <a:xfrm>
+            <a:off x="868680" y="1627632"/>
+            <a:ext cx="2011680" cy="73152"/>
+          </a:xfrm>
+          <a:prstGeom prst="roundRect">
+            <a:avLst/>
+          </a:prstGeom>
+          <a:solidFill>
+            <a:srgbClr val="E8801A"/>
+          </a:solidFill>
+          <a:ln>
+            <a:noFill/>
+          </a:ln>
+          <a:effectLst/>
+        </p:spPr>
+        <p:style>
+          <a:lnRef idx="1">
+            <a:schemeClr val="accent1"/>
+          </a:lnRef>
+          <a:fillRef idx="3">
+            <a:schemeClr val="accent1"/>
+          </a:fillRef>
+          <a:effectRef idx="2">
+            <a:schemeClr val="accent1"/>
+          </a:effectRef>
+          <a:fontRef idx="minor">
+            <a:schemeClr val="lt1"/>
+          </a:fontRef>
+        </p:style>
+        <p:txBody>
+          <a:bodyPr rtlCol="0" anchor="ctr"/>
+          <a:lstStyle/>
+          <a:p>
+            <a:pPr algn="ctr"/>
+          </a:p>
+        </p:txBody>
+      </p:sp>
+      <p:sp>
+        <p:nvSpPr>
+          <p:cNvPr id="8" name="TextBox 7"/>
           <p:cNvSpPr txBox="1"/>
           <p:nvPr/>
         </p:nvSpPr>
         <p:spPr>
           <a:xfrm>
-            <a:off x="822960" y="1920240"/>
+            <a:off x="822960" y="1965960"/>
             <a:ext cx="4983480" cy="4206240"/>
           </a:xfrm>
           <a:prstGeom prst="rect">
@@ -5347,17 +5502,17 @@
           <a:p>
             <a:pPr>
               <a:spcAft>
-                <a:spcPts val="1000"/>
+                <a:spcPts val="1100"/>
               </a:spcAft>
             </a:pPr>
             <a:r>
               <a:rPr sz="1600" b="1" i="0">
                 <a:solidFill>
-                  <a:srgbClr val="2E3A80"/>
-                </a:solidFill>
-                <a:latin typeface="Montserrat"/>
-              </a:rPr>
-              <a:t>•  </a:t>
+                  <a:srgbClr val="E8801A"/>
+                </a:solidFill>
+                <a:latin typeface="Montserrat"/>
+              </a:rPr>
+              <a:t>▸  </a:t>
             </a:r>
             <a:r>
               <a:rPr sz="1600" b="0" i="0">
@@ -5366,23 +5521,23 @@
                 </a:solidFill>
                 <a:latin typeface="Montserrat"/>
               </a:rPr>
-              <a:t>Abertura practicable ≥ 0,4 m²</a:t>
+              <a:t>75-100% del volumen: +50% de rejilla</a:t>
             </a:r>
           </a:p>
           <a:p>
             <a:pPr>
               <a:spcAft>
-                <a:spcPts val="1000"/>
+                <a:spcPts val="1100"/>
               </a:spcAft>
             </a:pPr>
             <a:r>
               <a:rPr sz="1600" b="1" i="0">
                 <a:solidFill>
-                  <a:srgbClr val="2E3A80"/>
-                </a:solidFill>
-                <a:latin typeface="Montserrat"/>
-              </a:rPr>
-              <a:t>•  </a:t>
+                  <a:srgbClr val="E8801A"/>
+                </a:solidFill>
+                <a:latin typeface="Montserrat"/>
+              </a:rPr>
+              <a:t>▸  </a:t>
             </a:r>
             <a:r>
               <a:rPr sz="1600" b="0" i="0">
@@ -5391,23 +5546,23 @@
                 </a:solidFill>
                 <a:latin typeface="Montserrat"/>
               </a:rPr>
-              <a:t>Ventana o puerta al exterior o patio</a:t>
+              <a:t>50-75%: además detector de CO</a:t>
             </a:r>
           </a:p>
           <a:p>
             <a:pPr>
               <a:spcAft>
-                <a:spcPts val="1000"/>
+                <a:spcPts val="1100"/>
               </a:spcAft>
             </a:pPr>
             <a:r>
               <a:rPr sz="1600" b="1" i="0">
                 <a:solidFill>
-                  <a:srgbClr val="2E3A80"/>
-                </a:solidFill>
-                <a:latin typeface="Montserrat"/>
-              </a:rPr>
-              <a:t>•  </a:t>
+                  <a:srgbClr val="E8801A"/>
+                </a:solidFill>
+                <a:latin typeface="Montserrat"/>
+              </a:rPr>
+              <a:t>▸  </a:t>
             </a:r>
             <a:r>
               <a:rPr sz="1600" b="0" i="0">
@@ -5416,14 +5571,14 @@
                 </a:solidFill>
                 <a:latin typeface="Montserrat"/>
               </a:rPr>
-              <a:t>Indirecta: puerta ≥ 1,2 m² y ≤ 30 kW</a:t>
-            </a:r>
-          </a:p>
-        </p:txBody>
-      </p:sp>
-      <p:sp>
-        <p:nvSpPr>
-          <p:cNvPr id="8" name="imgph" descr="IMGQ:kitchen window open"/>
+              <a:t>Nunca por debajo de 6 m³</a:t>
+            </a:r>
+          </a:p>
+        </p:txBody>
+      </p:sp>
+      <p:sp>
+        <p:nvSpPr>
+          <p:cNvPr id="9" name="imgph" descr="IMGQ:old apartment kitchen renovation"/>
           <p:cNvSpPr/>
           <p:nvPr/>
         </p:nvSpPr>
@@ -5469,7 +5624,7 @@
       </p:sp>
       <p:sp>
         <p:nvSpPr>
-          <p:cNvPr id="9" name="TextBox 8"/>
+          <p:cNvPr id="10" name="TextBox 9"/>
           <p:cNvSpPr txBox="1"/>
           <p:nvPr/>
         </p:nvSpPr>
@@ -5509,7 +5664,7 @@
                 </a:solidFill>
                 <a:latin typeface="Montserrat"/>
               </a:rPr>
-              <a:t>kitchen window open</a:t>
+              <a:t>old apartment kitchen renovation</a:t>
             </a:r>
           </a:p>
         </p:txBody>
@@ -5606,7 +5761,7 @@
                 </a:solidFill>
                 <a:latin typeface="Montserrat"/>
               </a:rPr>
-              <a:t>011 / 020</a:t>
+              <a:t>011 / 021</a:t>
             </a:r>
           </a:p>
         </p:txBody>
@@ -5654,7 +5809,7 @@
         <p:spPr>
           <a:xfrm>
             <a:off x="822960" y="457200"/>
-            <a:ext cx="8229600" cy="365760"/>
+            <a:ext cx="10058400" cy="365760"/>
           </a:xfrm>
           <a:prstGeom prst="rect">
             <a:avLst/>
@@ -5668,9 +5823,9 @@
           <a:lstStyle/>
           <a:p>
             <a:r>
-              <a:rPr sz="1200" b="1" i="0">
-                <a:solidFill>
-                  <a:srgbClr val="64748B"/>
+              <a:rPr sz="1300" b="1" i="0">
+                <a:solidFill>
+                  <a:srgbClr val="E8801A"/>
                 </a:solidFill>
                 <a:latin typeface="Montserrat"/>
               </a:rPr>
@@ -5702,26 +5857,70 @@
           <a:lstStyle/>
           <a:p>
             <a:r>
-              <a:rPr sz="2700" b="1" i="0">
+              <a:rPr sz="2800" b="1" i="0">
                 <a:solidFill>
                   <a:srgbClr val="1E2761"/>
                 </a:solidFill>
                 <a:latin typeface="Montserrat"/>
               </a:rPr>
-              <a:t>Si no cabe ventilación rápida</a:t>
-            </a:r>
-          </a:p>
-        </p:txBody>
-      </p:sp>
-      <p:sp>
-        <p:nvSpPr>
-          <p:cNvPr id="7" name="TextBox 6"/>
+              <a:t>Qué es la ventilación rápida</a:t>
+            </a:r>
+          </a:p>
+        </p:txBody>
+      </p:sp>
+      <p:sp>
+        <p:nvSpPr>
+          <p:cNvPr id="7" name="Rounded Rectangle 6"/>
+          <p:cNvSpPr/>
+          <p:nvPr/>
+        </p:nvSpPr>
+        <p:spPr>
+          <a:xfrm>
+            <a:off x="868680" y="1627632"/>
+            <a:ext cx="2011680" cy="73152"/>
+          </a:xfrm>
+          <a:prstGeom prst="roundRect">
+            <a:avLst/>
+          </a:prstGeom>
+          <a:solidFill>
+            <a:srgbClr val="E8801A"/>
+          </a:solidFill>
+          <a:ln>
+            <a:noFill/>
+          </a:ln>
+          <a:effectLst/>
+        </p:spPr>
+        <p:style>
+          <a:lnRef idx="1">
+            <a:schemeClr val="accent1"/>
+          </a:lnRef>
+          <a:fillRef idx="3">
+            <a:schemeClr val="accent1"/>
+          </a:fillRef>
+          <a:effectRef idx="2">
+            <a:schemeClr val="accent1"/>
+          </a:effectRef>
+          <a:fontRef idx="minor">
+            <a:schemeClr val="lt1"/>
+          </a:fontRef>
+        </p:style>
+        <p:txBody>
+          <a:bodyPr rtlCol="0" anchor="ctr"/>
+          <a:lstStyle/>
+          <a:p>
+            <a:pPr algn="ctr"/>
+          </a:p>
+        </p:txBody>
+      </p:sp>
+      <p:sp>
+        <p:nvSpPr>
+          <p:cNvPr id="8" name="TextBox 7"/>
           <p:cNvSpPr txBox="1"/>
           <p:nvPr/>
         </p:nvSpPr>
         <p:spPr>
           <a:xfrm>
-            <a:off x="822960" y="1920240"/>
+            <a:off x="822960" y="1965960"/>
             <a:ext cx="4983480" cy="4206240"/>
           </a:xfrm>
           <a:prstGeom prst="rect">
@@ -5737,17 +5936,17 @@
           <a:p>
             <a:pPr>
               <a:spcAft>
-                <a:spcPts val="1000"/>
+                <a:spcPts val="1100"/>
               </a:spcAft>
             </a:pPr>
             <a:r>
               <a:rPr sz="1600" b="1" i="0">
                 <a:solidFill>
-                  <a:srgbClr val="2E3A80"/>
-                </a:solidFill>
-                <a:latin typeface="Montserrat"/>
-              </a:rPr>
-              <a:t>•  </a:t>
+                  <a:srgbClr val="E8801A"/>
+                </a:solidFill>
+                <a:latin typeface="Montserrat"/>
+              </a:rPr>
+              <a:t>▸  </a:t>
             </a:r>
             <a:r>
               <a:rPr sz="1600" b="0" i="0">
@@ -5756,23 +5955,23 @@
                 </a:solidFill>
                 <a:latin typeface="Montserrat"/>
               </a:rPr>
-              <a:t>Instalar detector de gas</a:t>
+              <a:t>Abertura practicable ≥ 0,4 m²</a:t>
             </a:r>
           </a:p>
           <a:p>
             <a:pPr>
               <a:spcAft>
-                <a:spcPts val="1000"/>
+                <a:spcPts val="1100"/>
               </a:spcAft>
             </a:pPr>
             <a:r>
               <a:rPr sz="1600" b="1" i="0">
                 <a:solidFill>
-                  <a:srgbClr val="2E3A80"/>
-                </a:solidFill>
-                <a:latin typeface="Montserrat"/>
-              </a:rPr>
-              <a:t>•  </a:t>
+                  <a:srgbClr val="E8801A"/>
+                </a:solidFill>
+                <a:latin typeface="Montserrat"/>
+              </a:rPr>
+              <a:t>▸  </a:t>
             </a:r>
             <a:r>
               <a:rPr sz="1600" b="0" i="0">
@@ -5781,23 +5980,23 @@
                 </a:solidFill>
                 <a:latin typeface="Montserrat"/>
               </a:rPr>
-              <a:t>Con corte automático de suministro</a:t>
+              <a:t>Ventana o puerta al exterior o patio</a:t>
             </a:r>
           </a:p>
           <a:p>
             <a:pPr>
               <a:spcAft>
-                <a:spcPts val="1000"/>
+                <a:spcPts val="1100"/>
               </a:spcAft>
             </a:pPr>
             <a:r>
               <a:rPr sz="1600" b="1" i="0">
                 <a:solidFill>
-                  <a:srgbClr val="2E3A80"/>
-                </a:solidFill>
-                <a:latin typeface="Montserrat"/>
-              </a:rPr>
-              <a:t>•  </a:t>
+                  <a:srgbClr val="E8801A"/>
+                </a:solidFill>
+                <a:latin typeface="Montserrat"/>
+              </a:rPr>
+              <a:t>▸  </a:t>
             </a:r>
             <a:r>
               <a:rPr sz="1600" b="0" i="0">
@@ -5806,14 +6005,14 @@
                 </a:solidFill>
                 <a:latin typeface="Montserrat"/>
               </a:rPr>
-              <a:t>Electroválvula de rearme manual</a:t>
-            </a:r>
-          </a:p>
-        </p:txBody>
-      </p:sp>
-      <p:sp>
-        <p:nvSpPr>
-          <p:cNvPr id="8" name="imgph" descr="IMGQ:gas detector sensor wall"/>
+              <a:t>Indirecta: puerta ≥ 1,2 m² y ≤ 30 kW</a:t>
+            </a:r>
+          </a:p>
+        </p:txBody>
+      </p:sp>
+      <p:sp>
+        <p:nvSpPr>
+          <p:cNvPr id="9" name="imgph" descr="IMGQ:kitchen window open"/>
           <p:cNvSpPr/>
           <p:nvPr/>
         </p:nvSpPr>
@@ -5859,7 +6058,7 @@
       </p:sp>
       <p:sp>
         <p:nvSpPr>
-          <p:cNvPr id="9" name="TextBox 8"/>
+          <p:cNvPr id="10" name="TextBox 9"/>
           <p:cNvSpPr txBox="1"/>
           <p:nvPr/>
         </p:nvSpPr>
@@ -5899,7 +6098,7 @@
                 </a:solidFill>
                 <a:latin typeface="Montserrat"/>
               </a:rPr>
-              <a:t>gas detector sensor wall</a:t>
+              <a:t>kitchen window open</a:t>
             </a:r>
           </a:p>
         </p:txBody>
@@ -5996,7 +6195,7 @@
                 </a:solidFill>
                 <a:latin typeface="Montserrat"/>
               </a:rPr>
-              <a:t>012 / 020</a:t>
+              <a:t>012 / 021</a:t>
             </a:r>
           </a:p>
         </p:txBody>
@@ -6044,7 +6243,7 @@
         <p:spPr>
           <a:xfrm>
             <a:off x="822960" y="457200"/>
-            <a:ext cx="8229600" cy="365760"/>
+            <a:ext cx="10058400" cy="365760"/>
           </a:xfrm>
           <a:prstGeom prst="rect">
             <a:avLst/>
@@ -6058,13 +6257,13 @@
           <a:lstStyle/>
           <a:p>
             <a:r>
-              <a:rPr sz="1200" b="1" i="0">
-                <a:solidFill>
-                  <a:srgbClr val="64748B"/>
-                </a:solidFill>
-                <a:latin typeface="Montserrat"/>
-              </a:rPr>
-              <a:t>PATIOS DE VENTILACIÓN</a:t>
+              <a:rPr sz="1300" b="1" i="0">
+                <a:solidFill>
+                  <a:srgbClr val="E8801A"/>
+                </a:solidFill>
+                <a:latin typeface="Montserrat"/>
+              </a:rPr>
+              <a:t>VENTILACIÓN RÁPIDA</a:t>
             </a:r>
           </a:p>
         </p:txBody>
@@ -6092,26 +6291,70 @@
           <a:lstStyle/>
           <a:p>
             <a:r>
-              <a:rPr sz="2700" b="1" i="0">
+              <a:rPr sz="2800" b="1" i="0">
                 <a:solidFill>
                   <a:srgbClr val="1E2761"/>
                 </a:solidFill>
                 <a:latin typeface="Montserrat"/>
               </a:rPr>
-              <a:t>Cuándo un patio es patio</a:t>
-            </a:r>
-          </a:p>
-        </p:txBody>
-      </p:sp>
-      <p:sp>
-        <p:nvSpPr>
-          <p:cNvPr id="7" name="TextBox 6"/>
+              <a:t>Si no cabe ventilación rápida</a:t>
+            </a:r>
+          </a:p>
+        </p:txBody>
+      </p:sp>
+      <p:sp>
+        <p:nvSpPr>
+          <p:cNvPr id="7" name="Rounded Rectangle 6"/>
+          <p:cNvSpPr/>
+          <p:nvPr/>
+        </p:nvSpPr>
+        <p:spPr>
+          <a:xfrm>
+            <a:off x="868680" y="1627632"/>
+            <a:ext cx="2011680" cy="73152"/>
+          </a:xfrm>
+          <a:prstGeom prst="roundRect">
+            <a:avLst/>
+          </a:prstGeom>
+          <a:solidFill>
+            <a:srgbClr val="E8801A"/>
+          </a:solidFill>
+          <a:ln>
+            <a:noFill/>
+          </a:ln>
+          <a:effectLst/>
+        </p:spPr>
+        <p:style>
+          <a:lnRef idx="1">
+            <a:schemeClr val="accent1"/>
+          </a:lnRef>
+          <a:fillRef idx="3">
+            <a:schemeClr val="accent1"/>
+          </a:fillRef>
+          <a:effectRef idx="2">
+            <a:schemeClr val="accent1"/>
+          </a:effectRef>
+          <a:fontRef idx="minor">
+            <a:schemeClr val="lt1"/>
+          </a:fontRef>
+        </p:style>
+        <p:txBody>
+          <a:bodyPr rtlCol="0" anchor="ctr"/>
+          <a:lstStyle/>
+          <a:p>
+            <a:pPr algn="ctr"/>
+          </a:p>
+        </p:txBody>
+      </p:sp>
+      <p:sp>
+        <p:nvSpPr>
+          <p:cNvPr id="8" name="TextBox 7"/>
           <p:cNvSpPr txBox="1"/>
           <p:nvPr/>
         </p:nvSpPr>
         <p:spPr>
           <a:xfrm>
-            <a:off x="822960" y="1920240"/>
+            <a:off x="822960" y="1965960"/>
             <a:ext cx="4983480" cy="4206240"/>
           </a:xfrm>
           <a:prstGeom prst="rect">
@@ -6127,17 +6370,17 @@
           <a:p>
             <a:pPr>
               <a:spcAft>
-                <a:spcPts val="1000"/>
+                <a:spcPts val="1100"/>
               </a:spcAft>
             </a:pPr>
             <a:r>
               <a:rPr sz="1600" b="1" i="0">
                 <a:solidFill>
-                  <a:srgbClr val="2E3A80"/>
-                </a:solidFill>
-                <a:latin typeface="Montserrat"/>
-              </a:rPr>
-              <a:t>•  </a:t>
+                  <a:srgbClr val="E8801A"/>
+                </a:solidFill>
+                <a:latin typeface="Montserrat"/>
+              </a:rPr>
+              <a:t>▸  </a:t>
             </a:r>
             <a:r>
               <a:rPr sz="1600" b="0" i="0">
@@ -6146,23 +6389,23 @@
                 </a:solidFill>
                 <a:latin typeface="Montserrat"/>
               </a:rPr>
-              <a:t>Superficie en planta ≥ 3 m²</a:t>
+              <a:t>Instalar detector de gas</a:t>
             </a:r>
           </a:p>
           <a:p>
             <a:pPr>
               <a:spcAft>
-                <a:spcPts val="1000"/>
+                <a:spcPts val="1100"/>
               </a:spcAft>
             </a:pPr>
             <a:r>
               <a:rPr sz="1600" b="1" i="0">
                 <a:solidFill>
-                  <a:srgbClr val="2E3A80"/>
-                </a:solidFill>
-                <a:latin typeface="Montserrat"/>
-              </a:rPr>
-              <a:t>•  </a:t>
+                  <a:srgbClr val="E8801A"/>
+                </a:solidFill>
+                <a:latin typeface="Montserrat"/>
+              </a:rPr>
+              <a:t>▸  </a:t>
             </a:r>
             <a:r>
               <a:rPr sz="1600" b="0" i="0">
@@ -6171,23 +6414,23 @@
                 </a:solidFill>
                 <a:latin typeface="Montserrat"/>
               </a:rPr>
-              <a:t>Lado menor ≥ 1 m</a:t>
+              <a:t>Con corte automático de suministro</a:t>
             </a:r>
           </a:p>
           <a:p>
             <a:pPr>
               <a:spcAft>
-                <a:spcPts val="1000"/>
+                <a:spcPts val="1100"/>
               </a:spcAft>
             </a:pPr>
             <a:r>
               <a:rPr sz="1600" b="1" i="0">
                 <a:solidFill>
-                  <a:srgbClr val="2E3A80"/>
-                </a:solidFill>
-                <a:latin typeface="Montserrat"/>
-              </a:rPr>
-              <a:t>•  </a:t>
+                  <a:srgbClr val="E8801A"/>
+                </a:solidFill>
+                <a:latin typeface="Montserrat"/>
+              </a:rPr>
+              <a:t>▸  </a:t>
             </a:r>
             <a:r>
               <a:rPr sz="1600" b="0" i="0">
@@ -6196,14 +6439,14 @@
                 </a:solidFill>
                 <a:latin typeface="Montserrat"/>
               </a:rPr>
-              <a:t>Si va techado: hueco ≥ 2 m²</a:t>
-            </a:r>
-          </a:p>
-        </p:txBody>
-      </p:sp>
-      <p:sp>
-        <p:nvSpPr>
-          <p:cNvPr id="8" name="imgph" descr="IMGQ:interior building ventilation courtyard"/>
+              <a:t>Electroválvula de rearme manual</a:t>
+            </a:r>
+          </a:p>
+        </p:txBody>
+      </p:sp>
+      <p:sp>
+        <p:nvSpPr>
+          <p:cNvPr id="9" name="imgph" descr="IMGQ:gas detector sensor wall"/>
           <p:cNvSpPr/>
           <p:nvPr/>
         </p:nvSpPr>
@@ -6249,7 +6492,7 @@
       </p:sp>
       <p:sp>
         <p:nvSpPr>
-          <p:cNvPr id="9" name="TextBox 8"/>
+          <p:cNvPr id="10" name="TextBox 9"/>
           <p:cNvSpPr txBox="1"/>
           <p:nvPr/>
         </p:nvSpPr>
@@ -6289,7 +6532,7 @@
                 </a:solidFill>
                 <a:latin typeface="Montserrat"/>
               </a:rPr>
-              <a:t>interior building ventilation courtyard</a:t>
+              <a:t>gas detector sensor wall</a:t>
             </a:r>
           </a:p>
         </p:txBody>
@@ -6386,7 +6629,7 @@
                 </a:solidFill>
                 <a:latin typeface="Montserrat"/>
               </a:rPr>
-              <a:t>013 / 020</a:t>
+              <a:t>013 / 021</a:t>
             </a:r>
           </a:p>
         </p:txBody>
@@ -6434,7 +6677,7 @@
         <p:spPr>
           <a:xfrm>
             <a:off x="822960" y="457200"/>
-            <a:ext cx="8229600" cy="365760"/>
+            <a:ext cx="10058400" cy="365760"/>
           </a:xfrm>
           <a:prstGeom prst="rect">
             <a:avLst/>
@@ -6448,9 +6691,9 @@
           <a:lstStyle/>
           <a:p>
             <a:r>
-              <a:rPr sz="1200" b="1" i="0">
-                <a:solidFill>
-                  <a:srgbClr val="64748B"/>
+              <a:rPr sz="1300" b="1" i="0">
+                <a:solidFill>
+                  <a:srgbClr val="E8801A"/>
                 </a:solidFill>
                 <a:latin typeface="Montserrat"/>
               </a:rPr>
@@ -6482,26 +6725,70 @@
           <a:lstStyle/>
           <a:p>
             <a:r>
-              <a:rPr sz="2700" b="1" i="0">
+              <a:rPr sz="2800" b="1" i="0">
                 <a:solidFill>
                   <a:srgbClr val="1E2761"/>
                 </a:solidFill>
                 <a:latin typeface="Montserrat"/>
               </a:rPr>
-              <a:t>Patios para humos de B y C</a:t>
-            </a:r>
-          </a:p>
-        </p:txBody>
-      </p:sp>
-      <p:sp>
-        <p:nvSpPr>
-          <p:cNvPr id="7" name="TextBox 6"/>
+              <a:t>Cuándo un patio es patio</a:t>
+            </a:r>
+          </a:p>
+        </p:txBody>
+      </p:sp>
+      <p:sp>
+        <p:nvSpPr>
+          <p:cNvPr id="7" name="Rounded Rectangle 6"/>
+          <p:cNvSpPr/>
+          <p:nvPr/>
+        </p:nvSpPr>
+        <p:spPr>
+          <a:xfrm>
+            <a:off x="868680" y="1627632"/>
+            <a:ext cx="2011680" cy="73152"/>
+          </a:xfrm>
+          <a:prstGeom prst="roundRect">
+            <a:avLst/>
+          </a:prstGeom>
+          <a:solidFill>
+            <a:srgbClr val="E8801A"/>
+          </a:solidFill>
+          <a:ln>
+            <a:noFill/>
+          </a:ln>
+          <a:effectLst/>
+        </p:spPr>
+        <p:style>
+          <a:lnRef idx="1">
+            <a:schemeClr val="accent1"/>
+          </a:lnRef>
+          <a:fillRef idx="3">
+            <a:schemeClr val="accent1"/>
+          </a:fillRef>
+          <a:effectRef idx="2">
+            <a:schemeClr val="accent1"/>
+          </a:effectRef>
+          <a:fontRef idx="minor">
+            <a:schemeClr val="lt1"/>
+          </a:fontRef>
+        </p:style>
+        <p:txBody>
+          <a:bodyPr rtlCol="0" anchor="ctr"/>
+          <a:lstStyle/>
+          <a:p>
+            <a:pPr algn="ctr"/>
+          </a:p>
+        </p:txBody>
+      </p:sp>
+      <p:sp>
+        <p:nvSpPr>
+          <p:cNvPr id="8" name="TextBox 7"/>
           <p:cNvSpPr txBox="1"/>
           <p:nvPr/>
         </p:nvSpPr>
         <p:spPr>
           <a:xfrm>
-            <a:off x="822960" y="1920240"/>
+            <a:off x="822960" y="1965960"/>
             <a:ext cx="4983480" cy="4206240"/>
           </a:xfrm>
           <a:prstGeom prst="rect">
@@ -6517,17 +6804,17 @@
           <a:p>
             <a:pPr>
               <a:spcAft>
-                <a:spcPts val="1000"/>
+                <a:spcPts val="1100"/>
               </a:spcAft>
             </a:pPr>
             <a:r>
               <a:rPr sz="1600" b="1" i="0">
                 <a:solidFill>
-                  <a:srgbClr val="2E3A80"/>
-                </a:solidFill>
-                <a:latin typeface="Montserrat"/>
-              </a:rPr>
-              <a:t>•  </a:t>
+                  <a:srgbClr val="E8801A"/>
+                </a:solidFill>
+                <a:latin typeface="Montserrat"/>
+              </a:rPr>
+              <a:t>▸  </a:t>
             </a:r>
             <a:r>
               <a:rPr sz="1600" b="0" i="0">
@@ -6536,23 +6823,23 @@
                 </a:solidFill>
                 <a:latin typeface="Montserrat"/>
               </a:rPr>
-              <a:t>Superficie ≥ 0,5 · NT</a:t>
+              <a:t>Superficie en planta ≥ 3 m²</a:t>
             </a:r>
           </a:p>
           <a:p>
             <a:pPr>
               <a:spcAft>
-                <a:spcPts val="1000"/>
+                <a:spcPts val="1100"/>
               </a:spcAft>
             </a:pPr>
             <a:r>
               <a:rPr sz="1600" b="1" i="0">
                 <a:solidFill>
-                  <a:srgbClr val="2E3A80"/>
-                </a:solidFill>
-                <a:latin typeface="Montserrat"/>
-              </a:rPr>
-              <a:t>•  </a:t>
+                  <a:srgbClr val="E8801A"/>
+                </a:solidFill>
+                <a:latin typeface="Montserrat"/>
+              </a:rPr>
+              <a:t>▸  </a:t>
             </a:r>
             <a:r>
               <a:rPr sz="1600" b="0" i="0">
@@ -6561,23 +6848,23 @@
                 </a:solidFill>
                 <a:latin typeface="Montserrat"/>
               </a:rPr>
-              <a:t>Mínimo 4 m²</a:t>
+              <a:t>Lado menor ≥ 1 m</a:t>
             </a:r>
           </a:p>
           <a:p>
             <a:pPr>
               <a:spcAft>
-                <a:spcPts val="1000"/>
+                <a:spcPts val="1100"/>
               </a:spcAft>
             </a:pPr>
             <a:r>
               <a:rPr sz="1600" b="1" i="0">
                 <a:solidFill>
-                  <a:srgbClr val="2E3A80"/>
-                </a:solidFill>
-                <a:latin typeface="Montserrat"/>
-              </a:rPr>
-              <a:t>•  </a:t>
+                  <a:srgbClr val="E8801A"/>
+                </a:solidFill>
+                <a:latin typeface="Montserrat"/>
+              </a:rPr>
+              <a:t>▸  </a:t>
             </a:r>
             <a:r>
               <a:rPr sz="1600" b="0" i="0">
@@ -6586,14 +6873,14 @@
                 </a:solidFill>
                 <a:latin typeface="Montserrat"/>
               </a:rPr>
-              <a:t>NT: locales que evacúan al patio</a:t>
-            </a:r>
-          </a:p>
-        </p:txBody>
-      </p:sp>
-      <p:sp>
-        <p:nvSpPr>
-          <p:cNvPr id="8" name="imgph" descr="IMGQ:building air shaft flue pipes"/>
+              <a:t>Si va techado: hueco ≥ 2 m²</a:t>
+            </a:r>
+          </a:p>
+        </p:txBody>
+      </p:sp>
+      <p:sp>
+        <p:nvSpPr>
+          <p:cNvPr id="9" name="imgph" descr="IMGQ:interior building ventilation courtyard"/>
           <p:cNvSpPr/>
           <p:nvPr/>
         </p:nvSpPr>
@@ -6639,7 +6926,7 @@
       </p:sp>
       <p:sp>
         <p:nvSpPr>
-          <p:cNvPr id="9" name="TextBox 8"/>
+          <p:cNvPr id="10" name="TextBox 9"/>
           <p:cNvSpPr txBox="1"/>
           <p:nvPr/>
         </p:nvSpPr>
@@ -6679,7 +6966,7 @@
                 </a:solidFill>
                 <a:latin typeface="Montserrat"/>
               </a:rPr>
-              <a:t>building air shaft flue pipes</a:t>
+              <a:t>interior building ventilation courtyard</a:t>
             </a:r>
           </a:p>
         </p:txBody>
@@ -6776,7 +7063,7 @@
                 </a:solidFill>
                 <a:latin typeface="Montserrat"/>
               </a:rPr>
-              <a:t>014 / 020</a:t>
+              <a:t>014 / 021</a:t>
             </a:r>
           </a:p>
         </p:txBody>
@@ -6824,7 +7111,7 @@
         <p:spPr>
           <a:xfrm>
             <a:off x="822960" y="457200"/>
-            <a:ext cx="8229600" cy="365760"/>
+            <a:ext cx="10058400" cy="365760"/>
           </a:xfrm>
           <a:prstGeom prst="rect">
             <a:avLst/>
@@ -6838,13 +7125,13 @@
           <a:lstStyle/>
           <a:p>
             <a:r>
-              <a:rPr sz="1200" b="1" i="0">
-                <a:solidFill>
-                  <a:srgbClr val="64748B"/>
-                </a:solidFill>
-                <a:latin typeface="Montserrat"/>
-              </a:rPr>
-              <a:t>SISTEMAS DE VENTILACIÓN</a:t>
+              <a:rPr sz="1300" b="1" i="0">
+                <a:solidFill>
+                  <a:srgbClr val="E8801A"/>
+                </a:solidFill>
+                <a:latin typeface="Montserrat"/>
+              </a:rPr>
+              <a:t>PATIOS DE VENTILACIÓN</a:t>
             </a:r>
           </a:p>
         </p:txBody>
@@ -6872,26 +7159,70 @@
           <a:lstStyle/>
           <a:p>
             <a:r>
-              <a:rPr sz="2700" b="1" i="0">
+              <a:rPr sz="2800" b="1" i="0">
                 <a:solidFill>
                   <a:srgbClr val="1E2761"/>
                 </a:solidFill>
                 <a:latin typeface="Montserrat"/>
               </a:rPr>
-              <a:t>Ventilación directa</a:t>
-            </a:r>
-          </a:p>
-        </p:txBody>
-      </p:sp>
-      <p:sp>
-        <p:nvSpPr>
-          <p:cNvPr id="7" name="TextBox 6"/>
+              <a:t>Patios para humos de B y C</a:t>
+            </a:r>
+          </a:p>
+        </p:txBody>
+      </p:sp>
+      <p:sp>
+        <p:nvSpPr>
+          <p:cNvPr id="7" name="Rounded Rectangle 6"/>
+          <p:cNvSpPr/>
+          <p:nvPr/>
+        </p:nvSpPr>
+        <p:spPr>
+          <a:xfrm>
+            <a:off x="868680" y="1627632"/>
+            <a:ext cx="2011680" cy="73152"/>
+          </a:xfrm>
+          <a:prstGeom prst="roundRect">
+            <a:avLst/>
+          </a:prstGeom>
+          <a:solidFill>
+            <a:srgbClr val="E8801A"/>
+          </a:solidFill>
+          <a:ln>
+            <a:noFill/>
+          </a:ln>
+          <a:effectLst/>
+        </p:spPr>
+        <p:style>
+          <a:lnRef idx="1">
+            <a:schemeClr val="accent1"/>
+          </a:lnRef>
+          <a:fillRef idx="3">
+            <a:schemeClr val="accent1"/>
+          </a:fillRef>
+          <a:effectRef idx="2">
+            <a:schemeClr val="accent1"/>
+          </a:effectRef>
+          <a:fontRef idx="minor">
+            <a:schemeClr val="lt1"/>
+          </a:fontRef>
+        </p:style>
+        <p:txBody>
+          <a:bodyPr rtlCol="0" anchor="ctr"/>
+          <a:lstStyle/>
+          <a:p>
+            <a:pPr algn="ctr"/>
+          </a:p>
+        </p:txBody>
+      </p:sp>
+      <p:sp>
+        <p:nvSpPr>
+          <p:cNvPr id="8" name="TextBox 7"/>
           <p:cNvSpPr txBox="1"/>
           <p:nvPr/>
         </p:nvSpPr>
         <p:spPr>
           <a:xfrm>
-            <a:off x="822960" y="1920240"/>
+            <a:off x="822960" y="1965960"/>
             <a:ext cx="4983480" cy="4206240"/>
           </a:xfrm>
           <a:prstGeom prst="rect">
@@ -6907,17 +7238,17 @@
           <a:p>
             <a:pPr>
               <a:spcAft>
-                <a:spcPts val="1000"/>
+                <a:spcPts val="1100"/>
               </a:spcAft>
             </a:pPr>
             <a:r>
               <a:rPr sz="1600" b="1" i="0">
                 <a:solidFill>
-                  <a:srgbClr val="2E3A80"/>
-                </a:solidFill>
-                <a:latin typeface="Montserrat"/>
-              </a:rPr>
-              <a:t>•  </a:t>
+                  <a:srgbClr val="E8801A"/>
+                </a:solidFill>
+                <a:latin typeface="Montserrat"/>
+              </a:rPr>
+              <a:t>▸  </a:t>
             </a:r>
             <a:r>
               <a:rPr sz="1600" b="0" i="0">
@@ -6926,23 +7257,23 @@
                 </a:solidFill>
                 <a:latin typeface="Montserrat"/>
               </a:rPr>
-              <a:t>Abertura permanente al exterior o patio</a:t>
+              <a:t>Superficie ≥ 0,5 · NT</a:t>
             </a:r>
           </a:p>
           <a:p>
             <a:pPr>
               <a:spcAft>
-                <a:spcPts val="1000"/>
+                <a:spcPts val="1100"/>
               </a:spcAft>
             </a:pPr>
             <a:r>
               <a:rPr sz="1600" b="1" i="0">
                 <a:solidFill>
-                  <a:srgbClr val="2E3A80"/>
-                </a:solidFill>
-                <a:latin typeface="Montserrat"/>
-              </a:rPr>
-              <a:t>•  </a:t>
+                  <a:srgbClr val="E8801A"/>
+                </a:solidFill>
+                <a:latin typeface="Montserrat"/>
+              </a:rPr>
+              <a:t>▸  </a:t>
             </a:r>
             <a:r>
               <a:rPr sz="1600" b="0" i="0">
@@ -6951,23 +7282,23 @@
                 </a:solidFill>
                 <a:latin typeface="Montserrat"/>
               </a:rPr>
-              <a:t>Conducto individual: tiro natural o ventilador</a:t>
+              <a:t>Mínimo 4 m²</a:t>
             </a:r>
           </a:p>
           <a:p>
             <a:pPr>
               <a:spcAft>
-                <a:spcPts val="1000"/>
+                <a:spcPts val="1100"/>
               </a:spcAft>
             </a:pPr>
             <a:r>
               <a:rPr sz="1600" b="1" i="0">
                 <a:solidFill>
-                  <a:srgbClr val="2E3A80"/>
-                </a:solidFill>
-                <a:latin typeface="Montserrat"/>
-              </a:rPr>
-              <a:t>•  </a:t>
+                  <a:srgbClr val="E8801A"/>
+                </a:solidFill>
+                <a:latin typeface="Montserrat"/>
+              </a:rPr>
+              <a:t>▸  </a:t>
             </a:r>
             <a:r>
               <a:rPr sz="1600" b="0" i="0">
@@ -6976,14 +7307,14 @@
                 </a:solidFill>
                 <a:latin typeface="Montserrat"/>
               </a:rPr>
-              <a:t>Colectivo: shunt invertido, aire ascendente</a:t>
-            </a:r>
-          </a:p>
-        </p:txBody>
-      </p:sp>
-      <p:sp>
-        <p:nvSpPr>
-          <p:cNvPr id="8" name="imgph" descr="IMGQ:wall ventilation grille outdoor"/>
+              <a:t>NT: locales que evacúan al patio</a:t>
+            </a:r>
+          </a:p>
+        </p:txBody>
+      </p:sp>
+      <p:sp>
+        <p:nvSpPr>
+          <p:cNvPr id="9" name="imgph" descr="IMGQ:building air shaft flue pipes"/>
           <p:cNvSpPr/>
           <p:nvPr/>
         </p:nvSpPr>
@@ -7029,7 +7360,7 @@
       </p:sp>
       <p:sp>
         <p:nvSpPr>
-          <p:cNvPr id="9" name="TextBox 8"/>
+          <p:cNvPr id="10" name="TextBox 9"/>
           <p:cNvSpPr txBox="1"/>
           <p:nvPr/>
         </p:nvSpPr>
@@ -7069,7 +7400,7 @@
                 </a:solidFill>
                 <a:latin typeface="Montserrat"/>
               </a:rPr>
-              <a:t>wall ventilation grille outdoor</a:t>
+              <a:t>building air shaft flue pipes</a:t>
             </a:r>
           </a:p>
         </p:txBody>
@@ -7166,7 +7497,7 @@
                 </a:solidFill>
                 <a:latin typeface="Montserrat"/>
               </a:rPr>
-              <a:t>015 / 020</a:t>
+              <a:t>015 / 021</a:t>
             </a:r>
           </a:p>
         </p:txBody>
@@ -7214,7 +7545,7 @@
         <p:spPr>
           <a:xfrm>
             <a:off x="822960" y="457200"/>
-            <a:ext cx="8229600" cy="365760"/>
+            <a:ext cx="10058400" cy="365760"/>
           </a:xfrm>
           <a:prstGeom prst="rect">
             <a:avLst/>
@@ -7228,9 +7559,9 @@
           <a:lstStyle/>
           <a:p>
             <a:r>
-              <a:rPr sz="1200" b="1" i="0">
-                <a:solidFill>
-                  <a:srgbClr val="64748B"/>
+              <a:rPr sz="1300" b="1" i="0">
+                <a:solidFill>
+                  <a:srgbClr val="E8801A"/>
                 </a:solidFill>
                 <a:latin typeface="Montserrat"/>
               </a:rPr>
@@ -7262,26 +7593,70 @@
           <a:lstStyle/>
           <a:p>
             <a:r>
-              <a:rPr sz="2700" b="1" i="0">
+              <a:rPr sz="2800" b="1" i="0">
                 <a:solidFill>
                   <a:srgbClr val="1E2761"/>
                 </a:solidFill>
                 <a:latin typeface="Montserrat"/>
               </a:rPr>
-              <a:t>La rejilla lleva su superficie marcada</a:t>
-            </a:r>
-          </a:p>
-        </p:txBody>
-      </p:sp>
-      <p:sp>
-        <p:nvSpPr>
-          <p:cNvPr id="7" name="TextBox 6"/>
+              <a:t>Ventilación directa</a:t>
+            </a:r>
+          </a:p>
+        </p:txBody>
+      </p:sp>
+      <p:sp>
+        <p:nvSpPr>
+          <p:cNvPr id="7" name="Rounded Rectangle 6"/>
+          <p:cNvSpPr/>
+          <p:nvPr/>
+        </p:nvSpPr>
+        <p:spPr>
+          <a:xfrm>
+            <a:off x="868680" y="1627632"/>
+            <a:ext cx="2011680" cy="73152"/>
+          </a:xfrm>
+          <a:prstGeom prst="roundRect">
+            <a:avLst/>
+          </a:prstGeom>
+          <a:solidFill>
+            <a:srgbClr val="E8801A"/>
+          </a:solidFill>
+          <a:ln>
+            <a:noFill/>
+          </a:ln>
+          <a:effectLst/>
+        </p:spPr>
+        <p:style>
+          <a:lnRef idx="1">
+            <a:schemeClr val="accent1"/>
+          </a:lnRef>
+          <a:fillRef idx="3">
+            <a:schemeClr val="accent1"/>
+          </a:fillRef>
+          <a:effectRef idx="2">
+            <a:schemeClr val="accent1"/>
+          </a:effectRef>
+          <a:fontRef idx="minor">
+            <a:schemeClr val="lt1"/>
+          </a:fontRef>
+        </p:style>
+        <p:txBody>
+          <a:bodyPr rtlCol="0" anchor="ctr"/>
+          <a:lstStyle/>
+          <a:p>
+            <a:pPr algn="ctr"/>
+          </a:p>
+        </p:txBody>
+      </p:sp>
+      <p:sp>
+        <p:nvSpPr>
+          <p:cNvPr id="8" name="TextBox 7"/>
           <p:cNvSpPr txBox="1"/>
           <p:nvPr/>
         </p:nvSpPr>
         <p:spPr>
           <a:xfrm>
-            <a:off x="822960" y="1920240"/>
+            <a:off x="822960" y="1965960"/>
             <a:ext cx="4983480" cy="4206240"/>
           </a:xfrm>
           <a:prstGeom prst="rect">
@@ -7297,17 +7672,17 @@
           <a:p>
             <a:pPr>
               <a:spcAft>
-                <a:spcPts val="1000"/>
+                <a:spcPts val="1100"/>
               </a:spcAft>
             </a:pPr>
             <a:r>
               <a:rPr sz="1600" b="1" i="0">
                 <a:solidFill>
-                  <a:srgbClr val="2E3A80"/>
-                </a:solidFill>
-                <a:latin typeface="Montserrat"/>
-              </a:rPr>
-              <a:t>•  </a:t>
+                  <a:srgbClr val="E8801A"/>
+                </a:solidFill>
+                <a:latin typeface="Montserrat"/>
+              </a:rPr>
+              <a:t>▸  </a:t>
             </a:r>
             <a:r>
               <a:rPr sz="1600" b="0" i="0">
@@ -7316,23 +7691,23 @@
                 </a:solidFill>
                 <a:latin typeface="Montserrat"/>
               </a:rPr>
-              <a:t>Marcado indeleble de superficie libre</a:t>
+              <a:t>Abertura permanente al exterior o patio</a:t>
             </a:r>
           </a:p>
           <a:p>
             <a:pPr>
               <a:spcAft>
-                <a:spcPts val="1000"/>
+                <a:spcPts val="1100"/>
               </a:spcAft>
             </a:pPr>
             <a:r>
               <a:rPr sz="1600" b="1" i="0">
                 <a:solidFill>
-                  <a:srgbClr val="2E3A80"/>
-                </a:solidFill>
-                <a:latin typeface="Montserrat"/>
-              </a:rPr>
-              <a:t>•  </a:t>
+                  <a:srgbClr val="E8801A"/>
+                </a:solidFill>
+                <a:latin typeface="Montserrat"/>
+              </a:rPr>
+              <a:t>▸  </a:t>
             </a:r>
             <a:r>
               <a:rPr sz="1600" b="0" i="0">
@@ -7341,23 +7716,23 @@
                 </a:solidFill>
                 <a:latin typeface="Montserrat"/>
               </a:rPr>
-              <a:t>No cuenta el hueco, cuenta lo libre</a:t>
+              <a:t>Conducto individual: tiro natural o ventilador</a:t>
             </a:r>
           </a:p>
           <a:p>
             <a:pPr>
               <a:spcAft>
-                <a:spcPts val="1000"/>
+                <a:spcPts val="1100"/>
               </a:spcAft>
             </a:pPr>
             <a:r>
               <a:rPr sz="1600" b="1" i="0">
                 <a:solidFill>
-                  <a:srgbClr val="2E3A80"/>
-                </a:solidFill>
-                <a:latin typeface="Montserrat"/>
-              </a:rPr>
-              <a:t>•  </a:t>
+                  <a:srgbClr val="E8801A"/>
+                </a:solidFill>
+                <a:latin typeface="Montserrat"/>
+              </a:rPr>
+              <a:t>▸  </a:t>
             </a:r>
             <a:r>
               <a:rPr sz="1600" b="0" i="0">
@@ -7366,14 +7741,14 @@
                 </a:solidFill>
                 <a:latin typeface="Montserrat"/>
               </a:rPr>
-              <a:t>No comunicar con cámaras de aire</a:t>
-            </a:r>
-          </a:p>
-        </p:txBody>
-      </p:sp>
-      <p:sp>
-        <p:nvSpPr>
-          <p:cNvPr id="8" name="imgph" descr="IMGQ:metal ventilation grille close up"/>
+              <a:t>Colectivo: shunt invertido, aire ascendente</a:t>
+            </a:r>
+          </a:p>
+        </p:txBody>
+      </p:sp>
+      <p:sp>
+        <p:nvSpPr>
+          <p:cNvPr id="9" name="imgph" descr="IMGQ:wall ventilation grille outdoor"/>
           <p:cNvSpPr/>
           <p:nvPr/>
         </p:nvSpPr>
@@ -7419,7 +7794,7 @@
       </p:sp>
       <p:sp>
         <p:nvSpPr>
-          <p:cNvPr id="9" name="TextBox 8"/>
+          <p:cNvPr id="10" name="TextBox 9"/>
           <p:cNvSpPr txBox="1"/>
           <p:nvPr/>
         </p:nvSpPr>
@@ -7459,7 +7834,7 @@
                 </a:solidFill>
                 <a:latin typeface="Montserrat"/>
               </a:rPr>
-              <a:t>metal ventilation grille close up</a:t>
+              <a:t>wall ventilation grille outdoor</a:t>
             </a:r>
           </a:p>
         </p:txBody>
@@ -7556,7 +7931,7 @@
                 </a:solidFill>
                 <a:latin typeface="Montserrat"/>
               </a:rPr>
-              <a:t>016 / 020</a:t>
+              <a:t>016 / 021</a:t>
             </a:r>
           </a:p>
         </p:txBody>
@@ -7604,7 +7979,7 @@
         <p:spPr>
           <a:xfrm>
             <a:off x="822960" y="457200"/>
-            <a:ext cx="8229600" cy="365760"/>
+            <a:ext cx="10058400" cy="365760"/>
           </a:xfrm>
           <a:prstGeom prst="rect">
             <a:avLst/>
@@ -7618,9 +7993,9 @@
           <a:lstStyle/>
           <a:p>
             <a:r>
-              <a:rPr sz="1200" b="1" i="0">
-                <a:solidFill>
-                  <a:srgbClr val="64748B"/>
+              <a:rPr sz="1300" b="1" i="0">
+                <a:solidFill>
+                  <a:srgbClr val="E8801A"/>
                 </a:solidFill>
                 <a:latin typeface="Montserrat"/>
               </a:rPr>
@@ -7652,26 +8027,70 @@
           <a:lstStyle/>
           <a:p>
             <a:r>
-              <a:rPr sz="2700" b="1" i="0">
+              <a:rPr sz="2800" b="1" i="0">
                 <a:solidFill>
                   <a:srgbClr val="1E2761"/>
                 </a:solidFill>
                 <a:latin typeface="Montserrat"/>
               </a:rPr>
-              <a:t>Ventilación indirecta</a:t>
-            </a:r>
-          </a:p>
-        </p:txBody>
-      </p:sp>
-      <p:sp>
-        <p:nvSpPr>
-          <p:cNvPr id="7" name="TextBox 6"/>
+              <a:t>La rejilla lleva su superficie marcada</a:t>
+            </a:r>
+          </a:p>
+        </p:txBody>
+      </p:sp>
+      <p:sp>
+        <p:nvSpPr>
+          <p:cNvPr id="7" name="Rounded Rectangle 6"/>
+          <p:cNvSpPr/>
+          <p:nvPr/>
+        </p:nvSpPr>
+        <p:spPr>
+          <a:xfrm>
+            <a:off x="868680" y="1627632"/>
+            <a:ext cx="2011680" cy="73152"/>
+          </a:xfrm>
+          <a:prstGeom prst="roundRect">
+            <a:avLst/>
+          </a:prstGeom>
+          <a:solidFill>
+            <a:srgbClr val="E8801A"/>
+          </a:solidFill>
+          <a:ln>
+            <a:noFill/>
+          </a:ln>
+          <a:effectLst/>
+        </p:spPr>
+        <p:style>
+          <a:lnRef idx="1">
+            <a:schemeClr val="accent1"/>
+          </a:lnRef>
+          <a:fillRef idx="3">
+            <a:schemeClr val="accent1"/>
+          </a:fillRef>
+          <a:effectRef idx="2">
+            <a:schemeClr val="accent1"/>
+          </a:effectRef>
+          <a:fontRef idx="minor">
+            <a:schemeClr val="lt1"/>
+          </a:fontRef>
+        </p:style>
+        <p:txBody>
+          <a:bodyPr rtlCol="0" anchor="ctr"/>
+          <a:lstStyle/>
+          <a:p>
+            <a:pPr algn="ctr"/>
+          </a:p>
+        </p:txBody>
+      </p:sp>
+      <p:sp>
+        <p:nvSpPr>
+          <p:cNvPr id="8" name="TextBox 7"/>
           <p:cNvSpPr txBox="1"/>
           <p:nvPr/>
         </p:nvSpPr>
         <p:spPr>
           <a:xfrm>
-            <a:off x="822960" y="1920240"/>
+            <a:off x="822960" y="1965960"/>
             <a:ext cx="4983480" cy="4206240"/>
           </a:xfrm>
           <a:prstGeom prst="rect">
@@ -7687,17 +8106,17 @@
           <a:p>
             <a:pPr>
               <a:spcAft>
-                <a:spcPts val="1000"/>
+                <a:spcPts val="1100"/>
               </a:spcAft>
             </a:pPr>
             <a:r>
               <a:rPr sz="1600" b="1" i="0">
                 <a:solidFill>
-                  <a:srgbClr val="2E3A80"/>
-                </a:solidFill>
-                <a:latin typeface="Montserrat"/>
-              </a:rPr>
-              <a:t>•  </a:t>
+                  <a:srgbClr val="E8801A"/>
+                </a:solidFill>
+                <a:latin typeface="Montserrat"/>
+              </a:rPr>
+              <a:t>▸  </a:t>
             </a:r>
             <a:r>
               <a:rPr sz="1600" b="0" i="0">
@@ -7706,23 +8125,23 @@
                 </a:solidFill>
                 <a:latin typeface="Montserrat"/>
               </a:rPr>
-              <a:t>A través de un local contiguo</a:t>
+              <a:t>Marcado indeleble de superficie libre</a:t>
             </a:r>
           </a:p>
           <a:p>
             <a:pPr>
               <a:spcAft>
-                <a:spcPts val="1000"/>
+                <a:spcPts val="1100"/>
               </a:spcAft>
             </a:pPr>
             <a:r>
               <a:rPr sz="1600" b="1" i="0">
                 <a:solidFill>
-                  <a:srgbClr val="2E3A80"/>
-                </a:solidFill>
-                <a:latin typeface="Montserrat"/>
-              </a:rPr>
-              <a:t>•  </a:t>
+                  <a:srgbClr val="E8801A"/>
+                </a:solidFill>
+                <a:latin typeface="Montserrat"/>
+              </a:rPr>
+              <a:t>▸  </a:t>
             </a:r>
             <a:r>
               <a:rPr sz="1600" b="0" i="0">
@@ -7731,23 +8150,23 @@
                 </a:solidFill>
                 <a:latin typeface="Montserrat"/>
               </a:rPr>
-              <a:t>Que tenga ventilación directa</a:t>
+              <a:t>No cuenta el hueco, cuenta lo libre</a:t>
             </a:r>
           </a:p>
           <a:p>
             <a:pPr>
               <a:spcAft>
-                <a:spcPts val="1000"/>
+                <a:spcPts val="1100"/>
               </a:spcAft>
             </a:pPr>
             <a:r>
               <a:rPr sz="1600" b="1" i="0">
                 <a:solidFill>
-                  <a:srgbClr val="2E3A80"/>
-                </a:solidFill>
-                <a:latin typeface="Montserrat"/>
-              </a:rPr>
-              <a:t>•  </a:t>
+                  <a:srgbClr val="E8801A"/>
+                </a:solidFill>
+                <a:latin typeface="Montserrat"/>
+              </a:rPr>
+              <a:t>▸  </a:t>
             </a:r>
             <a:r>
               <a:rPr sz="1600" b="0" i="0">
@@ -7756,14 +8175,14 @@
                 </a:solidFill>
                 <a:latin typeface="Montserrat"/>
               </a:rPr>
-              <a:t>Nunca dormitorio, baño o aseo</a:t>
-            </a:r>
-          </a:p>
-        </p:txBody>
-      </p:sp>
-      <p:sp>
-        <p:nvSpPr>
-          <p:cNvPr id="8" name="imgph" descr="IMGQ:interior doorway between rooms"/>
+              <a:t>No comunicar con cámaras de aire</a:t>
+            </a:r>
+          </a:p>
+        </p:txBody>
+      </p:sp>
+      <p:sp>
+        <p:nvSpPr>
+          <p:cNvPr id="9" name="imgph" descr="IMGQ:metal ventilation grille close up"/>
           <p:cNvSpPr/>
           <p:nvPr/>
         </p:nvSpPr>
@@ -7809,7 +8228,7 @@
       </p:sp>
       <p:sp>
         <p:nvSpPr>
-          <p:cNvPr id="9" name="TextBox 8"/>
+          <p:cNvPr id="10" name="TextBox 9"/>
           <p:cNvSpPr txBox="1"/>
           <p:nvPr/>
         </p:nvSpPr>
@@ -7849,7 +8268,7 @@
                 </a:solidFill>
                 <a:latin typeface="Montserrat"/>
               </a:rPr>
-              <a:t>interior doorway between rooms</a:t>
+              <a:t>metal ventilation grille close up</a:t>
             </a:r>
           </a:p>
         </p:txBody>
@@ -7946,7 +8365,7 @@
                 </a:solidFill>
                 <a:latin typeface="Montserrat"/>
               </a:rPr>
-              <a:t>017 / 020</a:t>
+              <a:t>017 / 021</a:t>
             </a:r>
           </a:p>
         </p:txBody>
@@ -7994,7 +8413,7 @@
         <p:spPr>
           <a:xfrm>
             <a:off x="822960" y="457200"/>
-            <a:ext cx="8229600" cy="365760"/>
+            <a:ext cx="10058400" cy="365760"/>
           </a:xfrm>
           <a:prstGeom prst="rect">
             <a:avLst/>
@@ -8008,13 +8427,13 @@
           <a:lstStyle/>
           <a:p>
             <a:r>
-              <a:rPr sz="1200" b="1" i="0">
-                <a:solidFill>
-                  <a:srgbClr val="64748B"/>
-                </a:solidFill>
-                <a:latin typeface="Montserrat"/>
-              </a:rPr>
-              <a:t>DIMENSIONADO</a:t>
+              <a:rPr sz="1300" b="1" i="0">
+                <a:solidFill>
+                  <a:srgbClr val="E8801A"/>
+                </a:solidFill>
+                <a:latin typeface="Montserrat"/>
+              </a:rPr>
+              <a:t>SISTEMAS DE VENTILACIÓN</a:t>
             </a:r>
           </a:p>
         </p:txBody>
@@ -8042,26 +8461,70 @@
           <a:lstStyle/>
           <a:p>
             <a:r>
-              <a:rPr sz="2700" b="1" i="0">
+              <a:rPr sz="2800" b="1" i="0">
                 <a:solidFill>
                   <a:srgbClr val="1E2761"/>
                 </a:solidFill>
                 <a:latin typeface="Montserrat"/>
               </a:rPr>
-              <a:t>La regla de oro: 5 cm²/kW</a:t>
-            </a:r>
-          </a:p>
-        </p:txBody>
-      </p:sp>
-      <p:sp>
-        <p:nvSpPr>
-          <p:cNvPr id="7" name="TextBox 6"/>
+              <a:t>Ventilación indirecta</a:t>
+            </a:r>
+          </a:p>
+        </p:txBody>
+      </p:sp>
+      <p:sp>
+        <p:nvSpPr>
+          <p:cNvPr id="7" name="Rounded Rectangle 6"/>
+          <p:cNvSpPr/>
+          <p:nvPr/>
+        </p:nvSpPr>
+        <p:spPr>
+          <a:xfrm>
+            <a:off x="868680" y="1627632"/>
+            <a:ext cx="2011680" cy="73152"/>
+          </a:xfrm>
+          <a:prstGeom prst="roundRect">
+            <a:avLst/>
+          </a:prstGeom>
+          <a:solidFill>
+            <a:srgbClr val="E8801A"/>
+          </a:solidFill>
+          <a:ln>
+            <a:noFill/>
+          </a:ln>
+          <a:effectLst/>
+        </p:spPr>
+        <p:style>
+          <a:lnRef idx="1">
+            <a:schemeClr val="accent1"/>
+          </a:lnRef>
+          <a:fillRef idx="3">
+            <a:schemeClr val="accent1"/>
+          </a:fillRef>
+          <a:effectRef idx="2">
+            <a:schemeClr val="accent1"/>
+          </a:effectRef>
+          <a:fontRef idx="minor">
+            <a:schemeClr val="lt1"/>
+          </a:fontRef>
+        </p:style>
+        <p:txBody>
+          <a:bodyPr rtlCol="0" anchor="ctr"/>
+          <a:lstStyle/>
+          <a:p>
+            <a:pPr algn="ctr"/>
+          </a:p>
+        </p:txBody>
+      </p:sp>
+      <p:sp>
+        <p:nvSpPr>
+          <p:cNvPr id="8" name="TextBox 7"/>
           <p:cNvSpPr txBox="1"/>
           <p:nvPr/>
         </p:nvSpPr>
         <p:spPr>
           <a:xfrm>
-            <a:off x="822960" y="1920240"/>
+            <a:off x="822960" y="1965960"/>
             <a:ext cx="4983480" cy="4206240"/>
           </a:xfrm>
           <a:prstGeom prst="rect">
@@ -8077,17 +8540,17 @@
           <a:p>
             <a:pPr>
               <a:spcAft>
-                <a:spcPts val="1000"/>
+                <a:spcPts val="1100"/>
               </a:spcAft>
             </a:pPr>
             <a:r>
               <a:rPr sz="1600" b="1" i="0">
                 <a:solidFill>
-                  <a:srgbClr val="2E3A80"/>
-                </a:solidFill>
-                <a:latin typeface="Montserrat"/>
-              </a:rPr>
-              <a:t>•  </a:t>
+                  <a:srgbClr val="E8801A"/>
+                </a:solidFill>
+                <a:latin typeface="Montserrat"/>
+              </a:rPr>
+              <a:t>▸  </a:t>
             </a:r>
             <a:r>
               <a:rPr sz="1600" b="0" i="0">
@@ -8096,23 +8559,23 @@
                 </a:solidFill>
                 <a:latin typeface="Montserrat"/>
               </a:rPr>
-              <a:t>5 cm²/kW, mínimo 125 cm²</a:t>
+              <a:t>A través de un local contiguo</a:t>
             </a:r>
           </a:p>
           <a:p>
             <a:pPr>
               <a:spcAft>
-                <a:spcPts val="1000"/>
+                <a:spcPts val="1100"/>
               </a:spcAft>
             </a:pPr>
             <a:r>
               <a:rPr sz="1600" b="1" i="0">
                 <a:solidFill>
-                  <a:srgbClr val="2E3A80"/>
-                </a:solidFill>
-                <a:latin typeface="Montserrat"/>
-              </a:rPr>
-              <a:t>•  </a:t>
+                  <a:srgbClr val="E8801A"/>
+                </a:solidFill>
+                <a:latin typeface="Montserrat"/>
+              </a:rPr>
+              <a:t>▸  </a:t>
             </a:r>
             <a:r>
               <a:rPr sz="1600" b="0" i="0">
@@ -8121,23 +8584,23 @@
                 </a:solidFill>
                 <a:latin typeface="Montserrat"/>
               </a:rPr>
-              <a:t>Industrial &gt; 70 kW: dos aberturas cruzadas</a:t>
+              <a:t>Que tenga ventilación directa</a:t>
             </a:r>
           </a:p>
           <a:p>
             <a:pPr>
               <a:spcAft>
-                <a:spcPts val="1000"/>
+                <a:spcPts val="1100"/>
               </a:spcAft>
             </a:pPr>
             <a:r>
               <a:rPr sz="1600" b="1" i="0">
                 <a:solidFill>
-                  <a:srgbClr val="2E3A80"/>
-                </a:solidFill>
-                <a:latin typeface="Montserrat"/>
-              </a:rPr>
-              <a:t>•  </a:t>
+                  <a:srgbClr val="E8801A"/>
+                </a:solidFill>
+                <a:latin typeface="Montserrat"/>
+              </a:rPr>
+              <a:t>▸  </a:t>
             </a:r>
             <a:r>
               <a:rPr sz="1600" b="0" i="0">
@@ -8146,14 +8609,14 @@
                 </a:solidFill>
                 <a:latin typeface="Montserrat"/>
               </a:rPr>
-              <a:t>Conducto &gt; 3 m: +50%; &gt; 10 m: +150%</a:t>
-            </a:r>
-          </a:p>
-        </p:txBody>
-      </p:sp>
-      <p:sp>
-        <p:nvSpPr>
-          <p:cNvPr id="8" name="imgph" descr="IMGQ:ventilation grilles factory wall"/>
+              <a:t>Nunca dormitorio, baño o aseo</a:t>
+            </a:r>
+          </a:p>
+        </p:txBody>
+      </p:sp>
+      <p:sp>
+        <p:nvSpPr>
+          <p:cNvPr id="9" name="imgph" descr="IMGQ:interior doorway between rooms"/>
           <p:cNvSpPr/>
           <p:nvPr/>
         </p:nvSpPr>
@@ -8199,7 +8662,7 @@
       </p:sp>
       <p:sp>
         <p:nvSpPr>
-          <p:cNvPr id="9" name="TextBox 8"/>
+          <p:cNvPr id="10" name="TextBox 9"/>
           <p:cNvSpPr txBox="1"/>
           <p:nvPr/>
         </p:nvSpPr>
@@ -8239,7 +8702,7 @@
                 </a:solidFill>
                 <a:latin typeface="Montserrat"/>
               </a:rPr>
-              <a:t>ventilation grilles factory wall</a:t>
+              <a:t>interior doorway between rooms</a:t>
             </a:r>
           </a:p>
         </p:txBody>
@@ -8336,7 +8799,7 @@
                 </a:solidFill>
                 <a:latin typeface="Montserrat"/>
               </a:rPr>
-              <a:t>018 / 020</a:t>
+              <a:t>018 / 021</a:t>
             </a:r>
           </a:p>
         </p:txBody>
@@ -8384,7 +8847,7 @@
         <p:spPr>
           <a:xfrm>
             <a:off x="822960" y="457200"/>
-            <a:ext cx="8229600" cy="365760"/>
+            <a:ext cx="10058400" cy="365760"/>
           </a:xfrm>
           <a:prstGeom prst="rect">
             <a:avLst/>
@@ -8398,13 +8861,13 @@
           <a:lstStyle/>
           <a:p>
             <a:r>
-              <a:rPr sz="1200" b="1" i="0">
-                <a:solidFill>
-                  <a:srgbClr val="64748B"/>
-                </a:solidFill>
-                <a:latin typeface="Montserrat"/>
-              </a:rPr>
-              <a:t>TABLA 2 · UBICACIÓN</a:t>
+              <a:rPr sz="1300" b="1" i="0">
+                <a:solidFill>
+                  <a:srgbClr val="E8801A"/>
+                </a:solidFill>
+                <a:latin typeface="Montserrat"/>
+              </a:rPr>
+              <a:t>DIMENSIONADO</a:t>
             </a:r>
           </a:p>
         </p:txBody>
@@ -8432,26 +8895,70 @@
           <a:lstStyle/>
           <a:p>
             <a:r>
-              <a:rPr sz="2700" b="1" i="0">
+              <a:rPr sz="2800" b="1" i="0">
                 <a:solidFill>
                   <a:srgbClr val="1E2761"/>
                 </a:solidFill>
                 <a:latin typeface="Montserrat"/>
               </a:rPr>
-              <a:t>La ventilación se coloca según pesa el gas</a:t>
-            </a:r>
-          </a:p>
-        </p:txBody>
-      </p:sp>
-      <p:sp>
-        <p:nvSpPr>
-          <p:cNvPr id="7" name="TextBox 6"/>
+              <a:t>La regla de oro: 5 cm²/kW</a:t>
+            </a:r>
+          </a:p>
+        </p:txBody>
+      </p:sp>
+      <p:sp>
+        <p:nvSpPr>
+          <p:cNvPr id="7" name="Rounded Rectangle 6"/>
+          <p:cNvSpPr/>
+          <p:nvPr/>
+        </p:nvSpPr>
+        <p:spPr>
+          <a:xfrm>
+            <a:off x="868680" y="1627632"/>
+            <a:ext cx="2011680" cy="73152"/>
+          </a:xfrm>
+          <a:prstGeom prst="roundRect">
+            <a:avLst/>
+          </a:prstGeom>
+          <a:solidFill>
+            <a:srgbClr val="E8801A"/>
+          </a:solidFill>
+          <a:ln>
+            <a:noFill/>
+          </a:ln>
+          <a:effectLst/>
+        </p:spPr>
+        <p:style>
+          <a:lnRef idx="1">
+            <a:schemeClr val="accent1"/>
+          </a:lnRef>
+          <a:fillRef idx="3">
+            <a:schemeClr val="accent1"/>
+          </a:fillRef>
+          <a:effectRef idx="2">
+            <a:schemeClr val="accent1"/>
+          </a:effectRef>
+          <a:fontRef idx="minor">
+            <a:schemeClr val="lt1"/>
+          </a:fontRef>
+        </p:style>
+        <p:txBody>
+          <a:bodyPr rtlCol="0" anchor="ctr"/>
+          <a:lstStyle/>
+          <a:p>
+            <a:pPr algn="ctr"/>
+          </a:p>
+        </p:txBody>
+      </p:sp>
+      <p:sp>
+        <p:nvSpPr>
+          <p:cNvPr id="8" name="TextBox 7"/>
           <p:cNvSpPr txBox="1"/>
           <p:nvPr/>
         </p:nvSpPr>
         <p:spPr>
           <a:xfrm>
-            <a:off x="822960" y="1920240"/>
+            <a:off x="822960" y="1965960"/>
             <a:ext cx="4983480" cy="4206240"/>
           </a:xfrm>
           <a:prstGeom prst="rect">
@@ -8467,17 +8974,17 @@
           <a:p>
             <a:pPr>
               <a:spcAft>
-                <a:spcPts val="1000"/>
+                <a:spcPts val="1100"/>
               </a:spcAft>
             </a:pPr>
             <a:r>
               <a:rPr sz="1600" b="1" i="0">
                 <a:solidFill>
-                  <a:srgbClr val="2E3A80"/>
-                </a:solidFill>
-                <a:latin typeface="Montserrat"/>
-              </a:rPr>
-              <a:t>•  </a:t>
+                  <a:srgbClr val="E8801A"/>
+                </a:solidFill>
+                <a:latin typeface="Montserrat"/>
+              </a:rPr>
+              <a:t>▸  </a:t>
             </a:r>
             <a:r>
               <a:rPr sz="1600" b="0" i="0">
@@ -8486,23 +8993,23 @@
                 </a:solidFill>
                 <a:latin typeface="Montserrat"/>
               </a:rPr>
-              <a:t>Gas natural (sube): abertura arriba</a:t>
+              <a:t>5 cm²/kW, mínimo 125 cm²</a:t>
             </a:r>
           </a:p>
           <a:p>
             <a:pPr>
               <a:spcAft>
-                <a:spcPts val="1000"/>
+                <a:spcPts val="1100"/>
               </a:spcAft>
             </a:pPr>
             <a:r>
               <a:rPr sz="1600" b="1" i="0">
                 <a:solidFill>
-                  <a:srgbClr val="2E3A80"/>
-                </a:solidFill>
-                <a:latin typeface="Montserrat"/>
-              </a:rPr>
-              <a:t>•  </a:t>
+                  <a:srgbClr val="E8801A"/>
+                </a:solidFill>
+                <a:latin typeface="Montserrat"/>
+              </a:rPr>
+              <a:t>▸  </a:t>
             </a:r>
             <a:r>
               <a:rPr sz="1600" b="0" i="0">
@@ -8511,23 +9018,23 @@
                 </a:solidFill>
                 <a:latin typeface="Montserrat"/>
               </a:rPr>
-              <a:t>GLP (baja): abertura abajo</a:t>
+              <a:t>Industrial &gt; 70 kW: dos aberturas cruzadas</a:t>
             </a:r>
           </a:p>
           <a:p>
             <a:pPr>
               <a:spcAft>
-                <a:spcPts val="1000"/>
+                <a:spcPts val="1100"/>
               </a:spcAft>
             </a:pPr>
             <a:r>
               <a:rPr sz="1600" b="1" i="0">
                 <a:solidFill>
-                  <a:srgbClr val="2E3A80"/>
-                </a:solidFill>
-                <a:latin typeface="Montserrat"/>
-              </a:rPr>
-              <a:t>•  </a:t>
+                  <a:srgbClr val="E8801A"/>
+                </a:solidFill>
+                <a:latin typeface="Montserrat"/>
+              </a:rPr>
+              <a:t>▸  </a:t>
             </a:r>
             <a:r>
               <a:rPr sz="1600" b="0" i="0">
@@ -8536,14 +9043,14 @@
                 </a:solidFill>
                 <a:latin typeface="Montserrat"/>
               </a:rPr>
-              <a:t>Mucho tipo A: arriba y abajo</a:t>
-            </a:r>
-          </a:p>
-        </p:txBody>
-      </p:sp>
-      <p:sp>
-        <p:nvSpPr>
-          <p:cNvPr id="8" name="imgph" descr="IMGQ:low wall vent near floor"/>
+              <a:t>Conducto &gt; 3 m: +50%; &gt; 10 m: +150%</a:t>
+            </a:r>
+          </a:p>
+        </p:txBody>
+      </p:sp>
+      <p:sp>
+        <p:nvSpPr>
+          <p:cNvPr id="9" name="imgph" descr="IMGQ:ventilation grilles factory wall"/>
           <p:cNvSpPr/>
           <p:nvPr/>
         </p:nvSpPr>
@@ -8589,7 +9096,7 @@
       </p:sp>
       <p:sp>
         <p:nvSpPr>
-          <p:cNvPr id="9" name="TextBox 8"/>
+          <p:cNvPr id="10" name="TextBox 9"/>
           <p:cNvSpPr txBox="1"/>
           <p:nvPr/>
         </p:nvSpPr>
@@ -8629,7 +9136,7 @@
                 </a:solidFill>
                 <a:latin typeface="Montserrat"/>
               </a:rPr>
-              <a:t>low wall vent near floor</a:t>
+              <a:t>ventilation grilles factory wall</a:t>
             </a:r>
           </a:p>
         </p:txBody>
@@ -8726,7 +9233,7 @@
                 </a:solidFill>
                 <a:latin typeface="Montserrat"/>
               </a:rPr>
-              <a:t>019 / 020</a:t>
+              <a:t>019 / 021</a:t>
             </a:r>
           </a:p>
         </p:txBody>
@@ -8774,7 +9281,7 @@
         <p:spPr>
           <a:xfrm>
             <a:off x="822960" y="457200"/>
-            <a:ext cx="8229600" cy="365760"/>
+            <a:ext cx="10058400" cy="365760"/>
           </a:xfrm>
           <a:prstGeom prst="rect">
             <a:avLst/>
@@ -8788,13 +9295,13 @@
           <a:lstStyle/>
           <a:p>
             <a:r>
-              <a:rPr sz="1200" b="1" i="0">
-                <a:solidFill>
-                  <a:srgbClr val="64748B"/>
-                </a:solidFill>
-                <a:latin typeface="Montserrat"/>
-              </a:rPr>
-              <a:t>APARATOS CONCRETOS</a:t>
+              <a:rPr sz="1300" b="1" i="0">
+                <a:solidFill>
+                  <a:srgbClr val="E8801A"/>
+                </a:solidFill>
+                <a:latin typeface="Montserrat"/>
+              </a:rPr>
+              <a:t>TABLA 2 · UBICACIÓN</a:t>
             </a:r>
           </a:p>
         </p:txBody>
@@ -8822,26 +9329,70 @@
           <a:lstStyle/>
           <a:p>
             <a:r>
-              <a:rPr sz="2700" b="1" i="0">
+              <a:rPr sz="2800" b="1" i="0">
                 <a:solidFill>
                   <a:srgbClr val="1E2761"/>
                 </a:solidFill>
                 <a:latin typeface="Montserrat"/>
               </a:rPr>
-              <a:t>Generadores de aire caliente</a:t>
-            </a:r>
-          </a:p>
-        </p:txBody>
-      </p:sp>
-      <p:sp>
-        <p:nvSpPr>
-          <p:cNvPr id="7" name="TextBox 6"/>
+              <a:t>La ventilación se coloca según pesa el gas</a:t>
+            </a:r>
+          </a:p>
+        </p:txBody>
+      </p:sp>
+      <p:sp>
+        <p:nvSpPr>
+          <p:cNvPr id="7" name="Rounded Rectangle 6"/>
+          <p:cNvSpPr/>
+          <p:nvPr/>
+        </p:nvSpPr>
+        <p:spPr>
+          <a:xfrm>
+            <a:off x="868680" y="1627632"/>
+            <a:ext cx="2011680" cy="73152"/>
+          </a:xfrm>
+          <a:prstGeom prst="roundRect">
+            <a:avLst/>
+          </a:prstGeom>
+          <a:solidFill>
+            <a:srgbClr val="E8801A"/>
+          </a:solidFill>
+          <a:ln>
+            <a:noFill/>
+          </a:ln>
+          <a:effectLst/>
+        </p:spPr>
+        <p:style>
+          <a:lnRef idx="1">
+            <a:schemeClr val="accent1"/>
+          </a:lnRef>
+          <a:fillRef idx="3">
+            <a:schemeClr val="accent1"/>
+          </a:fillRef>
+          <a:effectRef idx="2">
+            <a:schemeClr val="accent1"/>
+          </a:effectRef>
+          <a:fontRef idx="minor">
+            <a:schemeClr val="lt1"/>
+          </a:fontRef>
+        </p:style>
+        <p:txBody>
+          <a:bodyPr rtlCol="0" anchor="ctr"/>
+          <a:lstStyle/>
+          <a:p>
+            <a:pPr algn="ctr"/>
+          </a:p>
+        </p:txBody>
+      </p:sp>
+      <p:sp>
+        <p:nvSpPr>
+          <p:cNvPr id="8" name="TextBox 7"/>
           <p:cNvSpPr txBox="1"/>
           <p:nvPr/>
         </p:nvSpPr>
         <p:spPr>
           <a:xfrm>
-            <a:off x="822960" y="1920240"/>
+            <a:off x="822960" y="1965960"/>
             <a:ext cx="4983480" cy="4206240"/>
           </a:xfrm>
           <a:prstGeom prst="rect">
@@ -8857,17 +9408,17 @@
           <a:p>
             <a:pPr>
               <a:spcAft>
-                <a:spcPts val="1000"/>
+                <a:spcPts val="1100"/>
               </a:spcAft>
             </a:pPr>
             <a:r>
               <a:rPr sz="1600" b="1" i="0">
                 <a:solidFill>
-                  <a:srgbClr val="2E3A80"/>
-                </a:solidFill>
-                <a:latin typeface="Montserrat"/>
-              </a:rPr>
-              <a:t>•  </a:t>
+                  <a:srgbClr val="E8801A"/>
+                </a:solidFill>
+                <a:latin typeface="Montserrat"/>
+              </a:rPr>
+              <a:t>▸  </a:t>
             </a:r>
             <a:r>
               <a:rPr sz="1600" b="0" i="0">
@@ -8876,23 +9427,23 @@
                 </a:solidFill>
                 <a:latin typeface="Montserrat"/>
               </a:rPr>
-              <a:t>Aire de dentro: 5 cm²/kW, mín. 125</a:t>
+              <a:t>Gas natural (sube): abertura arriba</a:t>
             </a:r>
           </a:p>
           <a:p>
             <a:pPr>
               <a:spcAft>
-                <a:spcPts val="1000"/>
+                <a:spcPts val="1100"/>
               </a:spcAft>
             </a:pPr>
             <a:r>
               <a:rPr sz="1600" b="1" i="0">
                 <a:solidFill>
-                  <a:srgbClr val="2E3A80"/>
-                </a:solidFill>
-                <a:latin typeface="Montserrat"/>
-              </a:rPr>
-              <a:t>•  </a:t>
+                  <a:srgbClr val="E8801A"/>
+                </a:solidFill>
+                <a:latin typeface="Montserrat"/>
+              </a:rPr>
+              <a:t>▸  </a:t>
             </a:r>
             <a:r>
               <a:rPr sz="1600" b="0" i="0">
@@ -8901,23 +9452,23 @@
                 </a:solidFill>
                 <a:latin typeface="Montserrat"/>
               </a:rPr>
-              <a:t>Aire de fuera: 1,5 cm²/kW, mín. 70</a:t>
+              <a:t>GLP (baja): abertura abajo</a:t>
             </a:r>
           </a:p>
           <a:p>
             <a:pPr>
               <a:spcAft>
-                <a:spcPts val="1000"/>
+                <a:spcPts val="1100"/>
               </a:spcAft>
             </a:pPr>
             <a:r>
               <a:rPr sz="1600" b="1" i="0">
                 <a:solidFill>
-                  <a:srgbClr val="2E3A80"/>
-                </a:solidFill>
-                <a:latin typeface="Montserrat"/>
-              </a:rPr>
-              <a:t>•  </a:t>
+                  <a:srgbClr val="E8801A"/>
+                </a:solidFill>
+                <a:latin typeface="Montserrat"/>
+              </a:rPr>
+              <a:t>▸  </a:t>
             </a:r>
             <a:r>
               <a:rPr sz="1600" b="0" i="0">
@@ -8926,14 +9477,14 @@
                 </a:solidFill>
                 <a:latin typeface="Montserrat"/>
               </a:rPr>
-              <a:t>Quien respira de fuera, molesta menos</a:t>
-            </a:r>
-          </a:p>
-        </p:txBody>
-      </p:sp>
-      <p:sp>
-        <p:nvSpPr>
-          <p:cNvPr id="8" name="imgph" descr="IMGQ:warm air heating unit industrial"/>
+              <a:t>Mucho tipo A: arriba y abajo</a:t>
+            </a:r>
+          </a:p>
+        </p:txBody>
+      </p:sp>
+      <p:sp>
+        <p:nvSpPr>
+          <p:cNvPr id="9" name="imgph" descr="IMGQ:low wall vent near floor"/>
           <p:cNvSpPr/>
           <p:nvPr/>
         </p:nvSpPr>
@@ -8979,7 +9530,7 @@
       </p:sp>
       <p:sp>
         <p:nvSpPr>
-          <p:cNvPr id="9" name="TextBox 8"/>
+          <p:cNvPr id="10" name="TextBox 9"/>
           <p:cNvSpPr txBox="1"/>
           <p:nvPr/>
         </p:nvSpPr>
@@ -9019,7 +9570,7 @@
                 </a:solidFill>
                 <a:latin typeface="Montserrat"/>
               </a:rPr>
-              <a:t>warm air heating unit industrial</a:t>
+              <a:t>low wall vent near floor</a:t>
             </a:r>
           </a:p>
         </p:txBody>
@@ -9116,7 +9667,7 @@
                 </a:solidFill>
                 <a:latin typeface="Montserrat"/>
               </a:rPr>
-              <a:t>002 / 020</a:t>
+              <a:t>002 / 021</a:t>
             </a:r>
           </a:p>
         </p:txBody>
@@ -9180,7 +9731,7 @@
             <a:r>
               <a:rPr sz="2700" b="1" i="0">
                 <a:solidFill>
-                  <a:srgbClr val="1E2761"/>
+                  <a:srgbClr val="E8801A"/>
                 </a:solidFill>
                 <a:latin typeface="Montserrat"/>
               </a:rPr>
@@ -9192,6 +9743,50 @@
       <p:sp>
         <p:nvSpPr>
           <p:cNvPr id="6" name="Rounded Rectangle 5"/>
+          <p:cNvSpPr/>
+          <p:nvPr/>
+        </p:nvSpPr>
+        <p:spPr>
+          <a:xfrm>
+            <a:off x="868680" y="1234440"/>
+            <a:ext cx="1463040" cy="73152"/>
+          </a:xfrm>
+          <a:prstGeom prst="roundRect">
+            <a:avLst/>
+          </a:prstGeom>
+          <a:solidFill>
+            <a:srgbClr val="1E2761"/>
+          </a:solidFill>
+          <a:ln>
+            <a:noFill/>
+          </a:ln>
+          <a:effectLst/>
+        </p:spPr>
+        <p:style>
+          <a:lnRef idx="1">
+            <a:schemeClr val="accent1"/>
+          </a:lnRef>
+          <a:fillRef idx="3">
+            <a:schemeClr val="accent1"/>
+          </a:fillRef>
+          <a:effectRef idx="2">
+            <a:schemeClr val="accent1"/>
+          </a:effectRef>
+          <a:fontRef idx="minor">
+            <a:schemeClr val="lt1"/>
+          </a:fontRef>
+        </p:style>
+        <p:txBody>
+          <a:bodyPr rtlCol="0" anchor="ctr"/>
+          <a:lstStyle/>
+          <a:p>
+            <a:pPr algn="ctr"/>
+          </a:p>
+        </p:txBody>
+      </p:sp>
+      <p:sp>
+        <p:nvSpPr>
+          <p:cNvPr id="7" name="Rounded Rectangle 6"/>
           <p:cNvSpPr/>
           <p:nvPr/>
         </p:nvSpPr>
@@ -9237,7 +9832,7 @@
       </p:sp>
       <p:sp>
         <p:nvSpPr>
-          <p:cNvPr id="7" name="TextBox 6"/>
+          <p:cNvPr id="8" name="TextBox 7"/>
           <p:cNvSpPr txBox="1"/>
           <p:nvPr/>
         </p:nvSpPr>
@@ -9272,7 +9867,7 @@
       </p:sp>
       <p:sp>
         <p:nvSpPr>
-          <p:cNvPr id="8" name="TextBox 7"/>
+          <p:cNvPr id="9" name="TextBox 8"/>
           <p:cNvSpPr txBox="1"/>
           <p:nvPr/>
         </p:nvSpPr>
@@ -9307,7 +9902,7 @@
       </p:sp>
       <p:sp>
         <p:nvSpPr>
-          <p:cNvPr id="9" name="Rounded Rectangle 8"/>
+          <p:cNvPr id="10" name="Rounded Rectangle 9"/>
           <p:cNvSpPr/>
           <p:nvPr/>
         </p:nvSpPr>
@@ -9353,7 +9948,7 @@
       </p:sp>
       <p:sp>
         <p:nvSpPr>
-          <p:cNvPr id="10" name="TextBox 9"/>
+          <p:cNvPr id="11" name="TextBox 10"/>
           <p:cNvSpPr txBox="1"/>
           <p:nvPr/>
         </p:nvSpPr>
@@ -9388,7 +9983,7 @@
       </p:sp>
       <p:sp>
         <p:nvSpPr>
-          <p:cNvPr id="11" name="TextBox 10"/>
+          <p:cNvPr id="12" name="TextBox 11"/>
           <p:cNvSpPr txBox="1"/>
           <p:nvPr/>
         </p:nvSpPr>
@@ -9423,7 +10018,7 @@
       </p:sp>
       <p:sp>
         <p:nvSpPr>
-          <p:cNvPr id="12" name="Rounded Rectangle 11"/>
+          <p:cNvPr id="13" name="Rounded Rectangle 12"/>
           <p:cNvSpPr/>
           <p:nvPr/>
         </p:nvSpPr>
@@ -9469,7 +10064,7 @@
       </p:sp>
       <p:sp>
         <p:nvSpPr>
-          <p:cNvPr id="13" name="TextBox 12"/>
+          <p:cNvPr id="14" name="TextBox 13"/>
           <p:cNvSpPr txBox="1"/>
           <p:nvPr/>
         </p:nvSpPr>
@@ -9504,7 +10099,7 @@
       </p:sp>
       <p:sp>
         <p:nvSpPr>
-          <p:cNvPr id="14" name="TextBox 13"/>
+          <p:cNvPr id="15" name="TextBox 14"/>
           <p:cNvSpPr txBox="1"/>
           <p:nvPr/>
         </p:nvSpPr>
@@ -9570,6 +10165,440 @@
             <a:avLst/>
           </a:prstGeom>
           <a:solidFill>
+            <a:srgbClr val="FFFFFF"/>
+          </a:solidFill>
+          <a:ln>
+            <a:noFill/>
+          </a:ln>
+          <a:effectLst/>
+        </p:spPr>
+        <p:style>
+          <a:lnRef idx="1">
+            <a:schemeClr val="accent1"/>
+          </a:lnRef>
+          <a:fillRef idx="3">
+            <a:schemeClr val="accent1"/>
+          </a:fillRef>
+          <a:effectRef idx="2">
+            <a:schemeClr val="accent1"/>
+          </a:effectRef>
+          <a:fontRef idx="minor">
+            <a:schemeClr val="lt1"/>
+          </a:fontRef>
+        </p:style>
+        <p:txBody>
+          <a:bodyPr rtlCol="0" anchor="ctr"/>
+          <a:lstStyle/>
+          <a:p>
+            <a:pPr algn="ctr"/>
+          </a:p>
+        </p:txBody>
+      </p:sp>
+      <p:sp>
+        <p:nvSpPr>
+          <p:cNvPr id="3" name="TextBox 2"/>
+          <p:cNvSpPr txBox="1"/>
+          <p:nvPr/>
+        </p:nvSpPr>
+        <p:spPr>
+          <a:xfrm>
+            <a:off x="10607040" y="320040"/>
+            <a:ext cx="1371600" cy="365760"/>
+          </a:xfrm>
+          <a:prstGeom prst="rect">
+            <a:avLst/>
+          </a:prstGeom>
+          <a:noFill/>
+        </p:spPr>
+        <p:txBody>
+          <a:bodyPr wrap="square">
+            <a:spAutoFit/>
+          </a:bodyPr>
+          <a:lstStyle/>
+          <a:p>
+            <a:pPr algn="r"/>
+            <a:r>
+              <a:rPr sz="1000" b="1" i="0">
+                <a:solidFill>
+                  <a:srgbClr val="64748B"/>
+                </a:solidFill>
+                <a:latin typeface="Montserrat"/>
+              </a:rPr>
+              <a:t>020 / 021</a:t>
+            </a:r>
+          </a:p>
+        </p:txBody>
+      </p:sp>
+      <p:sp>
+        <p:nvSpPr>
+          <p:cNvPr id="4" name="TextBox 3"/>
+          <p:cNvSpPr txBox="1"/>
+          <p:nvPr/>
+        </p:nvSpPr>
+        <p:spPr>
+          <a:xfrm>
+            <a:off x="457200" y="6419088"/>
+            <a:ext cx="8229600" cy="365760"/>
+          </a:xfrm>
+          <a:prstGeom prst="rect">
+            <a:avLst/>
+          </a:prstGeom>
+          <a:noFill/>
+        </p:spPr>
+        <p:txBody>
+          <a:bodyPr wrap="square">
+            <a:spAutoFit/>
+          </a:bodyPr>
+          <a:lstStyle/>
+          <a:p>
+            <a:r>
+              <a:rPr sz="900" b="0" i="0">
+                <a:solidFill>
+                  <a:srgbClr val="64748B"/>
+                </a:solidFill>
+                <a:latin typeface="Montserrat"/>
+              </a:rPr>
+              <a:t>Curso Gas B · Tema 13 · UNE 60670-6</a:t>
+            </a:r>
+          </a:p>
+        </p:txBody>
+      </p:sp>
+      <p:sp>
+        <p:nvSpPr>
+          <p:cNvPr id="5" name="TextBox 4"/>
+          <p:cNvSpPr txBox="1"/>
+          <p:nvPr/>
+        </p:nvSpPr>
+        <p:spPr>
+          <a:xfrm>
+            <a:off x="822960" y="457200"/>
+            <a:ext cx="10058400" cy="365760"/>
+          </a:xfrm>
+          <a:prstGeom prst="rect">
+            <a:avLst/>
+          </a:prstGeom>
+          <a:noFill/>
+        </p:spPr>
+        <p:txBody>
+          <a:bodyPr wrap="square">
+            <a:spAutoFit/>
+          </a:bodyPr>
+          <a:lstStyle/>
+          <a:p>
+            <a:r>
+              <a:rPr sz="1300" b="1" i="0">
+                <a:solidFill>
+                  <a:srgbClr val="E8801A"/>
+                </a:solidFill>
+                <a:latin typeface="Montserrat"/>
+              </a:rPr>
+              <a:t>APARATOS CONCRETOS</a:t>
+            </a:r>
+          </a:p>
+        </p:txBody>
+      </p:sp>
+      <p:sp>
+        <p:nvSpPr>
+          <p:cNvPr id="6" name="TextBox 5"/>
+          <p:cNvSpPr txBox="1"/>
+          <p:nvPr/>
+        </p:nvSpPr>
+        <p:spPr>
+          <a:xfrm>
+            <a:off x="822960" y="868680"/>
+            <a:ext cx="10515600" cy="914400"/>
+          </a:xfrm>
+          <a:prstGeom prst="rect">
+            <a:avLst/>
+          </a:prstGeom>
+          <a:noFill/>
+        </p:spPr>
+        <p:txBody>
+          <a:bodyPr wrap="square">
+            <a:spAutoFit/>
+          </a:bodyPr>
+          <a:lstStyle/>
+          <a:p>
+            <a:r>
+              <a:rPr sz="2800" b="1" i="0">
+                <a:solidFill>
+                  <a:srgbClr val="1E2761"/>
+                </a:solidFill>
+                <a:latin typeface="Montserrat"/>
+              </a:rPr>
+              <a:t>Generadores de aire caliente</a:t>
+            </a:r>
+          </a:p>
+        </p:txBody>
+      </p:sp>
+      <p:sp>
+        <p:nvSpPr>
+          <p:cNvPr id="7" name="Rounded Rectangle 6"/>
+          <p:cNvSpPr/>
+          <p:nvPr/>
+        </p:nvSpPr>
+        <p:spPr>
+          <a:xfrm>
+            <a:off x="868680" y="1627632"/>
+            <a:ext cx="2011680" cy="73152"/>
+          </a:xfrm>
+          <a:prstGeom prst="roundRect">
+            <a:avLst/>
+          </a:prstGeom>
+          <a:solidFill>
+            <a:srgbClr val="E8801A"/>
+          </a:solidFill>
+          <a:ln>
+            <a:noFill/>
+          </a:ln>
+          <a:effectLst/>
+        </p:spPr>
+        <p:style>
+          <a:lnRef idx="1">
+            <a:schemeClr val="accent1"/>
+          </a:lnRef>
+          <a:fillRef idx="3">
+            <a:schemeClr val="accent1"/>
+          </a:fillRef>
+          <a:effectRef idx="2">
+            <a:schemeClr val="accent1"/>
+          </a:effectRef>
+          <a:fontRef idx="minor">
+            <a:schemeClr val="lt1"/>
+          </a:fontRef>
+        </p:style>
+        <p:txBody>
+          <a:bodyPr rtlCol="0" anchor="ctr"/>
+          <a:lstStyle/>
+          <a:p>
+            <a:pPr algn="ctr"/>
+          </a:p>
+        </p:txBody>
+      </p:sp>
+      <p:sp>
+        <p:nvSpPr>
+          <p:cNvPr id="8" name="TextBox 7"/>
+          <p:cNvSpPr txBox="1"/>
+          <p:nvPr/>
+        </p:nvSpPr>
+        <p:spPr>
+          <a:xfrm>
+            <a:off x="822960" y="1965960"/>
+            <a:ext cx="4983480" cy="4206240"/>
+          </a:xfrm>
+          <a:prstGeom prst="rect">
+            <a:avLst/>
+          </a:prstGeom>
+          <a:noFill/>
+        </p:spPr>
+        <p:txBody>
+          <a:bodyPr wrap="square">
+            <a:spAutoFit/>
+          </a:bodyPr>
+          <a:lstStyle/>
+          <a:p>
+            <a:pPr>
+              <a:spcAft>
+                <a:spcPts val="1100"/>
+              </a:spcAft>
+            </a:pPr>
+            <a:r>
+              <a:rPr sz="1600" b="1" i="0">
+                <a:solidFill>
+                  <a:srgbClr val="E8801A"/>
+                </a:solidFill>
+                <a:latin typeface="Montserrat"/>
+              </a:rPr>
+              <a:t>▸  </a:t>
+            </a:r>
+            <a:r>
+              <a:rPr sz="1600" b="0" i="0">
+                <a:solidFill>
+                  <a:srgbClr val="1B2330"/>
+                </a:solidFill>
+                <a:latin typeface="Montserrat"/>
+              </a:rPr>
+              <a:t>Aire de dentro: 5 cm²/kW, mín. 125</a:t>
+            </a:r>
+          </a:p>
+          <a:p>
+            <a:pPr>
+              <a:spcAft>
+                <a:spcPts val="1100"/>
+              </a:spcAft>
+            </a:pPr>
+            <a:r>
+              <a:rPr sz="1600" b="1" i="0">
+                <a:solidFill>
+                  <a:srgbClr val="E8801A"/>
+                </a:solidFill>
+                <a:latin typeface="Montserrat"/>
+              </a:rPr>
+              <a:t>▸  </a:t>
+            </a:r>
+            <a:r>
+              <a:rPr sz="1600" b="0" i="0">
+                <a:solidFill>
+                  <a:srgbClr val="1B2330"/>
+                </a:solidFill>
+                <a:latin typeface="Montserrat"/>
+              </a:rPr>
+              <a:t>Aire de fuera: 1,5 cm²/kW, mín. 70</a:t>
+            </a:r>
+          </a:p>
+          <a:p>
+            <a:pPr>
+              <a:spcAft>
+                <a:spcPts val="1100"/>
+              </a:spcAft>
+            </a:pPr>
+            <a:r>
+              <a:rPr sz="1600" b="1" i="0">
+                <a:solidFill>
+                  <a:srgbClr val="E8801A"/>
+                </a:solidFill>
+                <a:latin typeface="Montserrat"/>
+              </a:rPr>
+              <a:t>▸  </a:t>
+            </a:r>
+            <a:r>
+              <a:rPr sz="1600" b="0" i="0">
+                <a:solidFill>
+                  <a:srgbClr val="1B2330"/>
+                </a:solidFill>
+                <a:latin typeface="Montserrat"/>
+              </a:rPr>
+              <a:t>Quien respira de fuera, molesta menos</a:t>
+            </a:r>
+          </a:p>
+        </p:txBody>
+      </p:sp>
+      <p:sp>
+        <p:nvSpPr>
+          <p:cNvPr id="9" name="imgph" descr="IMGQ:warm air heating unit industrial"/>
+          <p:cNvSpPr/>
+          <p:nvPr/>
+        </p:nvSpPr>
+        <p:spPr>
+          <a:xfrm>
+            <a:off x="5806440" y="1051560"/>
+            <a:ext cx="5298947" cy="4629150"/>
+          </a:xfrm>
+          <a:prstGeom prst="roundRect">
+            <a:avLst/>
+          </a:prstGeom>
+          <a:solidFill>
+            <a:srgbClr val="F3F6FB"/>
+          </a:solidFill>
+          <a:ln w="12700">
+            <a:solidFill>
+              <a:srgbClr val="C7D2E6"/>
+            </a:solidFill>
+          </a:ln>
+          <a:effectLst/>
+        </p:spPr>
+        <p:style>
+          <a:lnRef idx="1">
+            <a:schemeClr val="accent1"/>
+          </a:lnRef>
+          <a:fillRef idx="3">
+            <a:schemeClr val="accent1"/>
+          </a:fillRef>
+          <a:effectRef idx="2">
+            <a:schemeClr val="accent1"/>
+          </a:effectRef>
+          <a:fontRef idx="minor">
+            <a:schemeClr val="lt1"/>
+          </a:fontRef>
+        </p:style>
+        <p:txBody>
+          <a:bodyPr rtlCol="0" anchor="ctr"/>
+          <a:lstStyle/>
+          <a:p>
+            <a:pPr algn="ctr"/>
+          </a:p>
+        </p:txBody>
+      </p:sp>
+      <p:sp>
+        <p:nvSpPr>
+          <p:cNvPr id="10" name="TextBox 9"/>
+          <p:cNvSpPr txBox="1"/>
+          <p:nvPr/>
+        </p:nvSpPr>
+        <p:spPr>
+          <a:xfrm>
+            <a:off x="6080760" y="2726055"/>
+            <a:ext cx="4750307" cy="1280160"/>
+          </a:xfrm>
+          <a:prstGeom prst="rect">
+            <a:avLst/>
+          </a:prstGeom>
+          <a:noFill/>
+        </p:spPr>
+        <p:txBody>
+          <a:bodyPr wrap="square">
+            <a:spAutoFit/>
+          </a:bodyPr>
+          <a:lstStyle/>
+          <a:p>
+            <a:pPr algn="ctr"/>
+            <a:r>
+              <a:rPr sz="1400" b="1" i="0">
+                <a:solidFill>
+                  <a:srgbClr val="64748B"/>
+                </a:solidFill>
+                <a:latin typeface="Montserrat"/>
+              </a:rPr>
+              <a:t>IMAGEN REALISTA</a:t>
+            </a:r>
+          </a:p>
+          <a:p>
+            <a:pPr algn="ctr"/>
+            <a:r>
+              <a:rPr sz="1100" b="0" i="1">
+                <a:solidFill>
+                  <a:srgbClr val="64748B"/>
+                </a:solidFill>
+                <a:latin typeface="Montserrat"/>
+              </a:rPr>
+              <a:t>warm air heating unit industrial</a:t>
+            </a:r>
+          </a:p>
+        </p:txBody>
+      </p:sp>
+    </p:spTree>
+  </p:cSld>
+  <p:clrMapOvr>
+    <a:masterClrMapping/>
+  </p:clrMapOvr>
+</p:sld>
+</file>
+
+<file path=ppt/slides/slide21.xml><?xml version="1.0" encoding="utf-8"?>
+<p:sld xmlns:a="http://schemas.openxmlformats.org/drawingml/2006/main" xmlns:p="http://schemas.openxmlformats.org/presentationml/2006/main" xmlns:r="http://schemas.openxmlformats.org/officeDocument/2006/relationships">
+  <p:cSld>
+    <p:spTree>
+      <p:nvGrpSpPr>
+        <p:cNvPr id="1" name=""/>
+        <p:cNvGrpSpPr/>
+        <p:nvPr/>
+      </p:nvGrpSpPr>
+      <p:grpSpPr/>
+      <p:sp>
+        <p:nvSpPr>
+          <p:cNvPr id="2" name="Rectangle 1"/>
+          <p:cNvSpPr/>
+          <p:nvPr/>
+        </p:nvSpPr>
+        <p:spPr>
+          <a:xfrm>
+            <a:off x="0" y="0"/>
+            <a:ext cx="12191695" cy="6858000"/>
+          </a:xfrm>
+          <a:prstGeom prst="rect">
+            <a:avLst/>
+          </a:prstGeom>
+          <a:solidFill>
             <a:srgbClr val="1E2761"/>
           </a:solidFill>
           <a:ln>
@@ -9624,7 +10653,7 @@
             <a:r>
               <a:rPr sz="1400" b="1" i="0">
                 <a:solidFill>
-                  <a:srgbClr val="CADCFC"/>
+                  <a:srgbClr val="F4A24C"/>
                 </a:solidFill>
                 <a:latin typeface="Montserrat"/>
               </a:rPr>
@@ -9635,13 +10664,57 @@
       </p:sp>
       <p:sp>
         <p:nvSpPr>
-          <p:cNvPr id="4" name="TextBox 3"/>
+          <p:cNvPr id="4" name="Rounded Rectangle 3"/>
+          <p:cNvSpPr/>
+          <p:nvPr/>
+        </p:nvSpPr>
+        <p:spPr>
+          <a:xfrm>
+            <a:off x="868680" y="1051560"/>
+            <a:ext cx="1463040" cy="82296"/>
+          </a:xfrm>
+          <a:prstGeom prst="roundRect">
+            <a:avLst/>
+          </a:prstGeom>
+          <a:solidFill>
+            <a:srgbClr val="E8801A"/>
+          </a:solidFill>
+          <a:ln>
+            <a:noFill/>
+          </a:ln>
+          <a:effectLst/>
+        </p:spPr>
+        <p:style>
+          <a:lnRef idx="1">
+            <a:schemeClr val="accent1"/>
+          </a:lnRef>
+          <a:fillRef idx="3">
+            <a:schemeClr val="accent1"/>
+          </a:fillRef>
+          <a:effectRef idx="2">
+            <a:schemeClr val="accent1"/>
+          </a:effectRef>
+          <a:fontRef idx="minor">
+            <a:schemeClr val="lt1"/>
+          </a:fontRef>
+        </p:style>
+        <p:txBody>
+          <a:bodyPr rtlCol="0" anchor="ctr"/>
+          <a:lstStyle/>
+          <a:p>
+            <a:pPr algn="ctr"/>
+          </a:p>
+        </p:txBody>
+      </p:sp>
+      <p:sp>
+        <p:nvSpPr>
+          <p:cNvPr id="5" name="TextBox 4"/>
           <p:cNvSpPr txBox="1"/>
           <p:nvPr/>
         </p:nvSpPr>
         <p:spPr>
           <a:xfrm>
-            <a:off x="822960" y="1143000"/>
+            <a:off x="822960" y="1234440"/>
             <a:ext cx="10515600" cy="1097280"/>
           </a:xfrm>
           <a:prstGeom prst="rect">
@@ -9669,14 +10742,14 @@
       </p:sp>
       <p:sp>
         <p:nvSpPr>
-          <p:cNvPr id="5" name="TextBox 4"/>
+          <p:cNvPr id="6" name="TextBox 5"/>
           <p:cNvSpPr txBox="1"/>
           <p:nvPr/>
         </p:nvSpPr>
         <p:spPr>
           <a:xfrm>
-            <a:off x="822960" y="2514600"/>
-            <a:ext cx="10515600" cy="2834640"/>
+            <a:off x="822960" y="2606040"/>
+            <a:ext cx="10515600" cy="2743200"/>
           </a:xfrm>
           <a:prstGeom prst="rect">
             <a:avLst/>
@@ -9697,7 +10770,7 @@
             <a:r>
               <a:rPr sz="2000" b="1" i="0">
                 <a:solidFill>
-                  <a:srgbClr val="CADCFC"/>
+                  <a:srgbClr val="F4A24C"/>
                 </a:solidFill>
                 <a:latin typeface="Montserrat"/>
               </a:rPr>
@@ -9722,7 +10795,7 @@
             <a:r>
               <a:rPr sz="2000" b="1" i="0">
                 <a:solidFill>
-                  <a:srgbClr val="CADCFC"/>
+                  <a:srgbClr val="F4A24C"/>
                 </a:solidFill>
                 <a:latin typeface="Montserrat"/>
               </a:rPr>
@@ -9747,7 +10820,7 @@
             <a:r>
               <a:rPr sz="2000" b="1" i="0">
                 <a:solidFill>
-                  <a:srgbClr val="CADCFC"/>
+                  <a:srgbClr val="F4A24C"/>
                 </a:solidFill>
                 <a:latin typeface="Montserrat"/>
               </a:rPr>
@@ -9772,7 +10845,7 @@
             <a:r>
               <a:rPr sz="2000" b="1" i="0">
                 <a:solidFill>
-                  <a:srgbClr val="CADCFC"/>
+                  <a:srgbClr val="F4A24C"/>
                 </a:solidFill>
                 <a:latin typeface="Montserrat"/>
               </a:rPr>
@@ -9792,20 +10865,20 @@
       </p:sp>
       <p:sp>
         <p:nvSpPr>
-          <p:cNvPr id="6" name="Rounded Rectangle 5"/>
+          <p:cNvPr id="7" name="Rounded Rectangle 6"/>
           <p:cNvSpPr/>
           <p:nvPr/>
         </p:nvSpPr>
         <p:spPr>
           <a:xfrm>
             <a:off x="822960" y="5532120"/>
-            <a:ext cx="10515600" cy="777240"/>
+            <a:ext cx="10515600" cy="822960"/>
           </a:xfrm>
           <a:prstGeom prst="roundRect">
             <a:avLst/>
           </a:prstGeom>
           <a:solidFill>
-            <a:srgbClr val="2E3A80"/>
+            <a:srgbClr val="E8801A"/>
           </a:solidFill>
           <a:ln>
             <a:noFill/>
@@ -9836,13 +10909,13 @@
       </p:sp>
       <p:sp>
         <p:nvSpPr>
-          <p:cNvPr id="7" name="TextBox 6"/>
+          <p:cNvPr id="8" name="TextBox 7"/>
           <p:cNvSpPr txBox="1"/>
           <p:nvPr/>
         </p:nvSpPr>
         <p:spPr>
           <a:xfrm>
-            <a:off x="1051560" y="5605272"/>
+            <a:off x="1051560" y="5623560"/>
             <a:ext cx="10058400" cy="640080"/>
           </a:xfrm>
           <a:prstGeom prst="rect">
@@ -9859,7 +10932,7 @@
             <a:r>
               <a:rPr sz="1500" b="1" i="1">
                 <a:solidFill>
-                  <a:srgbClr val="CADCFC"/>
+                  <a:srgbClr val="1E2761"/>
                 </a:solidFill>
                 <a:latin typeface="Montserrat"/>
               </a:rPr>
@@ -9960,7 +11033,7 @@
                 </a:solidFill>
                 <a:latin typeface="Montserrat"/>
               </a:rPr>
-              <a:t>003 / 020</a:t>
+              <a:t>003 / 021</a:t>
             </a:r>
           </a:p>
         </p:txBody>
@@ -10007,7 +11080,7 @@
         </p:nvSpPr>
         <p:spPr>
           <a:xfrm>
-            <a:off x="822960" y="457200"/>
+            <a:off x="822960" y="502920"/>
             <a:ext cx="8229600" cy="365760"/>
           </a:xfrm>
           <a:prstGeom prst="rect">
@@ -10022,13 +11095,13 @@
           <a:lstStyle/>
           <a:p>
             <a:r>
-              <a:rPr sz="1200" b="1" i="0">
-                <a:solidFill>
-                  <a:srgbClr val="64748B"/>
-                </a:solidFill>
-                <a:latin typeface="Montserrat"/>
-              </a:rPr>
-              <a:t>LOCALES · GENERALIDADES</a:t>
+              <a:rPr sz="1300" b="1" i="0">
+                <a:solidFill>
+                  <a:srgbClr val="E8801A"/>
+                </a:solidFill>
+                <a:latin typeface="Montserrat"/>
+              </a:rPr>
+              <a:t>PARTES DE ESTE VÍDEO</a:t>
             </a:r>
           </a:p>
         </p:txBody>
@@ -10041,7 +11114,7 @@
         </p:nvSpPr>
         <p:spPr>
           <a:xfrm>
-            <a:off x="822960" y="868680"/>
+            <a:off x="822960" y="914400"/>
             <a:ext cx="10515600" cy="914400"/>
           </a:xfrm>
           <a:prstGeom prst="rect">
@@ -10062,130 +11135,30 @@
                 </a:solidFill>
                 <a:latin typeface="Montserrat"/>
               </a:rPr>
-              <a:t>Dos locales que cuentan como uno</a:t>
-            </a:r>
-          </a:p>
-        </p:txBody>
-      </p:sp>
-      <p:sp>
-        <p:nvSpPr>
-          <p:cNvPr id="7" name="TextBox 6"/>
-          <p:cNvSpPr txBox="1"/>
-          <p:nvPr/>
-        </p:nvSpPr>
-        <p:spPr>
-          <a:xfrm>
-            <a:off x="822960" y="1920240"/>
-            <a:ext cx="4983480" cy="4206240"/>
-          </a:xfrm>
-          <a:prstGeom prst="rect">
-            <a:avLst/>
-          </a:prstGeom>
-          <a:noFill/>
-        </p:spPr>
-        <p:txBody>
-          <a:bodyPr wrap="square">
-            <a:spAutoFit/>
-          </a:bodyPr>
-          <a:lstStyle/>
-          <a:p>
-            <a:pPr>
-              <a:spcAft>
-                <a:spcPts val="1000"/>
-              </a:spcAft>
-            </a:pPr>
-            <a:r>
-              <a:rPr sz="1600" b="1" i="0">
-                <a:solidFill>
-                  <a:srgbClr val="2E3A80"/>
-                </a:solidFill>
-                <a:latin typeface="Montserrat"/>
-              </a:rPr>
-              <a:t>•  </a:t>
-            </a:r>
-            <a:r>
-              <a:rPr sz="1600" b="0" i="0">
-                <a:solidFill>
-                  <a:srgbClr val="1B2330"/>
-                </a:solidFill>
-                <a:latin typeface="Montserrat"/>
-              </a:rPr>
-              <a:t>Aberturas permanentes ≥ 1,5 m²</a:t>
-            </a:r>
-          </a:p>
-          <a:p>
-            <a:pPr>
-              <a:spcAft>
-                <a:spcPts val="1000"/>
-              </a:spcAft>
-            </a:pPr>
-            <a:r>
-              <a:rPr sz="1600" b="1" i="0">
-                <a:solidFill>
-                  <a:srgbClr val="2E3A80"/>
-                </a:solidFill>
-                <a:latin typeface="Montserrat"/>
-              </a:rPr>
-              <a:t>•  </a:t>
-            </a:r>
-            <a:r>
-              <a:rPr sz="1600" b="0" i="0">
-                <a:solidFill>
-                  <a:srgbClr val="1B2330"/>
-                </a:solidFill>
-                <a:latin typeface="Montserrat"/>
-              </a:rPr>
-              <a:t>En la misma planta</a:t>
-            </a:r>
-          </a:p>
-          <a:p>
-            <a:pPr>
-              <a:spcAft>
-                <a:spcPts val="1000"/>
-              </a:spcAft>
-            </a:pPr>
-            <a:r>
-              <a:rPr sz="1600" b="1" i="0">
-                <a:solidFill>
-                  <a:srgbClr val="2E3A80"/>
-                </a:solidFill>
-                <a:latin typeface="Montserrat"/>
-              </a:rPr>
-              <a:t>•  </a:t>
-            </a:r>
-            <a:r>
-              <a:rPr sz="1600" b="0" i="0">
-                <a:solidFill>
-                  <a:srgbClr val="1B2330"/>
-                </a:solidFill>
-                <a:latin typeface="Montserrat"/>
-              </a:rPr>
-              <a:t>El salón-cocina abierto es un local</a:t>
-            </a:r>
-          </a:p>
-        </p:txBody>
-      </p:sp>
-      <p:sp>
-        <p:nvSpPr>
-          <p:cNvPr id="8" name="imgph" descr="IMGQ:open plan kitchen living room"/>
+              <a:t>En este vídeo</a:t>
+            </a:r>
+          </a:p>
+        </p:txBody>
+      </p:sp>
+      <p:sp>
+        <p:nvSpPr>
+          <p:cNvPr id="7" name="Rounded Rectangle 6"/>
           <p:cNvSpPr/>
           <p:nvPr/>
         </p:nvSpPr>
         <p:spPr>
           <a:xfrm>
-            <a:off x="5806440" y="1051560"/>
-            <a:ext cx="5298947" cy="4629150"/>
+            <a:off x="868680" y="1673352"/>
+            <a:ext cx="2011680" cy="73152"/>
           </a:xfrm>
           <a:prstGeom prst="roundRect">
             <a:avLst/>
           </a:prstGeom>
           <a:solidFill>
-            <a:srgbClr val="F3F6FB"/>
+            <a:srgbClr val="E8801A"/>
           </a:solidFill>
-          <a:ln w="12700">
-            <a:solidFill>
-              <a:srgbClr val="C7D2E6"/>
-            </a:solidFill>
+          <a:ln>
+            <a:noFill/>
           </a:ln>
           <a:effectLst/>
         </p:spPr>
@@ -10213,14 +11186,14 @@
       </p:sp>
       <p:sp>
         <p:nvSpPr>
-          <p:cNvPr id="9" name="TextBox 8"/>
+          <p:cNvPr id="8" name="TextBox 7"/>
           <p:cNvSpPr txBox="1"/>
           <p:nvPr/>
         </p:nvSpPr>
         <p:spPr>
           <a:xfrm>
-            <a:off x="6080760" y="2726055"/>
-            <a:ext cx="4750307" cy="1280160"/>
+            <a:off x="822960" y="2103120"/>
+            <a:ext cx="10515600" cy="4023360"/>
           </a:xfrm>
           <a:prstGeom prst="rect">
             <a:avLst/>
@@ -10233,27 +11206,228 @@
           </a:bodyPr>
           <a:lstStyle/>
           <a:p>
-            <a:pPr algn="ctr"/>
-            <a:r>
-              <a:rPr sz="1400" b="1" i="0">
-                <a:solidFill>
-                  <a:srgbClr val="64748B"/>
-                </a:solidFill>
-                <a:latin typeface="Montserrat"/>
-              </a:rPr>
-              <a:t>IMAGEN REALISTA</a:t>
-            </a:r>
-          </a:p>
-          <a:p>
-            <a:pPr algn="ctr"/>
-            <a:r>
-              <a:rPr sz="1100" b="0" i="1">
-                <a:solidFill>
-                  <a:srgbClr val="64748B"/>
-                </a:solidFill>
-                <a:latin typeface="Montserrat"/>
-              </a:rPr>
-              <a:t>open plan kitchen living room</a:t>
+            <a:pPr>
+              <a:spcAft>
+                <a:spcPts val="900"/>
+              </a:spcAft>
+            </a:pPr>
+            <a:r>
+              <a:rPr sz="1800" b="1" i="0">
+                <a:solidFill>
+                  <a:srgbClr val="E8801A"/>
+                </a:solidFill>
+                <a:latin typeface="Montserrat"/>
+              </a:rPr>
+              <a:t>01   </a:t>
+            </a:r>
+            <a:r>
+              <a:rPr sz="1700" b="0" i="0">
+                <a:solidFill>
+                  <a:srgbClr val="1B2330"/>
+                </a:solidFill>
+                <a:latin typeface="Montserrat"/>
+              </a:rPr>
+              <a:t>Locales</a:t>
+            </a:r>
+          </a:p>
+          <a:p>
+            <a:pPr>
+              <a:spcAft>
+                <a:spcPts val="900"/>
+              </a:spcAft>
+            </a:pPr>
+            <a:r>
+              <a:rPr sz="1800" b="1" i="0">
+                <a:solidFill>
+                  <a:srgbClr val="E8801A"/>
+                </a:solidFill>
+                <a:latin typeface="Montserrat"/>
+              </a:rPr>
+              <a:t>02   </a:t>
+            </a:r>
+            <a:r>
+              <a:rPr sz="1700" b="0" i="0">
+                <a:solidFill>
+                  <a:srgbClr val="1B2330"/>
+                </a:solidFill>
+                <a:latin typeface="Montserrat"/>
+              </a:rPr>
+              <a:t>Volumen mínimo</a:t>
+            </a:r>
+          </a:p>
+          <a:p>
+            <a:pPr>
+              <a:spcAft>
+                <a:spcPts val="900"/>
+              </a:spcAft>
+            </a:pPr>
+            <a:r>
+              <a:rPr sz="1800" b="1" i="0">
+                <a:solidFill>
+                  <a:srgbClr val="E8801A"/>
+                </a:solidFill>
+                <a:latin typeface="Montserrat"/>
+              </a:rPr>
+              <a:t>03   </a:t>
+            </a:r>
+            <a:r>
+              <a:rPr sz="1700" b="0" i="0">
+                <a:solidFill>
+                  <a:srgbClr val="1B2330"/>
+                </a:solidFill>
+                <a:latin typeface="Montserrat"/>
+              </a:rPr>
+              <a:t>Volumen</a:t>
+            </a:r>
+          </a:p>
+          <a:p>
+            <a:pPr>
+              <a:spcAft>
+                <a:spcPts val="900"/>
+              </a:spcAft>
+            </a:pPr>
+            <a:r>
+              <a:rPr sz="1800" b="1" i="0">
+                <a:solidFill>
+                  <a:srgbClr val="E8801A"/>
+                </a:solidFill>
+                <a:latin typeface="Montserrat"/>
+              </a:rPr>
+              <a:t>04   </a:t>
+            </a:r>
+            <a:r>
+              <a:rPr sz="1700" b="0" i="0">
+                <a:solidFill>
+                  <a:srgbClr val="1B2330"/>
+                </a:solidFill>
+                <a:latin typeface="Montserrat"/>
+              </a:rPr>
+              <a:t>Ventilación rápida</a:t>
+            </a:r>
+          </a:p>
+          <a:p>
+            <a:pPr>
+              <a:spcAft>
+                <a:spcPts val="900"/>
+              </a:spcAft>
+            </a:pPr>
+            <a:r>
+              <a:rPr sz="1800" b="1" i="0">
+                <a:solidFill>
+                  <a:srgbClr val="E8801A"/>
+                </a:solidFill>
+                <a:latin typeface="Montserrat"/>
+              </a:rPr>
+              <a:t>05   </a:t>
+            </a:r>
+            <a:r>
+              <a:rPr sz="1700" b="0" i="0">
+                <a:solidFill>
+                  <a:srgbClr val="1B2330"/>
+                </a:solidFill>
+                <a:latin typeface="Montserrat"/>
+              </a:rPr>
+              <a:t>Patios de ventilación</a:t>
+            </a:r>
+          </a:p>
+          <a:p>
+            <a:pPr>
+              <a:spcAft>
+                <a:spcPts val="900"/>
+              </a:spcAft>
+            </a:pPr>
+            <a:r>
+              <a:rPr sz="1800" b="1" i="0">
+                <a:solidFill>
+                  <a:srgbClr val="E8801A"/>
+                </a:solidFill>
+                <a:latin typeface="Montserrat"/>
+              </a:rPr>
+              <a:t>06   </a:t>
+            </a:r>
+            <a:r>
+              <a:rPr sz="1700" b="0" i="0">
+                <a:solidFill>
+                  <a:srgbClr val="1B2330"/>
+                </a:solidFill>
+                <a:latin typeface="Montserrat"/>
+              </a:rPr>
+              <a:t>Sistemas de ventilación</a:t>
+            </a:r>
+          </a:p>
+          <a:p>
+            <a:pPr>
+              <a:spcAft>
+                <a:spcPts val="900"/>
+              </a:spcAft>
+            </a:pPr>
+            <a:r>
+              <a:rPr sz="1800" b="1" i="0">
+                <a:solidFill>
+                  <a:srgbClr val="E8801A"/>
+                </a:solidFill>
+                <a:latin typeface="Montserrat"/>
+              </a:rPr>
+              <a:t>07   </a:t>
+            </a:r>
+            <a:r>
+              <a:rPr sz="1700" b="0" i="0">
+                <a:solidFill>
+                  <a:srgbClr val="1B2330"/>
+                </a:solidFill>
+                <a:latin typeface="Montserrat"/>
+              </a:rPr>
+              <a:t>Dimensionado</a:t>
+            </a:r>
+          </a:p>
+          <a:p>
+            <a:pPr>
+              <a:spcAft>
+                <a:spcPts val="900"/>
+              </a:spcAft>
+            </a:pPr>
+            <a:r>
+              <a:rPr sz="1800" b="1" i="0">
+                <a:solidFill>
+                  <a:srgbClr val="E8801A"/>
+                </a:solidFill>
+                <a:latin typeface="Montserrat"/>
+              </a:rPr>
+              <a:t>08   </a:t>
+            </a:r>
+            <a:r>
+              <a:rPr sz="1700" b="0" i="0">
+                <a:solidFill>
+                  <a:srgbClr val="1B2330"/>
+                </a:solidFill>
+                <a:latin typeface="Montserrat"/>
+              </a:rPr>
+              <a:t>Tabla 2</a:t>
+            </a:r>
+          </a:p>
+          <a:p>
+            <a:pPr>
+              <a:spcAft>
+                <a:spcPts val="900"/>
+              </a:spcAft>
+            </a:pPr>
+            <a:r>
+              <a:rPr sz="1800" b="1" i="0">
+                <a:solidFill>
+                  <a:srgbClr val="E8801A"/>
+                </a:solidFill>
+                <a:latin typeface="Montserrat"/>
+              </a:rPr>
+              <a:t>09   </a:t>
+            </a:r>
+            <a:r>
+              <a:rPr sz="1700" b="0" i="0">
+                <a:solidFill>
+                  <a:srgbClr val="1B2330"/>
+                </a:solidFill>
+                <a:latin typeface="Montserrat"/>
+              </a:rPr>
+              <a:t>Aparatos concretos</a:t>
             </a:r>
           </a:p>
         </p:txBody>
@@ -10350,7 +11524,7 @@
                 </a:solidFill>
                 <a:latin typeface="Montserrat"/>
               </a:rPr>
-              <a:t>004 / 020</a:t>
+              <a:t>004 / 021</a:t>
             </a:r>
           </a:p>
         </p:txBody>
@@ -10398,7 +11572,7 @@
         <p:spPr>
           <a:xfrm>
             <a:off x="822960" y="457200"/>
-            <a:ext cx="8229600" cy="365760"/>
+            <a:ext cx="10058400" cy="365760"/>
           </a:xfrm>
           <a:prstGeom prst="rect">
             <a:avLst/>
@@ -10412,9 +11586,9 @@
           <a:lstStyle/>
           <a:p>
             <a:r>
-              <a:rPr sz="1200" b="1" i="0">
-                <a:solidFill>
-                  <a:srgbClr val="64748B"/>
+              <a:rPr sz="1300" b="1" i="0">
+                <a:solidFill>
+                  <a:srgbClr val="E8801A"/>
                 </a:solidFill>
                 <a:latin typeface="Montserrat"/>
               </a:rPr>
@@ -10446,26 +11620,70 @@
           <a:lstStyle/>
           <a:p>
             <a:r>
-              <a:rPr sz="2700" b="1" i="0">
+              <a:rPr sz="2800" b="1" i="0">
                 <a:solidFill>
                   <a:srgbClr val="1E2761"/>
                 </a:solidFill>
                 <a:latin typeface="Montserrat"/>
               </a:rPr>
-              <a:t>Qué es una zona exterior</a:t>
-            </a:r>
-          </a:p>
-        </p:txBody>
-      </p:sp>
-      <p:sp>
-        <p:nvSpPr>
-          <p:cNvPr id="7" name="TextBox 6"/>
+              <a:t>Dos locales que cuentan como uno</a:t>
+            </a:r>
+          </a:p>
+        </p:txBody>
+      </p:sp>
+      <p:sp>
+        <p:nvSpPr>
+          <p:cNvPr id="7" name="Rounded Rectangle 6"/>
+          <p:cNvSpPr/>
+          <p:nvPr/>
+        </p:nvSpPr>
+        <p:spPr>
+          <a:xfrm>
+            <a:off x="868680" y="1627632"/>
+            <a:ext cx="2011680" cy="73152"/>
+          </a:xfrm>
+          <a:prstGeom prst="roundRect">
+            <a:avLst/>
+          </a:prstGeom>
+          <a:solidFill>
+            <a:srgbClr val="E8801A"/>
+          </a:solidFill>
+          <a:ln>
+            <a:noFill/>
+          </a:ln>
+          <a:effectLst/>
+        </p:spPr>
+        <p:style>
+          <a:lnRef idx="1">
+            <a:schemeClr val="accent1"/>
+          </a:lnRef>
+          <a:fillRef idx="3">
+            <a:schemeClr val="accent1"/>
+          </a:fillRef>
+          <a:effectRef idx="2">
+            <a:schemeClr val="accent1"/>
+          </a:effectRef>
+          <a:fontRef idx="minor">
+            <a:schemeClr val="lt1"/>
+          </a:fontRef>
+        </p:style>
+        <p:txBody>
+          <a:bodyPr rtlCol="0" anchor="ctr"/>
+          <a:lstStyle/>
+          <a:p>
+            <a:pPr algn="ctr"/>
+          </a:p>
+        </p:txBody>
+      </p:sp>
+      <p:sp>
+        <p:nvSpPr>
+          <p:cNvPr id="8" name="TextBox 7"/>
           <p:cNvSpPr txBox="1"/>
           <p:nvPr/>
         </p:nvSpPr>
         <p:spPr>
           <a:xfrm>
-            <a:off x="822960" y="1920240"/>
+            <a:off x="822960" y="1965960"/>
             <a:ext cx="4983480" cy="4206240"/>
           </a:xfrm>
           <a:prstGeom prst="rect">
@@ -10481,17 +11699,17 @@
           <a:p>
             <a:pPr>
               <a:spcAft>
-                <a:spcPts val="1000"/>
+                <a:spcPts val="1100"/>
               </a:spcAft>
             </a:pPr>
             <a:r>
               <a:rPr sz="1600" b="1" i="0">
                 <a:solidFill>
-                  <a:srgbClr val="2E3A80"/>
-                </a:solidFill>
-                <a:latin typeface="Montserrat"/>
-              </a:rPr>
-              <a:t>•  </a:t>
+                  <a:srgbClr val="E8801A"/>
+                </a:solidFill>
+                <a:latin typeface="Montserrat"/>
+              </a:rPr>
+              <a:t>▸  </a:t>
             </a:r>
             <a:r>
               <a:rPr sz="1600" b="0" i="0">
@@ -10500,23 +11718,23 @@
                 </a:solidFill>
                 <a:latin typeface="Montserrat"/>
               </a:rPr>
-              <a:t>Abertura permanente al exterior o patio</a:t>
+              <a:t>Aberturas permanentes ≥ 1,5 m²</a:t>
             </a:r>
           </a:p>
           <a:p>
             <a:pPr>
               <a:spcAft>
-                <a:spcPts val="1000"/>
+                <a:spcPts val="1100"/>
               </a:spcAft>
             </a:pPr>
             <a:r>
               <a:rPr sz="1600" b="1" i="0">
                 <a:solidFill>
-                  <a:srgbClr val="2E3A80"/>
-                </a:solidFill>
-                <a:latin typeface="Montserrat"/>
-              </a:rPr>
-              <a:t>•  </a:t>
+                  <a:srgbClr val="E8801A"/>
+                </a:solidFill>
+                <a:latin typeface="Montserrat"/>
+              </a:rPr>
+              <a:t>▸  </a:t>
             </a:r>
             <a:r>
               <a:rPr sz="1600" b="0" i="0">
@@ -10525,23 +11743,23 @@
                 </a:solidFill>
                 <a:latin typeface="Montserrat"/>
               </a:rPr>
-              <a:t>Superficie libre ≥ 1,5 m²</a:t>
+              <a:t>En la misma planta</a:t>
             </a:r>
           </a:p>
           <a:p>
             <a:pPr>
               <a:spcAft>
-                <a:spcPts val="1000"/>
+                <a:spcPts val="1100"/>
               </a:spcAft>
             </a:pPr>
             <a:r>
               <a:rPr sz="1600" b="1" i="0">
                 <a:solidFill>
-                  <a:srgbClr val="2E3A80"/>
-                </a:solidFill>
-                <a:latin typeface="Montserrat"/>
-              </a:rPr>
-              <a:t>•  </a:t>
+                  <a:srgbClr val="E8801A"/>
+                </a:solidFill>
+                <a:latin typeface="Montserrat"/>
+              </a:rPr>
+              <a:t>▸  </a:t>
             </a:r>
             <a:r>
               <a:rPr sz="1600" b="0" i="0">
@@ -10550,14 +11768,14 @@
                 </a:solidFill>
                 <a:latin typeface="Montserrat"/>
               </a:rPr>
-              <a:t>Borde superior ≤ 0,50 m del techo</a:t>
-            </a:r>
-          </a:p>
-        </p:txBody>
-      </p:sp>
-      <p:sp>
-        <p:nvSpPr>
-          <p:cNvPr id="8" name="imgph" descr="IMGQ:apartment balcony open air"/>
+              <a:t>El salón-cocina abierto es un local</a:t>
+            </a:r>
+          </a:p>
+        </p:txBody>
+      </p:sp>
+      <p:sp>
+        <p:nvSpPr>
+          <p:cNvPr id="9" name="imgph" descr="IMGQ:open plan kitchen living room"/>
           <p:cNvSpPr/>
           <p:nvPr/>
         </p:nvSpPr>
@@ -10603,7 +11821,7 @@
       </p:sp>
       <p:sp>
         <p:nvSpPr>
-          <p:cNvPr id="9" name="TextBox 8"/>
+          <p:cNvPr id="10" name="TextBox 9"/>
           <p:cNvSpPr txBox="1"/>
           <p:nvPr/>
         </p:nvSpPr>
@@ -10643,7 +11861,7 @@
                 </a:solidFill>
                 <a:latin typeface="Montserrat"/>
               </a:rPr>
-              <a:t>apartment balcony open air</a:t>
+              <a:t>open plan kitchen living room</a:t>
             </a:r>
           </a:p>
         </p:txBody>
@@ -10740,7 +11958,7 @@
                 </a:solidFill>
                 <a:latin typeface="Montserrat"/>
               </a:rPr>
-              <a:t>005 / 020</a:t>
+              <a:t>005 / 021</a:t>
             </a:r>
           </a:p>
         </p:txBody>
@@ -10788,7 +12006,7 @@
         <p:spPr>
           <a:xfrm>
             <a:off x="822960" y="457200"/>
-            <a:ext cx="8229600" cy="365760"/>
+            <a:ext cx="10058400" cy="365760"/>
           </a:xfrm>
           <a:prstGeom prst="rect">
             <a:avLst/>
@@ -10802,13 +12020,13 @@
           <a:lstStyle/>
           <a:p>
             <a:r>
-              <a:rPr sz="1200" b="1" i="0">
-                <a:solidFill>
-                  <a:srgbClr val="64748B"/>
-                </a:solidFill>
-                <a:latin typeface="Montserrat"/>
-              </a:rPr>
-              <a:t>VOLUMEN MÍNIMO</a:t>
+              <a:rPr sz="1300" b="1" i="0">
+                <a:solidFill>
+                  <a:srgbClr val="E8801A"/>
+                </a:solidFill>
+                <a:latin typeface="Montserrat"/>
+              </a:rPr>
+              <a:t>LOCALES · GENERALIDADES</a:t>
             </a:r>
           </a:p>
         </p:txBody>
@@ -10836,26 +12054,70 @@
           <a:lstStyle/>
           <a:p>
             <a:r>
-              <a:rPr sz="2700" b="1" i="0">
+              <a:rPr sz="2800" b="1" i="0">
                 <a:solidFill>
                   <a:srgbClr val="1E2761"/>
                 </a:solidFill>
                 <a:latin typeface="Montserrat"/>
               </a:rPr>
-              <a:t>Quién necesita volumen mínimo</a:t>
-            </a:r>
-          </a:p>
-        </p:txBody>
-      </p:sp>
-      <p:sp>
-        <p:nvSpPr>
-          <p:cNvPr id="7" name="TextBox 6"/>
+              <a:t>Qué es una zona exterior</a:t>
+            </a:r>
+          </a:p>
+        </p:txBody>
+      </p:sp>
+      <p:sp>
+        <p:nvSpPr>
+          <p:cNvPr id="7" name="Rounded Rectangle 6"/>
+          <p:cNvSpPr/>
+          <p:nvPr/>
+        </p:nvSpPr>
+        <p:spPr>
+          <a:xfrm>
+            <a:off x="868680" y="1627632"/>
+            <a:ext cx="2011680" cy="73152"/>
+          </a:xfrm>
+          <a:prstGeom prst="roundRect">
+            <a:avLst/>
+          </a:prstGeom>
+          <a:solidFill>
+            <a:srgbClr val="E8801A"/>
+          </a:solidFill>
+          <a:ln>
+            <a:noFill/>
+          </a:ln>
+          <a:effectLst/>
+        </p:spPr>
+        <p:style>
+          <a:lnRef idx="1">
+            <a:schemeClr val="accent1"/>
+          </a:lnRef>
+          <a:fillRef idx="3">
+            <a:schemeClr val="accent1"/>
+          </a:fillRef>
+          <a:effectRef idx="2">
+            <a:schemeClr val="accent1"/>
+          </a:effectRef>
+          <a:fontRef idx="minor">
+            <a:schemeClr val="lt1"/>
+          </a:fontRef>
+        </p:style>
+        <p:txBody>
+          <a:bodyPr rtlCol="0" anchor="ctr"/>
+          <a:lstStyle/>
+          <a:p>
+            <a:pPr algn="ctr"/>
+          </a:p>
+        </p:txBody>
+      </p:sp>
+      <p:sp>
+        <p:nvSpPr>
+          <p:cNvPr id="8" name="TextBox 7"/>
           <p:cNvSpPr txBox="1"/>
           <p:nvPr/>
         </p:nvSpPr>
         <p:spPr>
           <a:xfrm>
-            <a:off x="822960" y="1920240"/>
+            <a:off x="822960" y="1965960"/>
             <a:ext cx="4983480" cy="4206240"/>
           </a:xfrm>
           <a:prstGeom prst="rect">
@@ -10871,17 +12133,17 @@
           <a:p>
             <a:pPr>
               <a:spcAft>
-                <a:spcPts val="1000"/>
+                <a:spcPts val="1100"/>
               </a:spcAft>
             </a:pPr>
             <a:r>
               <a:rPr sz="1600" b="1" i="0">
                 <a:solidFill>
-                  <a:srgbClr val="2E3A80"/>
-                </a:solidFill>
-                <a:latin typeface="Montserrat"/>
-              </a:rPr>
-              <a:t>•  </a:t>
+                  <a:srgbClr val="E8801A"/>
+                </a:solidFill>
+                <a:latin typeface="Montserrat"/>
+              </a:rPr>
+              <a:t>▸  </a:t>
             </a:r>
             <a:r>
               <a:rPr sz="1600" b="0" i="0">
@@ -10890,23 +12152,23 @@
                 </a:solidFill>
                 <a:latin typeface="Montserrat"/>
               </a:rPr>
-              <a:t>Solo el tipo A lo exige</a:t>
+              <a:t>Abertura permanente al exterior o patio</a:t>
             </a:r>
           </a:p>
           <a:p>
             <a:pPr>
               <a:spcAft>
-                <a:spcPts val="1000"/>
+                <a:spcPts val="1100"/>
               </a:spcAft>
             </a:pPr>
             <a:r>
               <a:rPr sz="1600" b="1" i="0">
                 <a:solidFill>
-                  <a:srgbClr val="2E3A80"/>
-                </a:solidFill>
-                <a:latin typeface="Montserrat"/>
-              </a:rPr>
-              <a:t>•  </a:t>
+                  <a:srgbClr val="E8801A"/>
+                </a:solidFill>
+                <a:latin typeface="Montserrat"/>
+              </a:rPr>
+              <a:t>▸  </a:t>
             </a:r>
             <a:r>
               <a:rPr sz="1600" b="0" i="0">
@@ -10915,23 +12177,23 @@
                 </a:solidFill>
                 <a:latin typeface="Montserrat"/>
               </a:rPr>
-              <a:t>Tipo B y C: no precisan volumen</a:t>
+              <a:t>Superficie libre ≥ 1,5 m²</a:t>
             </a:r>
           </a:p>
           <a:p>
             <a:pPr>
               <a:spcAft>
-                <a:spcPts val="1000"/>
+                <a:spcPts val="1100"/>
               </a:spcAft>
             </a:pPr>
             <a:r>
               <a:rPr sz="1600" b="1" i="0">
                 <a:solidFill>
-                  <a:srgbClr val="2E3A80"/>
-                </a:solidFill>
-                <a:latin typeface="Montserrat"/>
-              </a:rPr>
-              <a:t>•  </a:t>
+                  <a:srgbClr val="E8801A"/>
+                </a:solidFill>
+                <a:latin typeface="Montserrat"/>
+              </a:rPr>
+              <a:t>▸  </a:t>
             </a:r>
             <a:r>
               <a:rPr sz="1600" b="0" i="0">
@@ -10940,14 +12202,14 @@
                 </a:solidFill>
                 <a:latin typeface="Montserrat"/>
               </a:rPr>
-              <a:t>Armario-cocina: lo cumple el contiguo</a:t>
-            </a:r>
-          </a:p>
-        </p:txBody>
-      </p:sp>
-      <p:sp>
-        <p:nvSpPr>
-          <p:cNvPr id="8" name="imgph" descr="IMGQ:small kitchen with gas cooker"/>
+              <a:t>Borde superior ≤ 0,50 m del techo</a:t>
+            </a:r>
+          </a:p>
+        </p:txBody>
+      </p:sp>
+      <p:sp>
+        <p:nvSpPr>
+          <p:cNvPr id="9" name="imgph" descr="IMGQ:apartment balcony open air"/>
           <p:cNvSpPr/>
           <p:nvPr/>
         </p:nvSpPr>
@@ -10993,7 +12255,7 @@
       </p:sp>
       <p:sp>
         <p:nvSpPr>
-          <p:cNvPr id="9" name="TextBox 8"/>
+          <p:cNvPr id="10" name="TextBox 9"/>
           <p:cNvSpPr txBox="1"/>
           <p:nvPr/>
         </p:nvSpPr>
@@ -11033,7 +12295,7 @@
                 </a:solidFill>
                 <a:latin typeface="Montserrat"/>
               </a:rPr>
-              <a:t>small kitchen with gas cooker</a:t>
+              <a:t>apartment balcony open air</a:t>
             </a:r>
           </a:p>
         </p:txBody>
@@ -11130,7 +12392,7 @@
                 </a:solidFill>
                 <a:latin typeface="Montserrat"/>
               </a:rPr>
-              <a:t>006 / 020</a:t>
+              <a:t>006 / 021</a:t>
             </a:r>
           </a:p>
         </p:txBody>
@@ -11178,7 +12440,7 @@
         <p:spPr>
           <a:xfrm>
             <a:off x="822960" y="457200"/>
-            <a:ext cx="8229600" cy="365760"/>
+            <a:ext cx="10058400" cy="365760"/>
           </a:xfrm>
           <a:prstGeom prst="rect">
             <a:avLst/>
@@ -11192,13 +12454,13 @@
           <a:lstStyle/>
           <a:p>
             <a:r>
-              <a:rPr sz="1200" b="1" i="0">
-                <a:solidFill>
-                  <a:srgbClr val="64748B"/>
-                </a:solidFill>
-                <a:latin typeface="Montserrat"/>
-              </a:rPr>
-              <a:t>VOLUMEN · TIPO A NO CALEFACCIÓN</a:t>
+              <a:rPr sz="1300" b="1" i="0">
+                <a:solidFill>
+                  <a:srgbClr val="E8801A"/>
+                </a:solidFill>
+                <a:latin typeface="Montserrat"/>
+              </a:rPr>
+              <a:t>VOLUMEN MÍNIMO</a:t>
             </a:r>
           </a:p>
         </p:txBody>
@@ -11226,26 +12488,70 @@
           <a:lstStyle/>
           <a:p>
             <a:r>
-              <a:rPr sz="2700" b="1" i="0">
+              <a:rPr sz="2800" b="1" i="0">
                 <a:solidFill>
                   <a:srgbClr val="1E2761"/>
                 </a:solidFill>
                 <a:latin typeface="Montserrat"/>
               </a:rPr>
-              <a:t>Volumen para cocción (tabla 1)</a:t>
-            </a:r>
-          </a:p>
-        </p:txBody>
-      </p:sp>
-      <p:sp>
-        <p:nvSpPr>
-          <p:cNvPr id="7" name="TextBox 6"/>
+              <a:t>Quién necesita volumen mínimo</a:t>
+            </a:r>
+          </a:p>
+        </p:txBody>
+      </p:sp>
+      <p:sp>
+        <p:nvSpPr>
+          <p:cNvPr id="7" name="Rounded Rectangle 6"/>
+          <p:cNvSpPr/>
+          <p:nvPr/>
+        </p:nvSpPr>
+        <p:spPr>
+          <a:xfrm>
+            <a:off x="868680" y="1627632"/>
+            <a:ext cx="2011680" cy="73152"/>
+          </a:xfrm>
+          <a:prstGeom prst="roundRect">
+            <a:avLst/>
+          </a:prstGeom>
+          <a:solidFill>
+            <a:srgbClr val="E8801A"/>
+          </a:solidFill>
+          <a:ln>
+            <a:noFill/>
+          </a:ln>
+          <a:effectLst/>
+        </p:spPr>
+        <p:style>
+          <a:lnRef idx="1">
+            <a:schemeClr val="accent1"/>
+          </a:lnRef>
+          <a:fillRef idx="3">
+            <a:schemeClr val="accent1"/>
+          </a:fillRef>
+          <a:effectRef idx="2">
+            <a:schemeClr val="accent1"/>
+          </a:effectRef>
+          <a:fontRef idx="minor">
+            <a:schemeClr val="lt1"/>
+          </a:fontRef>
+        </p:style>
+        <p:txBody>
+          <a:bodyPr rtlCol="0" anchor="ctr"/>
+          <a:lstStyle/>
+          <a:p>
+            <a:pPr algn="ctr"/>
+          </a:p>
+        </p:txBody>
+      </p:sp>
+      <p:sp>
+        <p:nvSpPr>
+          <p:cNvPr id="8" name="TextBox 7"/>
           <p:cNvSpPr txBox="1"/>
           <p:nvPr/>
         </p:nvSpPr>
         <p:spPr>
           <a:xfrm>
-            <a:off x="822960" y="1920240"/>
+            <a:off x="822960" y="1965960"/>
             <a:ext cx="4983480" cy="4206240"/>
           </a:xfrm>
           <a:prstGeom prst="rect">
@@ -11261,17 +12567,17 @@
           <a:p>
             <a:pPr>
               <a:spcAft>
-                <a:spcPts val="1000"/>
+                <a:spcPts val="1100"/>
               </a:spcAft>
             </a:pPr>
             <a:r>
               <a:rPr sz="1600" b="1" i="0">
                 <a:solidFill>
-                  <a:srgbClr val="2E3A80"/>
-                </a:solidFill>
-                <a:latin typeface="Montserrat"/>
-              </a:rPr>
-              <a:t>•  </a:t>
+                  <a:srgbClr val="E8801A"/>
+                </a:solidFill>
+                <a:latin typeface="Montserrat"/>
+              </a:rPr>
+              <a:t>▸  </a:t>
             </a:r>
             <a:r>
               <a:rPr sz="1600" b="0" i="0">
@@ -11280,23 +12586,23 @@
                 </a:solidFill>
                 <a:latin typeface="Montserrat"/>
               </a:rPr>
-              <a:t>∑Qₙ ≤ 16 kW → 8 m³</a:t>
+              <a:t>Solo el tipo A lo exige</a:t>
             </a:r>
           </a:p>
           <a:p>
             <a:pPr>
               <a:spcAft>
-                <a:spcPts val="1000"/>
+                <a:spcPts val="1100"/>
               </a:spcAft>
             </a:pPr>
             <a:r>
               <a:rPr sz="1600" b="1" i="0">
                 <a:solidFill>
-                  <a:srgbClr val="2E3A80"/>
-                </a:solidFill>
-                <a:latin typeface="Montserrat"/>
-              </a:rPr>
-              <a:t>•  </a:t>
+                  <a:srgbClr val="E8801A"/>
+                </a:solidFill>
+                <a:latin typeface="Montserrat"/>
+              </a:rPr>
+              <a:t>▸  </a:t>
             </a:r>
             <a:r>
               <a:rPr sz="1600" b="0" i="0">
@@ -11305,23 +12611,23 @@
                 </a:solidFill>
                 <a:latin typeface="Montserrat"/>
               </a:rPr>
-              <a:t>∑Qₙ &gt; 16 kW → Q̄ₙ − 8</a:t>
+              <a:t>Tipo B y C: no precisan volumen</a:t>
             </a:r>
           </a:p>
           <a:p>
             <a:pPr>
               <a:spcAft>
-                <a:spcPts val="1000"/>
+                <a:spcPts val="1100"/>
               </a:spcAft>
             </a:pPr>
             <a:r>
               <a:rPr sz="1600" b="1" i="0">
                 <a:solidFill>
-                  <a:srgbClr val="2E3A80"/>
-                </a:solidFill>
-                <a:latin typeface="Montserrat"/>
-              </a:rPr>
-              <a:t>•  </a:t>
+                  <a:srgbClr val="E8801A"/>
+                </a:solidFill>
+                <a:latin typeface="Montserrat"/>
+              </a:rPr>
+              <a:t>▸  </a:t>
             </a:r>
             <a:r>
               <a:rPr sz="1600" b="0" i="0">
@@ -11330,14 +12636,14 @@
                 </a:solidFill>
                 <a:latin typeface="Montserrat"/>
               </a:rPr>
-              <a:t>Volumen bruto: sin restar muebles</a:t>
-            </a:r>
-          </a:p>
-        </p:txBody>
-      </p:sp>
-      <p:sp>
-        <p:nvSpPr>
-          <p:cNvPr id="8" name="imgph" descr="IMGQ:gas cooktop with pots"/>
+              <a:t>Armario-cocina: lo cumple el contiguo</a:t>
+            </a:r>
+          </a:p>
+        </p:txBody>
+      </p:sp>
+      <p:sp>
+        <p:nvSpPr>
+          <p:cNvPr id="9" name="imgph" descr="IMGQ:small kitchen with gas cooker"/>
           <p:cNvSpPr/>
           <p:nvPr/>
         </p:nvSpPr>
@@ -11383,7 +12689,7 @@
       </p:sp>
       <p:sp>
         <p:nvSpPr>
-          <p:cNvPr id="9" name="TextBox 8"/>
+          <p:cNvPr id="10" name="TextBox 9"/>
           <p:cNvSpPr txBox="1"/>
           <p:nvPr/>
         </p:nvSpPr>
@@ -11423,7 +12729,7 @@
                 </a:solidFill>
                 <a:latin typeface="Montserrat"/>
               </a:rPr>
-              <a:t>gas cooktop with pots</a:t>
+              <a:t>small kitchen with gas cooker</a:t>
             </a:r>
           </a:p>
         </p:txBody>
@@ -11520,7 +12826,7 @@
                 </a:solidFill>
                 <a:latin typeface="Montserrat"/>
               </a:rPr>
-              <a:t>007 / 020</a:t>
+              <a:t>007 / 021</a:t>
             </a:r>
           </a:p>
         </p:txBody>
@@ -11568,7 +12874,7 @@
         <p:spPr>
           <a:xfrm>
             <a:off x="822960" y="457200"/>
-            <a:ext cx="8229600" cy="365760"/>
+            <a:ext cx="10058400" cy="365760"/>
           </a:xfrm>
           <a:prstGeom prst="rect">
             <a:avLst/>
@@ -11582,13 +12888,13 @@
           <a:lstStyle/>
           <a:p>
             <a:r>
-              <a:rPr sz="1200" b="1" i="0">
-                <a:solidFill>
-                  <a:srgbClr val="64748B"/>
-                </a:solidFill>
-                <a:latin typeface="Montserrat"/>
-              </a:rPr>
-              <a:t>VOLUMEN · EXTRACCIÓN</a:t>
+              <a:rPr sz="1300" b="1" i="0">
+                <a:solidFill>
+                  <a:srgbClr val="E8801A"/>
+                </a:solidFill>
+                <a:latin typeface="Montserrat"/>
+              </a:rPr>
+              <a:t>VOLUMEN · TIPO A NO CALEFACCIÓN</a:t>
             </a:r>
           </a:p>
         </p:txBody>
@@ -11616,26 +12922,70 @@
           <a:lstStyle/>
           <a:p>
             <a:r>
-              <a:rPr sz="2700" b="1" i="0">
+              <a:rPr sz="2800" b="1" i="0">
                 <a:solidFill>
                   <a:srgbClr val="1E2761"/>
                 </a:solidFill>
                 <a:latin typeface="Montserrat"/>
               </a:rPr>
-              <a:t>Por encima de 30 kW: extracción</a:t>
-            </a:r>
-          </a:p>
-        </p:txBody>
-      </p:sp>
-      <p:sp>
-        <p:nvSpPr>
-          <p:cNvPr id="7" name="TextBox 6"/>
+              <a:t>Volumen para cocción (tabla 1)</a:t>
+            </a:r>
+          </a:p>
+        </p:txBody>
+      </p:sp>
+      <p:sp>
+        <p:nvSpPr>
+          <p:cNvPr id="7" name="Rounded Rectangle 6"/>
+          <p:cNvSpPr/>
+          <p:nvPr/>
+        </p:nvSpPr>
+        <p:spPr>
+          <a:xfrm>
+            <a:off x="868680" y="1627632"/>
+            <a:ext cx="2011680" cy="73152"/>
+          </a:xfrm>
+          <a:prstGeom prst="roundRect">
+            <a:avLst/>
+          </a:prstGeom>
+          <a:solidFill>
+            <a:srgbClr val="E8801A"/>
+          </a:solidFill>
+          <a:ln>
+            <a:noFill/>
+          </a:ln>
+          <a:effectLst/>
+        </p:spPr>
+        <p:style>
+          <a:lnRef idx="1">
+            <a:schemeClr val="accent1"/>
+          </a:lnRef>
+          <a:fillRef idx="3">
+            <a:schemeClr val="accent1"/>
+          </a:fillRef>
+          <a:effectRef idx="2">
+            <a:schemeClr val="accent1"/>
+          </a:effectRef>
+          <a:fontRef idx="minor">
+            <a:schemeClr val="lt1"/>
+          </a:fontRef>
+        </p:style>
+        <p:txBody>
+          <a:bodyPr rtlCol="0" anchor="ctr"/>
+          <a:lstStyle/>
+          <a:p>
+            <a:pPr algn="ctr"/>
+          </a:p>
+        </p:txBody>
+      </p:sp>
+      <p:sp>
+        <p:nvSpPr>
+          <p:cNvPr id="8" name="TextBox 7"/>
           <p:cNvSpPr txBox="1"/>
           <p:nvPr/>
         </p:nvSpPr>
         <p:spPr>
           <a:xfrm>
-            <a:off x="822960" y="1920240"/>
+            <a:off x="822960" y="1965960"/>
             <a:ext cx="4983480" cy="4206240"/>
           </a:xfrm>
           <a:prstGeom prst="rect">
@@ -11651,17 +13001,17 @@
           <a:p>
             <a:pPr>
               <a:spcAft>
-                <a:spcPts val="1000"/>
+                <a:spcPts val="1100"/>
               </a:spcAft>
             </a:pPr>
             <a:r>
               <a:rPr sz="1600" b="1" i="0">
                 <a:solidFill>
-                  <a:srgbClr val="2E3A80"/>
-                </a:solidFill>
-                <a:latin typeface="Montserrat"/>
-              </a:rPr>
-              <a:t>•  </a:t>
+                  <a:srgbClr val="E8801A"/>
+                </a:solidFill>
+                <a:latin typeface="Montserrat"/>
+              </a:rPr>
+              <a:t>▸  </a:t>
             </a:r>
             <a:r>
               <a:rPr sz="1600" b="0" i="0">
@@ -11670,23 +13020,23 @@
                 </a:solidFill>
                 <a:latin typeface="Montserrat"/>
               </a:rPr>
-              <a:t>Extracción mecánica continua</a:t>
+              <a:t>∑Qₙ ≤ 16 kW → 8 m³</a:t>
             </a:r>
           </a:p>
           <a:p>
             <a:pPr>
               <a:spcAft>
-                <a:spcPts val="1000"/>
+                <a:spcPts val="1100"/>
               </a:spcAft>
             </a:pPr>
             <a:r>
               <a:rPr sz="1600" b="1" i="0">
                 <a:solidFill>
-                  <a:srgbClr val="2E3A80"/>
-                </a:solidFill>
-                <a:latin typeface="Montserrat"/>
-              </a:rPr>
-              <a:t>•  </a:t>
+                  <a:srgbClr val="E8801A"/>
+                </a:solidFill>
+                <a:latin typeface="Montserrat"/>
+              </a:rPr>
+              <a:t>▸  </a:t>
             </a:r>
             <a:r>
               <a:rPr sz="1600" b="0" i="0">
@@ -11695,23 +13045,23 @@
                 </a:solidFill>
                 <a:latin typeface="Montserrat"/>
               </a:rPr>
-              <a:t>Corte de gas si falla el extractor</a:t>
+              <a:t>∑Qₙ &gt; 16 kW → Q̄ₙ − 8</a:t>
             </a:r>
           </a:p>
           <a:p>
             <a:pPr>
               <a:spcAft>
-                <a:spcPts val="1000"/>
+                <a:spcPts val="1100"/>
               </a:spcAft>
             </a:pPr>
             <a:r>
               <a:rPr sz="1600" b="1" i="0">
                 <a:solidFill>
-                  <a:srgbClr val="2E3A80"/>
-                </a:solidFill>
-                <a:latin typeface="Montserrat"/>
-              </a:rPr>
-              <a:t>•  </a:t>
+                  <a:srgbClr val="E8801A"/>
+                </a:solidFill>
+                <a:latin typeface="Montserrat"/>
+              </a:rPr>
+              <a:t>▸  </a:t>
             </a:r>
             <a:r>
               <a:rPr sz="1600" b="0" i="0">
@@ -11720,14 +13070,14 @@
                 </a:solidFill>
                 <a:latin typeface="Montserrat"/>
               </a:rPr>
-              <a:t>q = 10·A + 2·Qₙ (m³/h)</a:t>
-            </a:r>
-          </a:p>
-        </p:txBody>
-      </p:sp>
-      <p:sp>
-        <p:nvSpPr>
-          <p:cNvPr id="8" name="imgph" descr="IMGQ:commercial kitchen ventilation duct"/>
+              <a:t>Volumen bruto: sin restar muebles</a:t>
+            </a:r>
+          </a:p>
+        </p:txBody>
+      </p:sp>
+      <p:sp>
+        <p:nvSpPr>
+          <p:cNvPr id="9" name="imgph" descr="IMGQ:gas cooktop with pots"/>
           <p:cNvSpPr/>
           <p:nvPr/>
         </p:nvSpPr>
@@ -11773,7 +13123,7 @@
       </p:sp>
       <p:sp>
         <p:nvSpPr>
-          <p:cNvPr id="9" name="TextBox 8"/>
+          <p:cNvPr id="10" name="TextBox 9"/>
           <p:cNvSpPr txBox="1"/>
           <p:nvPr/>
         </p:nvSpPr>
@@ -11813,7 +13163,7 @@
                 </a:solidFill>
                 <a:latin typeface="Montserrat"/>
               </a:rPr>
-              <a:t>commercial kitchen ventilation duct</a:t>
+              <a:t>gas cooktop with pots</a:t>
             </a:r>
           </a:p>
         </p:txBody>
@@ -11910,7 +13260,7 @@
                 </a:solidFill>
                 <a:latin typeface="Montserrat"/>
               </a:rPr>
-              <a:t>008 / 020</a:t>
+              <a:t>008 / 021</a:t>
             </a:r>
           </a:p>
         </p:txBody>
@@ -11958,7 +13308,7 @@
         <p:spPr>
           <a:xfrm>
             <a:off x="822960" y="457200"/>
-            <a:ext cx="8229600" cy="365760"/>
+            <a:ext cx="10058400" cy="365760"/>
           </a:xfrm>
           <a:prstGeom prst="rect">
             <a:avLst/>
@@ -11972,13 +13322,13 @@
           <a:lstStyle/>
           <a:p>
             <a:r>
-              <a:rPr sz="1200" b="1" i="0">
-                <a:solidFill>
-                  <a:srgbClr val="64748B"/>
-                </a:solidFill>
-                <a:latin typeface="Montserrat"/>
-              </a:rPr>
-              <a:t>VOLUMEN · TIPO A CALEFACCIÓN</a:t>
+              <a:rPr sz="1300" b="1" i="0">
+                <a:solidFill>
+                  <a:srgbClr val="E8801A"/>
+                </a:solidFill>
+                <a:latin typeface="Montserrat"/>
+              </a:rPr>
+              <a:t>VOLUMEN · EXTRACCIÓN</a:t>
             </a:r>
           </a:p>
         </p:txBody>
@@ -12006,26 +13356,70 @@
           <a:lstStyle/>
           <a:p>
             <a:r>
-              <a:rPr sz="2700" b="1" i="0">
+              <a:rPr sz="2800" b="1" i="0">
                 <a:solidFill>
                   <a:srgbClr val="1E2761"/>
                 </a:solidFill>
                 <a:latin typeface="Montserrat"/>
               </a:rPr>
-              <a:t>Calefacción de tipo A: ×11</a:t>
-            </a:r>
-          </a:p>
-        </p:txBody>
-      </p:sp>
-      <p:sp>
-        <p:nvSpPr>
-          <p:cNvPr id="7" name="TextBox 6"/>
+              <a:t>Por encima de 30 kW: extracción</a:t>
+            </a:r>
+          </a:p>
+        </p:txBody>
+      </p:sp>
+      <p:sp>
+        <p:nvSpPr>
+          <p:cNvPr id="7" name="Rounded Rectangle 6"/>
+          <p:cNvSpPr/>
+          <p:nvPr/>
+        </p:nvSpPr>
+        <p:spPr>
+          <a:xfrm>
+            <a:off x="868680" y="1627632"/>
+            <a:ext cx="2011680" cy="73152"/>
+          </a:xfrm>
+          <a:prstGeom prst="roundRect">
+            <a:avLst/>
+          </a:prstGeom>
+          <a:solidFill>
+            <a:srgbClr val="E8801A"/>
+          </a:solidFill>
+          <a:ln>
+            <a:noFill/>
+          </a:ln>
+          <a:effectLst/>
+        </p:spPr>
+        <p:style>
+          <a:lnRef idx="1">
+            <a:schemeClr val="accent1"/>
+          </a:lnRef>
+          <a:fillRef idx="3">
+            <a:schemeClr val="accent1"/>
+          </a:fillRef>
+          <a:effectRef idx="2">
+            <a:schemeClr val="accent1"/>
+          </a:effectRef>
+          <a:fontRef idx="minor">
+            <a:schemeClr val="lt1"/>
+          </a:fontRef>
+        </p:style>
+        <p:txBody>
+          <a:bodyPr rtlCol="0" anchor="ctr"/>
+          <a:lstStyle/>
+          <a:p>
+            <a:pPr algn="ctr"/>
+          </a:p>
+        </p:txBody>
+      </p:sp>
+      <p:sp>
+        <p:nvSpPr>
+          <p:cNvPr id="8" name="TextBox 7"/>
           <p:cNvSpPr txBox="1"/>
           <p:nvPr/>
         </p:nvSpPr>
         <p:spPr>
           <a:xfrm>
-            <a:off x="822960" y="1920240"/>
+            <a:off x="822960" y="1965960"/>
             <a:ext cx="4983480" cy="4206240"/>
           </a:xfrm>
           <a:prstGeom prst="rect">
@@ -12041,17 +13435,17 @@
           <a:p>
             <a:pPr>
               <a:spcAft>
-                <a:spcPts val="1000"/>
+                <a:spcPts val="1100"/>
               </a:spcAft>
             </a:pPr>
             <a:r>
               <a:rPr sz="1600" b="1" i="0">
                 <a:solidFill>
-                  <a:srgbClr val="2E3A80"/>
-                </a:solidFill>
-                <a:latin typeface="Montserrat"/>
-              </a:rPr>
-              <a:t>•  </a:t>
+                  <a:srgbClr val="E8801A"/>
+                </a:solidFill>
+                <a:latin typeface="Montserrat"/>
+              </a:rPr>
+              <a:t>▸  </a:t>
             </a:r>
             <a:r>
               <a:rPr sz="1600" b="0" i="0">
@@ -12060,23 +13454,23 @@
                 </a:solidFill>
                 <a:latin typeface="Montserrat"/>
               </a:rPr>
-              <a:t>V = 11 · Qₙ, mínimo 15 m³</a:t>
+              <a:t>Extracción mecánica continua</a:t>
             </a:r>
           </a:p>
           <a:p>
             <a:pPr>
               <a:spcAft>
-                <a:spcPts val="1000"/>
+                <a:spcPts val="1100"/>
               </a:spcAft>
             </a:pPr>
             <a:r>
               <a:rPr sz="1600" b="1" i="0">
                 <a:solidFill>
-                  <a:srgbClr val="2E3A80"/>
-                </a:solidFill>
-                <a:latin typeface="Montserrat"/>
-              </a:rPr>
-              <a:t>•  </a:t>
+                  <a:srgbClr val="E8801A"/>
+                </a:solidFill>
+                <a:latin typeface="Montserrat"/>
+              </a:rPr>
+              <a:t>▸  </a:t>
             </a:r>
             <a:r>
               <a:rPr sz="1600" b="0" i="0">
@@ -12085,23 +13479,23 @@
                 </a:solidFill>
                 <a:latin typeface="Montserrat"/>
               </a:rPr>
-              <a:t>No lo apliques a una cocina</a:t>
+              <a:t>Corte de gas si falla el extractor</a:t>
             </a:r>
           </a:p>
           <a:p>
             <a:pPr>
               <a:spcAft>
-                <a:spcPts val="1000"/>
+                <a:spcPts val="1100"/>
               </a:spcAft>
             </a:pPr>
             <a:r>
               <a:rPr sz="1600" b="1" i="0">
                 <a:solidFill>
-                  <a:srgbClr val="2E3A80"/>
-                </a:solidFill>
-                <a:latin typeface="Montserrat"/>
-              </a:rPr>
-              <a:t>•  </a:t>
+                  <a:srgbClr val="E8801A"/>
+                </a:solidFill>
+                <a:latin typeface="Montserrat"/>
+              </a:rPr>
+              <a:t>▸  </a:t>
             </a:r>
             <a:r>
               <a:rPr sz="1600" b="0" i="0">
@@ -12110,14 +13504,14 @@
                 </a:solidFill>
                 <a:latin typeface="Montserrat"/>
               </a:rPr>
-              <a:t>Los dos usos a la vez: se suman</a:t>
-            </a:r>
-          </a:p>
-        </p:txBody>
-      </p:sp>
-      <p:sp>
-        <p:nvSpPr>
-          <p:cNvPr id="8" name="imgph" descr="IMGQ:gas heater in workshop"/>
+              <a:t>q = 10·A + 2·Qₙ (m³/h)</a:t>
+            </a:r>
+          </a:p>
+        </p:txBody>
+      </p:sp>
+      <p:sp>
+        <p:nvSpPr>
+          <p:cNvPr id="9" name="imgph" descr="IMGQ:commercial kitchen ventilation duct"/>
           <p:cNvSpPr/>
           <p:nvPr/>
         </p:nvSpPr>
@@ -12163,7 +13557,7 @@
       </p:sp>
       <p:sp>
         <p:nvSpPr>
-          <p:cNvPr id="9" name="TextBox 8"/>
+          <p:cNvPr id="10" name="TextBox 9"/>
           <p:cNvSpPr txBox="1"/>
           <p:nvPr/>
         </p:nvSpPr>
@@ -12203,7 +13597,7 @@
                 </a:solidFill>
                 <a:latin typeface="Montserrat"/>
               </a:rPr>
-              <a:t>gas heater in workshop</a:t>
+              <a:t>commercial kitchen ventilation duct</a:t>
             </a:r>
           </a:p>
         </p:txBody>
@@ -12300,7 +13694,7 @@
                 </a:solidFill>
                 <a:latin typeface="Montserrat"/>
               </a:rPr>
-              <a:t>009 / 020</a:t>
+              <a:t>009 / 021</a:t>
             </a:r>
           </a:p>
         </p:txBody>
@@ -12348,7 +13742,7 @@
         <p:spPr>
           <a:xfrm>
             <a:off x="822960" y="457200"/>
-            <a:ext cx="8229600" cy="365760"/>
+            <a:ext cx="10058400" cy="365760"/>
           </a:xfrm>
           <a:prstGeom prst="rect">
             <a:avLst/>
@@ -12362,13 +13756,13 @@
           <a:lstStyle/>
           <a:p>
             <a:r>
-              <a:rPr sz="1200" b="1" i="0">
-                <a:solidFill>
-                  <a:srgbClr val="64748B"/>
-                </a:solidFill>
-                <a:latin typeface="Montserrat"/>
-              </a:rPr>
-              <a:t>VOLUMEN · OBRA VIEJA</a:t>
+              <a:rPr sz="1300" b="1" i="0">
+                <a:solidFill>
+                  <a:srgbClr val="E8801A"/>
+                </a:solidFill>
+                <a:latin typeface="Montserrat"/>
+              </a:rPr>
+              <a:t>VOLUMEN · TIPO A CALEFACCIÓN</a:t>
             </a:r>
           </a:p>
         </p:txBody>
@@ -12396,26 +13790,70 @@
           <a:lstStyle/>
           <a:p>
             <a:r>
-              <a:rPr sz="2700" b="1" i="0">
+              <a:rPr sz="2800" b="1" i="0">
                 <a:solidFill>
                   <a:srgbClr val="1E2761"/>
                 </a:solidFill>
                 <a:latin typeface="Montserrat"/>
               </a:rPr>
-              <a:t>Edificios ya construidos</a:t>
-            </a:r>
-          </a:p>
-        </p:txBody>
-      </p:sp>
-      <p:sp>
-        <p:nvSpPr>
-          <p:cNvPr id="7" name="TextBox 6"/>
+              <a:t>Calefacción de tipo A: ×11</a:t>
+            </a:r>
+          </a:p>
+        </p:txBody>
+      </p:sp>
+      <p:sp>
+        <p:nvSpPr>
+          <p:cNvPr id="7" name="Rounded Rectangle 6"/>
+          <p:cNvSpPr/>
+          <p:nvPr/>
+        </p:nvSpPr>
+        <p:spPr>
+          <a:xfrm>
+            <a:off x="868680" y="1627632"/>
+            <a:ext cx="2011680" cy="73152"/>
+          </a:xfrm>
+          <a:prstGeom prst="roundRect">
+            <a:avLst/>
+          </a:prstGeom>
+          <a:solidFill>
+            <a:srgbClr val="E8801A"/>
+          </a:solidFill>
+          <a:ln>
+            <a:noFill/>
+          </a:ln>
+          <a:effectLst/>
+        </p:spPr>
+        <p:style>
+          <a:lnRef idx="1">
+            <a:schemeClr val="accent1"/>
+          </a:lnRef>
+          <a:fillRef idx="3">
+            <a:schemeClr val="accent1"/>
+          </a:fillRef>
+          <a:effectRef idx="2">
+            <a:schemeClr val="accent1"/>
+          </a:effectRef>
+          <a:fontRef idx="minor">
+            <a:schemeClr val="lt1"/>
+          </a:fontRef>
+        </p:style>
+        <p:txBody>
+          <a:bodyPr rtlCol="0" anchor="ctr"/>
+          <a:lstStyle/>
+          <a:p>
+            <a:pPr algn="ctr"/>
+          </a:p>
+        </p:txBody>
+      </p:sp>
+      <p:sp>
+        <p:nvSpPr>
+          <p:cNvPr id="8" name="TextBox 7"/>
           <p:cNvSpPr txBox="1"/>
           <p:nvPr/>
         </p:nvSpPr>
         <p:spPr>
           <a:xfrm>
-            <a:off x="822960" y="1920240"/>
+            <a:off x="822960" y="1965960"/>
             <a:ext cx="4983480" cy="4206240"/>
           </a:xfrm>
           <a:prstGeom prst="rect">
@@ -12431,17 +13869,17 @@
           <a:p>
             <a:pPr>
               <a:spcAft>
-                <a:spcPts val="1000"/>
+                <a:spcPts val="1100"/>
               </a:spcAft>
             </a:pPr>
             <a:r>
               <a:rPr sz="1600" b="1" i="0">
                 <a:solidFill>
-                  <a:srgbClr val="2E3A80"/>
-                </a:solidFill>
-                <a:latin typeface="Montserrat"/>
-              </a:rPr>
-              <a:t>•  </a:t>
+                  <a:srgbClr val="E8801A"/>
+                </a:solidFill>
+                <a:latin typeface="Montserrat"/>
+              </a:rPr>
+              <a:t>▸  </a:t>
             </a:r>
             <a:r>
               <a:rPr sz="1600" b="0" i="0">
@@ -12450,23 +13888,23 @@
                 </a:solidFill>
                 <a:latin typeface="Montserrat"/>
               </a:rPr>
-              <a:t>75-100% del volumen: +50% de rejilla</a:t>
+              <a:t>V = 11 · Qₙ, mínimo 15 m³</a:t>
             </a:r>
           </a:p>
           <a:p>
             <a:pPr>
               <a:spcAft>
-                <a:spcPts val="1000"/>
+                <a:spcPts val="1100"/>
               </a:spcAft>
             </a:pPr>
             <a:r>
               <a:rPr sz="1600" b="1" i="0">
                 <a:solidFill>
-                  <a:srgbClr val="2E3A80"/>
-                </a:solidFill>
-                <a:latin typeface="Montserrat"/>
-              </a:rPr>
-              <a:t>•  </a:t>
+                  <a:srgbClr val="E8801A"/>
+                </a:solidFill>
+                <a:latin typeface="Montserrat"/>
+              </a:rPr>
+              <a:t>▸  </a:t>
             </a:r>
             <a:r>
               <a:rPr sz="1600" b="0" i="0">
@@ -12475,23 +13913,23 @@
                 </a:solidFill>
                 <a:latin typeface="Montserrat"/>
               </a:rPr>
-              <a:t>50-75%: además detector de CO</a:t>
+              <a:t>No lo apliques a una cocina</a:t>
             </a:r>
           </a:p>
           <a:p>
             <a:pPr>
               <a:spcAft>
-                <a:spcPts val="1000"/>
+                <a:spcPts val="1100"/>
               </a:spcAft>
             </a:pPr>
             <a:r>
               <a:rPr sz="1600" b="1" i="0">
                 <a:solidFill>
-                  <a:srgbClr val="2E3A80"/>
-                </a:solidFill>
-                <a:latin typeface="Montserrat"/>
-              </a:rPr>
-              <a:t>•  </a:t>
+                  <a:srgbClr val="E8801A"/>
+                </a:solidFill>
+                <a:latin typeface="Montserrat"/>
+              </a:rPr>
+              <a:t>▸  </a:t>
             </a:r>
             <a:r>
               <a:rPr sz="1600" b="0" i="0">
@@ -12500,14 +13938,14 @@
                 </a:solidFill>
                 <a:latin typeface="Montserrat"/>
               </a:rPr>
-              <a:t>Nunca por debajo de 6 m³</a:t>
-            </a:r>
-          </a:p>
-        </p:txBody>
-      </p:sp>
-      <p:sp>
-        <p:nvSpPr>
-          <p:cNvPr id="8" name="imgph" descr="IMGQ:old apartment kitchen renovation"/>
+              <a:t>Los dos usos a la vez: se suman</a:t>
+            </a:r>
+          </a:p>
+        </p:txBody>
+      </p:sp>
+      <p:sp>
+        <p:nvSpPr>
+          <p:cNvPr id="9" name="imgph" descr="IMGQ:gas heater in workshop"/>
           <p:cNvSpPr/>
           <p:nvPr/>
         </p:nvSpPr>
@@ -12553,7 +13991,7 @@
       </p:sp>
       <p:sp>
         <p:nvSpPr>
-          <p:cNvPr id="9" name="TextBox 8"/>
+          <p:cNvPr id="10" name="TextBox 9"/>
           <p:cNvSpPr txBox="1"/>
           <p:nvPr/>
         </p:nvSpPr>
@@ -12593,7 +14031,7 @@
                 </a:solidFill>
                 <a:latin typeface="Montserrat"/>
               </a:rPr>
-              <a:t>old apartment kitchen renovation</a:t>
+              <a:t>gas heater in workshop</a:t>
             </a:r>
           </a:p>
         </p:txBody>

--- a/Curso Gas B/13 - UNE 60670 - Ventilacion y evacuacion de humos/13 - UNE 60670 - Ventilacion y evacuacion de humos - Vídeo 2.pptx
+++ b/Curso Gas B/13 - UNE 60670 - Ventilacion y evacuacion de humos/13 - UNE 60670 - Ventilacion y evacuacion de humos - Vídeo 2.pptx
@@ -606,12 +606,17 @@
           <a:lstStyle/>
           <a:p>
             <a:r>
-              <a:t>N1: ¿Por qué doce?</a:t>
-            </a:r>
-          </a:p>
-          <a:p>
-            <a:r>
-              <a:t>N2: Porque al superar los dieciséis kilovatios el volumen mínimo ya no es el fijo de ocho metros cúbicos, sino la potencia menos ocho, tomada como metros cúbicos: veinte menos ocho, doce. El error típico es quedarse en el ocho, o poner los veinte directos. El truco: por debajo de dieciséis, ocho fijo; por encima, resta ocho a los kilovatios.</a:t>
+              <a:t>N2: La respuesta correcta es la opción B: doce metros cúbicos. Al superar los dieciséis kilovatios, el volumen mínimo ya no es el fijo de ocho metros cúbicos, sino la potencia menos ocho, tomada como metros cúbicos: veinte menos ocho, doce.</a:t>
+            </a:r>
+          </a:p>
+          <a:p>
+            <a:r>
+              <a:t>N1: ¿Dónde falla la gente?</a:t>
+            </a:r>
+          </a:p>
+          <a:p>
+            <a:r>
+              <a:t>N2: En quedarse en el ocho de la primera fila, o en poner los veinte directos. El truco: por debajo de dieciséis, ocho fijo; por encima, resta ocho a los kilovatios.</a:t>
             </a:r>
           </a:p>
         </p:txBody>
@@ -1581,12 +1586,12 @@
           <a:lstStyle/>
           <a:p>
             <a:r>
-              <a:t>N1: La regla de oro en acción. Veinte kilovatios entre tipo A y tipo B, ¿cuánta rejilla?</a:t>
-            </a:r>
-          </a:p>
-          <a:p>
-            <a:r>
-              <a:t>N2: Haz la multiplicación, y luego acuérdate de que hay un suelo que no se puede bajar.</a:t>
+              <a:t>N1: La regla de oro en acción. Escucha: un local con veinte kilovatios entre tipo A y tipo B; ¿qué superficie libre de ventilación pones? Y las cuatro opciones. Opción A: cien centímetros cuadrados. Opción B: ciento veinticinco centímetros cuadrados. Opción C: ciento cincuenta centímetros cuadrados. Opción D: doscientos centímetros cuadrados.</a:t>
+            </a:r>
+          </a:p>
+          <a:p>
+            <a:r>
+              <a:t>N2: Haz la multiplicación y párala un momento. Pista: acuérdate de que hay un suelo mínimo que no se puede bajar.</a:t>
             </a:r>
           </a:p>
         </p:txBody>
@@ -1656,12 +1661,17 @@
           <a:lstStyle/>
           <a:p>
             <a:r>
-              <a:t>N1: ¿Por qué ciento veinticinco y no cien?</a:t>
-            </a:r>
-          </a:p>
-          <a:p>
-            <a:r>
-              <a:t>N2: Porque cinco centímetros cuadrados por cada kilovatio dan cien, pero la norma fija un mínimo de ciento veinticinco centímetros cuadrados aunque salga menos. Como cien es menor que ciento veinticinco, manda el mínimo: pones ciento veinticinco. El truco: calcula cinco por kilovatio, y si el resultado baja de ciento veinticinco, sube a ciento veinticinco.</a:t>
+              <a:t>N2: La respuesta correcta es la opción B: ciento veinticinco centímetros cuadrados. Cinco centímetros cuadrados por cada kilovatio dan cien, pero la norma fija un mínimo de ciento veinticinco aunque salga menos. Como cien es menor que ciento veinticinco, manda el mínimo.</a:t>
+            </a:r>
+          </a:p>
+          <a:p>
+            <a:r>
+              <a:t>N1: ¿El truco?</a:t>
+            </a:r>
+          </a:p>
+          <a:p>
+            <a:r>
+              <a:t>N2: Calcula cinco por kilovatio, y si el resultado baja de ciento veinticinco, súbelo a ciento veinticinco.</a:t>
             </a:r>
           </a:p>
         </p:txBody>
@@ -1811,7 +1821,7 @@
           </a:p>
           <a:p>
             <a:r>
-              <a:t>N2: El gas natural es ligero y sube, así que la abertura va arriba: su extremo inferior a un metro ochenta o más del suelo y a cuarenta centímetros o menos del techo. Si el local solo tiene aparatos conducidos de tipo B, o poco tipo A, con una sola abertura arriba basta, directa o indirecta; en edificios ya construidos se relaja la altura. Pero cuando hay bastante tipo A, por encima de dieciséis kilovatios, necesitas dos aberturas, cada una de al menos la mitad de la sección calculada: una abajo, con su extremo superior a cincuenta centímetros o menos del suelo, y otra arriba. Y ahí la de arriba tiene que ser directa sí o sí, porque los humos calientes tienen que salir de verdad al exterior. Ejemplo: en una cocina con calentador y varios fuegos que sumen más de dieciséis kilovatios, pones rejilla abajo y rejilla arriba, la de arriba dando a la calle.</a:t>
+              <a:t>N2: Presta atención a esta tabla; es la de ubicación de aberturas para gas natural, que al ser ligero sube, así que la abertura va arriba. Tiene tres columnas según lo que haya en el local. Primera columna, solo aparatos conducidos de tipo B: basta una abertura arriba, con su extremo inferior a un metro ochenta o más del suelo y a cuarenta centímetros o menos del techo; en edificios ya construidos se relaja la altura, y vale ventilación directa o indirecta. Segunda columna, mezcla de tipo A y B, o solo tipo A, sumando el tipo A dieciséis kilovatios o menos: mismo criterio, una abertura arriba. Tercera columna, cuando el tipo A pasa de dieciséis kilovatios: ya hacen falta dos aberturas, cada una de al menos la mitad de la sección calculada; una abajo, con su extremo superior a cincuenta centímetros o menos del suelo, y otra arriba, y esa de arriba tiene que ser directa sí o sí, porque los humos calientes tienen que salir de verdad al exterior. Ejemplo: en una cocina con calentador y varios fuegos que sumen más de dieciséis kilovatios, pones rejilla abajo y rejilla arriba, la de arriba dando a la calle.</a:t>
             </a:r>
           </a:p>
         </p:txBody>
@@ -1886,7 +1896,7 @@
           </a:p>
           <a:p>
             <a:r>
-              <a:t>N2: Cambia, y mucho, porque el GLP es más pesado que el aire y baja: se acumula a ras de suelo. Por eso siempre hay una abertura abajo, con su extremo inferior a quince centímetros o menos del suelo, por donde escaparía el gas fugado. Si solo hay aparatos conducidos de tipo B, con esa abertura baja basta. En cuanto hay tipo A, aparece también una abertura arriba, a un metro ochenta o más del suelo, para sacar los humos; y con mucho tipo A, por encima de dieciséis kilovatios, la de arriba tiene que ser directa. Idea clave de toda la tabla dos: la ventilación se coloca donde se acumula el gas si hay fuga. Gas natural arriba porque sube; GLP abajo porque baja.</a:t>
+              <a:t>N2: Presta atención a esta tabla, la gemela para el GLP; como el butano y el propano pesan más que el aire y bajan, aquí siempre hay una abertura abajo. Tres columnas otra vez. Primera columna, solo aparatos conducidos de tipo B: una única abertura abajo, con su extremo inferior a quince centímetros o menos del suelo, directa o indirecta. Segunda columna, mezcla de tipo A y B o solo tipo A con el tipo A hasta dieciséis kilovatios: dos aberturas, cada una de al menos media sección; la de abajo a quince centímetros o menos del suelo y la de arriba a un metro ochenta o más, para sacar los humos. Tercera columna, tipo A por encima de dieciséis kilovatios: igual, dos aberturas, pero la de arriba tiene que ser directa. Idea clave de toda la tabla dos: la ventilación se coloca donde se acumula el gas si hay fuga. Gas natural arriba porque sube; GLP abajo porque baja.</a:t>
             </a:r>
           </a:p>
         </p:txBody>
@@ -1956,12 +1966,12 @@
           <a:lstStyle/>
           <a:p>
             <a:r>
-              <a:t>N1: Butano en el local. ¿La rejilla arriba o abajo?</a:t>
-            </a:r>
-          </a:p>
-          <a:p>
-            <a:r>
-              <a:t>N2: Piensa en qué hace ese gas si se escapa, ¿sube o se queda por el suelo?</a:t>
+              <a:t>N1: Atento a la pregunta: en un local con GLP, con butano, ¿dónde se coloca la abertura de ventilación? Y las cuatro opciones. Opción A: arriba, cerca del techo. Opción B: abajo, cerca del suelo. Opción C: en el centro de la pared. Opción D: da igual la altura.</a:t>
+            </a:r>
+          </a:p>
+          <a:p>
+            <a:r>
+              <a:t>N2: Piénsalo un segundo. Pista: ¿qué hace ese gas si se escapa, sube o se queda por el suelo?</a:t>
             </a:r>
           </a:p>
         </p:txBody>
@@ -2031,12 +2041,17 @@
           <a:lstStyle/>
           <a:p>
             <a:r>
-              <a:t>N1: ¿Por qué abajo?</a:t>
-            </a:r>
-          </a:p>
-          <a:p>
-            <a:r>
-              <a:t>N2: Porque el GLP, butano o propano, pesa más que el aire y baja: se acumula a ras de suelo. La abertura se pone donde se junta el gas, o sea abajo, a quince centímetros o menos del suelo. Con el gas natural sería justo al revés, arriba, porque sube. El truco: la ventilación se coloca donde se acumularía la fuga. Ligero arriba, pesado abajo.</a:t>
+              <a:t>N2: La respuesta correcta es la opción B: abajo, cerca del suelo. El GLP, butano o propano, pesa más que el aire y baja, se acumula a ras de suelo, así que la abertura se pone donde se junta el gas: abajo, a quince centímetros o menos del suelo. Con el gas natural sería justo al revés, arriba, porque sube.</a:t>
+            </a:r>
+          </a:p>
+          <a:p>
+            <a:r>
+              <a:t>N1: ¿La regla que no falla?</a:t>
+            </a:r>
+          </a:p>
+          <a:p>
+            <a:r>
+              <a:t>N2: La ventilación se coloca donde se acumularía la fuga. Ligero arriba, pesado abajo.</a:t>
             </a:r>
           </a:p>
         </p:txBody>
@@ -2637,7 +2652,7 @@
           </a:p>
           <a:p>
             <a:r>
-              <a:t>N2: Lo da la tabla uno, y es corta. Primero sumas el consumo de todos los aparatos de tipo A que no sean de calefacción del local. Si esa suma es de dieciséis kilovatios o menos, basta con ocho metros cúbicos. Si pasa de dieciséis, el volumen mínimo es ese número de kilovatios menos ocho, tomado como metros cúbicos. Ejemplo de obra: una cocina que sume veinte kilovatios pide veinte menos ocho, doce metros cúbicos. Y recuerda que es volumen bruto: se mide entre paredes, sin descontar la nevera ni los muebles.</a:t>
+              <a:t>N2: Presta atención a esta tabla, la tabla uno; tiene dos filas y te da el volumen bruto mínimo según el consumo. Primera fila: si la suma del consumo de los aparatos de tipo A que no son de calefacción es de dieciséis kilovatios o menos, el volumen mínimo es ocho metros cúbicos, un valor fijo. Segunda fila: si esa suma pasa de dieciséis kilovatios, el volumen mínimo es el número de kilovatios menos ocho, tomado como metros cúbicos. Ejemplo de obra: una cocina que sume veinte kilovatios cae en la segunda fila, veinte menos ocho, doce metros cúbicos. Y recuerda que es volumen bruto: se mide entre paredes, sin descontar la nevera ni los muebles.</a:t>
             </a:r>
           </a:p>
         </p:txBody>
@@ -2707,12 +2722,12 @@
           <a:lstStyle/>
           <a:p>
             <a:r>
-              <a:t>N1: Vamos a calcular. Cocina de tipo A que suma veinte kilovatios, ¿cuánto volumen?</a:t>
-            </a:r>
-          </a:p>
-          <a:p>
-            <a:r>
-              <a:t>N2: Ojo, veinte pasa de dieciséis, así que no vale el ocho de tabla. Aplica la fórmula de la segunda fila.</a:t>
+              <a:t>N1: Vamos a calcular. Escucha el enunciado: una cocina de tipo A, no de calefacción, suma veinte kilovatios; ¿qué volumen bruto mínimo pide? Y las cuatro opciones. Opción A: ocho metros cúbicos. Opción B: doce metros cúbicos. Opción C: veinte metros cúbicos. Opción D: veintiocho metros cúbicos.</a:t>
+            </a:r>
+          </a:p>
+          <a:p>
+            <a:r>
+              <a:t>N2: Párala y haz la cuenta. Pista: veinte pasa de dieciséis, así que no vale el ocho fijo; aplica la fórmula de la segunda fila de la tabla.</a:t>
             </a:r>
           </a:p>
         </p:txBody>
